--- a/public/chat_files/estella_q4_executive_investor_deck_final.pptx
+++ b/public/chat_files/estella_q4_executive_investor_deck_final.pptx
@@ -12,6 +12,15 @@
     <p:sldId id="260" r:id="rId11"/>
     <p:sldId id="261" r:id="rId12"/>
     <p:sldId id="262" r:id="rId13"/>
+    <p:sldId id="263" r:id="rId14"/>
+    <p:sldId id="264" r:id="rId15"/>
+    <p:sldId id="265" r:id="rId16"/>
+    <p:sldId id="266" r:id="rId17"/>
+    <p:sldId id="267" r:id="rId18"/>
+    <p:sldId id="268" r:id="rId19"/>
+    <p:sldId id="269" r:id="rId20"/>
+    <p:sldId id="270" r:id="rId21"/>
+    <p:sldId id="271" r:id="rId22"/>
   </p:sldIdLst>
   <p:sldSz cx="12191695" cy="6858000" type="screen4x3"/>
   <p:notesSz cx="6858000" cy="9144000"/>
@@ -3171,7 +3180,7 @@
               </a:defRPr>
             </a:pPr>
             <a:r>
-              <a:t>CONFIDENTIAL BOARD BRIEFING · OCTOBER 2026</a:t>
+              <a:t>CONFIDENTIAL &amp; PROPRIETARY</a:t>
             </a:r>
           </a:p>
           <a:p>
@@ -3187,7 +3196,7 @@
               </a:defRPr>
             </a:pPr>
             <a:r>
-              <a:t>Williams Logistics Network · Q4 2026 Strategic Review</a:t>
+              <a:t>InfiniAI Logistics Platform</a:t>
             </a:r>
           </a:p>
           <a:p>
@@ -3203,7 +3212,7 @@
               </a:defRPr>
             </a:pPr>
             <a:r>
-              <a:t>Presented by Estella Williams, Founder &amp; CEO · Enterprise Cross-Dock Telematics Platform</a:t>
+              <a:t>Q4 2026 Executive Investor Update · Board Briefing</a:t>
             </a:r>
           </a:p>
           <a:p>
@@ -3219,7 +3228,7 @@
               </a:defRPr>
             </a:pPr>
             <a:r>
-              <a:t>Board of Directors Review Copy · Series A Operational Update</a:t>
+              <a:t>Presented by Estella Williams, Founder &amp; CEO</a:t>
             </a:r>
           </a:p>
           <a:p>
@@ -3235,7 +3244,2156 @@
               </a:defRPr>
             </a:pPr>
             <a:r>
-              <a:t>Operating Across 180 Active Terminals in Texas, Midwest &amp; Gulf Corridors</a:t>
+              <a:t>Confidential Board of Directors Review · October 2026</a:t>
+            </a:r>
+          </a:p>
+        </p:txBody>
+      </p:sp>
+    </p:spTree>
+  </p:cSld>
+  <p:clrMapOvr>
+    <a:masterClrMapping/>
+  </p:clrMapOvr>
+</p:sld>
+</file>
+
+<file path=ppt/slides/slide10.xml><?xml version="1.0" encoding="utf-8"?>
+<p:sld xmlns:a="http://schemas.openxmlformats.org/drawingml/2006/main" xmlns:p="http://schemas.openxmlformats.org/presentationml/2006/main" xmlns:r="http://schemas.openxmlformats.org/officeDocument/2006/relationships">
+  <p:cSld>
+    <p:spTree>
+      <p:nvGrpSpPr>
+        <p:cNvPr id="1" name=""/>
+        <p:cNvGrpSpPr/>
+        <p:nvPr/>
+      </p:nvGrpSpPr>
+      <p:grpSpPr/>
+      <p:sp>
+        <p:nvSpPr>
+          <p:cNvPr id="2" name="Rectangle 1"/>
+          <p:cNvSpPr/>
+          <p:nvPr/>
+        </p:nvSpPr>
+        <p:spPr>
+          <a:xfrm>
+            <a:off x="0" y="0"/>
+            <a:ext cx="12191695" cy="6858000"/>
+          </a:xfrm>
+          <a:prstGeom prst="rect">
+            <a:avLst/>
+          </a:prstGeom>
+          <a:solidFill>
+            <a:srgbClr val="FFFFFF"/>
+          </a:solidFill>
+          <a:ln>
+            <a:noFill/>
+          </a:ln>
+        </p:spPr>
+        <p:style>
+          <a:lnRef idx="1">
+            <a:schemeClr val="accent1"/>
+          </a:lnRef>
+          <a:fillRef idx="3">
+            <a:schemeClr val="accent1"/>
+          </a:fillRef>
+          <a:effectRef idx="2">
+            <a:schemeClr val="accent1"/>
+          </a:effectRef>
+          <a:fontRef idx="minor">
+            <a:schemeClr val="lt1"/>
+          </a:fontRef>
+        </p:style>
+        <p:txBody>
+          <a:bodyPr rtlCol="0" anchor="ctr"/>
+          <a:lstStyle/>
+          <a:p>
+            <a:pPr algn="ctr"/>
+          </a:p>
+        </p:txBody>
+      </p:sp>
+      <p:sp>
+        <p:nvSpPr>
+          <p:cNvPr id="3" name="TextBox 2"/>
+          <p:cNvSpPr txBox="1"/>
+          <p:nvPr/>
+        </p:nvSpPr>
+        <p:spPr>
+          <a:xfrm>
+            <a:off x="731520" y="548640"/>
+            <a:ext cx="10698480" cy="1188720"/>
+          </a:xfrm>
+          <a:prstGeom prst="rect">
+            <a:avLst/>
+          </a:prstGeom>
+          <a:noFill/>
+        </p:spPr>
+        <p:txBody>
+          <a:bodyPr wrap="square">
+            <a:spAutoFit/>
+          </a:bodyPr>
+          <a:lstStyle/>
+          <a:p>
+            <a:pPr>
+              <a:spcAft>
+                <a:spcPts val="400"/>
+              </a:spcAft>
+              <a:defRPr sz="1000" b="1">
+                <a:solidFill>
+                  <a:srgbClr val="2563EB"/>
+                </a:solidFill>
+                <a:latin typeface="Calibri"/>
+              </a:defRPr>
+            </a:pPr>
+            <a:r>
+              <a:t>Q4 2026 EXECUTIVE INVESTOR UPDATE — ESTELLA WILLIA</a:t>
+            </a:r>
+          </a:p>
+          <a:p>
+            <a:pPr>
+              <a:defRPr sz="2200" b="1">
+                <a:solidFill>
+                  <a:srgbClr val="0F172A"/>
+                </a:solidFill>
+                <a:latin typeface="Calibri"/>
+              </a:defRPr>
+            </a:pPr>
+            <a:r>
+              <a:t>Security, Governance &amp; Compliance</a:t>
+            </a:r>
+          </a:p>
+          <a:p>
+            <a:pPr>
+              <a:spcBef>
+                <a:spcPts val="200"/>
+              </a:spcBef>
+              <a:defRPr sz="1200">
+                <a:solidFill>
+                  <a:srgbClr val="64748B"/>
+                </a:solidFill>
+                <a:latin typeface="Calibri"/>
+              </a:defRPr>
+            </a:pPr>
+            <a:r>
+              <a:t>Enterprise Trust Infrastructure</a:t>
+            </a:r>
+          </a:p>
+        </p:txBody>
+      </p:sp>
+      <p:sp>
+        <p:nvSpPr>
+          <p:cNvPr id="4" name="Rectangle 3"/>
+          <p:cNvSpPr/>
+          <p:nvPr/>
+        </p:nvSpPr>
+        <p:spPr>
+          <a:xfrm>
+            <a:off x="731520" y="1737360"/>
+            <a:ext cx="10698480" cy="13716"/>
+          </a:xfrm>
+          <a:prstGeom prst="rect">
+            <a:avLst/>
+          </a:prstGeom>
+          <a:solidFill>
+            <a:srgbClr val="E2E8F0"/>
+          </a:solidFill>
+          <a:ln>
+            <a:noFill/>
+          </a:ln>
+        </p:spPr>
+        <p:style>
+          <a:lnRef idx="1">
+            <a:schemeClr val="accent1"/>
+          </a:lnRef>
+          <a:fillRef idx="3">
+            <a:schemeClr val="accent1"/>
+          </a:fillRef>
+          <a:effectRef idx="2">
+            <a:schemeClr val="accent1"/>
+          </a:effectRef>
+          <a:fontRef idx="minor">
+            <a:schemeClr val="lt1"/>
+          </a:fontRef>
+        </p:style>
+        <p:txBody>
+          <a:bodyPr rtlCol="0" anchor="ctr"/>
+          <a:lstStyle/>
+          <a:p>
+            <a:pPr algn="ctr"/>
+          </a:p>
+        </p:txBody>
+      </p:sp>
+      <p:sp>
+        <p:nvSpPr>
+          <p:cNvPr id="5" name="TextBox 4"/>
+          <p:cNvSpPr txBox="1"/>
+          <p:nvPr/>
+        </p:nvSpPr>
+        <p:spPr>
+          <a:xfrm>
+            <a:off x="731520" y="2011680"/>
+            <a:ext cx="10698480" cy="4114800"/>
+          </a:xfrm>
+          <a:prstGeom prst="rect">
+            <a:avLst/>
+          </a:prstGeom>
+          <a:noFill/>
+        </p:spPr>
+        <p:txBody>
+          <a:bodyPr wrap="square">
+            <a:spAutoFit/>
+          </a:bodyPr>
+          <a:lstStyle/>
+          <a:p>
+            <a:pPr>
+              <a:lnSpc>
+                <a:spcPct val="125000"/>
+              </a:lnSpc>
+              <a:spcAft>
+                <a:spcPts val="1400"/>
+              </a:spcAft>
+              <a:defRPr sz="1500">
+                <a:solidFill>
+                  <a:srgbClr val="1E293B"/>
+                </a:solidFill>
+                <a:latin typeface="Calibri"/>
+              </a:defRPr>
+            </a:pPr>
+            <a:r>
+              <a:t>•  SOC-2 Type II report completed with zero material exceptions</a:t>
+            </a:r>
+          </a:p>
+          <a:p>
+            <a:pPr>
+              <a:lnSpc>
+                <a:spcPct val="125000"/>
+              </a:lnSpc>
+              <a:spcAft>
+                <a:spcPts val="1400"/>
+              </a:spcAft>
+              <a:defRPr sz="1500">
+                <a:solidFill>
+                  <a:srgbClr val="1E293B"/>
+                </a:solidFill>
+                <a:latin typeface="Calibri"/>
+              </a:defRPr>
+            </a:pPr>
+            <a:r>
+              <a:t>•  End-to-end 256-bit AES data encryption in transit and at rest</a:t>
+            </a:r>
+          </a:p>
+          <a:p>
+            <a:pPr>
+              <a:lnSpc>
+                <a:spcPct val="125000"/>
+              </a:lnSpc>
+              <a:spcAft>
+                <a:spcPts val="1400"/>
+              </a:spcAft>
+              <a:defRPr sz="1500">
+                <a:solidFill>
+                  <a:srgbClr val="1E293B"/>
+                </a:solidFill>
+                <a:latin typeface="Calibri"/>
+              </a:defRPr>
+            </a:pPr>
+            <a:r>
+              <a:t>•  Quarterly penetration tests executed by independent third-party auditor</a:t>
+            </a:r>
+          </a:p>
+          <a:p>
+            <a:pPr>
+              <a:lnSpc>
+                <a:spcPct val="125000"/>
+              </a:lnSpc>
+              <a:spcAft>
+                <a:spcPts val="1400"/>
+              </a:spcAft>
+              <a:defRPr sz="1500">
+                <a:solidFill>
+                  <a:srgbClr val="1E293B"/>
+                </a:solidFill>
+                <a:latin typeface="Calibri"/>
+              </a:defRPr>
+            </a:pPr>
+            <a:r>
+              <a:t>•  Automated role-based access control (RBAC) with granular audit logs</a:t>
+            </a:r>
+          </a:p>
+        </p:txBody>
+      </p:sp>
+      <p:sp>
+        <p:nvSpPr>
+          <p:cNvPr id="6" name="TextBox 5"/>
+          <p:cNvSpPr txBox="1"/>
+          <p:nvPr/>
+        </p:nvSpPr>
+        <p:spPr>
+          <a:xfrm>
+            <a:off x="731520" y="6309360"/>
+            <a:ext cx="10698480" cy="365760"/>
+          </a:xfrm>
+          <a:prstGeom prst="rect">
+            <a:avLst/>
+          </a:prstGeom>
+          <a:noFill/>
+        </p:spPr>
+        <p:txBody>
+          <a:bodyPr wrap="none">
+            <a:spAutoFit/>
+          </a:bodyPr>
+          <a:lstStyle/>
+          <a:p>
+            <a:pPr>
+              <a:defRPr sz="900">
+                <a:solidFill>
+                  <a:srgbClr val="94A3B8"/>
+                </a:solidFill>
+                <a:latin typeface="Calibri"/>
+              </a:defRPr>
+            </a:pPr>
+            <a:r>
+              <a:t>Q4 2026 Executive Investor Update — Estella Williams · Slide 10 of 16</a:t>
+            </a:r>
+          </a:p>
+        </p:txBody>
+      </p:sp>
+    </p:spTree>
+  </p:cSld>
+  <p:clrMapOvr>
+    <a:masterClrMapping/>
+  </p:clrMapOvr>
+</p:sld>
+</file>
+
+<file path=ppt/slides/slide11.xml><?xml version="1.0" encoding="utf-8"?>
+<p:sld xmlns:a="http://schemas.openxmlformats.org/drawingml/2006/main" xmlns:p="http://schemas.openxmlformats.org/presentationml/2006/main" xmlns:r="http://schemas.openxmlformats.org/officeDocument/2006/relationships">
+  <p:cSld>
+    <p:spTree>
+      <p:nvGrpSpPr>
+        <p:cNvPr id="1" name=""/>
+        <p:cNvGrpSpPr/>
+        <p:nvPr/>
+      </p:nvGrpSpPr>
+      <p:grpSpPr/>
+      <p:sp>
+        <p:nvSpPr>
+          <p:cNvPr id="2" name="Rectangle 1"/>
+          <p:cNvSpPr/>
+          <p:nvPr/>
+        </p:nvSpPr>
+        <p:spPr>
+          <a:xfrm>
+            <a:off x="0" y="0"/>
+            <a:ext cx="12191695" cy="6858000"/>
+          </a:xfrm>
+          <a:prstGeom prst="rect">
+            <a:avLst/>
+          </a:prstGeom>
+          <a:solidFill>
+            <a:srgbClr val="FFFFFF"/>
+          </a:solidFill>
+          <a:ln>
+            <a:noFill/>
+          </a:ln>
+        </p:spPr>
+        <p:style>
+          <a:lnRef idx="1">
+            <a:schemeClr val="accent1"/>
+          </a:lnRef>
+          <a:fillRef idx="3">
+            <a:schemeClr val="accent1"/>
+          </a:fillRef>
+          <a:effectRef idx="2">
+            <a:schemeClr val="accent1"/>
+          </a:effectRef>
+          <a:fontRef idx="minor">
+            <a:schemeClr val="lt1"/>
+          </a:fontRef>
+        </p:style>
+        <p:txBody>
+          <a:bodyPr rtlCol="0" anchor="ctr"/>
+          <a:lstStyle/>
+          <a:p>
+            <a:pPr algn="ctr"/>
+          </a:p>
+        </p:txBody>
+      </p:sp>
+      <p:sp>
+        <p:nvSpPr>
+          <p:cNvPr id="3" name="TextBox 2"/>
+          <p:cNvSpPr txBox="1"/>
+          <p:nvPr/>
+        </p:nvSpPr>
+        <p:spPr>
+          <a:xfrm>
+            <a:off x="731520" y="548640"/>
+            <a:ext cx="10698480" cy="1188720"/>
+          </a:xfrm>
+          <a:prstGeom prst="rect">
+            <a:avLst/>
+          </a:prstGeom>
+          <a:noFill/>
+        </p:spPr>
+        <p:txBody>
+          <a:bodyPr wrap="square">
+            <a:spAutoFit/>
+          </a:bodyPr>
+          <a:lstStyle/>
+          <a:p>
+            <a:pPr>
+              <a:spcAft>
+                <a:spcPts val="400"/>
+              </a:spcAft>
+              <a:defRPr sz="1000" b="1">
+                <a:solidFill>
+                  <a:srgbClr val="2563EB"/>
+                </a:solidFill>
+                <a:latin typeface="Calibri"/>
+              </a:defRPr>
+            </a:pPr>
+            <a:r>
+              <a:t>Q4 2026 EXECUTIVE INVESTOR UPDATE — ESTELLA WILLIA</a:t>
+            </a:r>
+          </a:p>
+          <a:p>
+            <a:pPr>
+              <a:defRPr sz="2200" b="1">
+                <a:solidFill>
+                  <a:srgbClr val="0F172A"/>
+                </a:solidFill>
+                <a:latin typeface="Calibri"/>
+              </a:defRPr>
+            </a:pPr>
+            <a:r>
+              <a:t>Carrier Fleet Tier Economics</a:t>
+            </a:r>
+          </a:p>
+          <a:p>
+            <a:pPr>
+              <a:spcBef>
+                <a:spcPts val="200"/>
+              </a:spcBef>
+              <a:defRPr sz="1200">
+                <a:solidFill>
+                  <a:srgbClr val="64748B"/>
+                </a:solidFill>
+                <a:latin typeface="Calibri"/>
+              </a:defRPr>
+            </a:pPr>
+            <a:r>
+              <a:t>Performance by Fleet Size Category</a:t>
+            </a:r>
+          </a:p>
+        </p:txBody>
+      </p:sp>
+      <p:sp>
+        <p:nvSpPr>
+          <p:cNvPr id="4" name="Rectangle 3"/>
+          <p:cNvSpPr/>
+          <p:nvPr/>
+        </p:nvSpPr>
+        <p:spPr>
+          <a:xfrm>
+            <a:off x="731520" y="1737360"/>
+            <a:ext cx="10698480" cy="13716"/>
+          </a:xfrm>
+          <a:prstGeom prst="rect">
+            <a:avLst/>
+          </a:prstGeom>
+          <a:solidFill>
+            <a:srgbClr val="E2E8F0"/>
+          </a:solidFill>
+          <a:ln>
+            <a:noFill/>
+          </a:ln>
+        </p:spPr>
+        <p:style>
+          <a:lnRef idx="1">
+            <a:schemeClr val="accent1"/>
+          </a:lnRef>
+          <a:fillRef idx="3">
+            <a:schemeClr val="accent1"/>
+          </a:fillRef>
+          <a:effectRef idx="2">
+            <a:schemeClr val="accent1"/>
+          </a:effectRef>
+          <a:fontRef idx="minor">
+            <a:schemeClr val="lt1"/>
+          </a:fontRef>
+        </p:style>
+        <p:txBody>
+          <a:bodyPr rtlCol="0" anchor="ctr"/>
+          <a:lstStyle/>
+          <a:p>
+            <a:pPr algn="ctr"/>
+          </a:p>
+        </p:txBody>
+      </p:sp>
+      <p:sp>
+        <p:nvSpPr>
+          <p:cNvPr id="5" name="TextBox 4"/>
+          <p:cNvSpPr txBox="1"/>
+          <p:nvPr/>
+        </p:nvSpPr>
+        <p:spPr>
+          <a:xfrm>
+            <a:off x="731520" y="2011680"/>
+            <a:ext cx="10698480" cy="4114800"/>
+          </a:xfrm>
+          <a:prstGeom prst="rect">
+            <a:avLst/>
+          </a:prstGeom>
+          <a:noFill/>
+        </p:spPr>
+        <p:txBody>
+          <a:bodyPr wrap="square">
+            <a:spAutoFit/>
+          </a:bodyPr>
+          <a:lstStyle/>
+          <a:p>
+            <a:pPr>
+              <a:lnSpc>
+                <a:spcPct val="125000"/>
+              </a:lnSpc>
+              <a:spcAft>
+                <a:spcPts val="1400"/>
+              </a:spcAft>
+              <a:defRPr sz="1500">
+                <a:solidFill>
+                  <a:srgbClr val="1E293B"/>
+                </a:solidFill>
+                <a:latin typeface="Calibri"/>
+              </a:defRPr>
+            </a:pPr>
+            <a:r>
+              <a:t>•  Tier 1 (5–20 Trucks): 38 fleets · $750/mo avg · 98% retention</a:t>
+            </a:r>
+          </a:p>
+          <a:p>
+            <a:pPr>
+              <a:lnSpc>
+                <a:spcPct val="125000"/>
+              </a:lnSpc>
+              <a:spcAft>
+                <a:spcPts val="1400"/>
+              </a:spcAft>
+              <a:defRPr sz="1500">
+                <a:solidFill>
+                  <a:srgbClr val="1E293B"/>
+                </a:solidFill>
+                <a:latin typeface="Calibri"/>
+              </a:defRPr>
+            </a:pPr>
+            <a:r>
+              <a:t>•  Tier 2 (21–50 Trucks): 21 fleets · $1,650/mo avg · 118% net expansion</a:t>
+            </a:r>
+          </a:p>
+          <a:p>
+            <a:pPr>
+              <a:lnSpc>
+                <a:spcPct val="125000"/>
+              </a:lnSpc>
+              <a:spcAft>
+                <a:spcPts val="1400"/>
+              </a:spcAft>
+              <a:defRPr sz="1500">
+                <a:solidFill>
+                  <a:srgbClr val="1E293B"/>
+                </a:solidFill>
+                <a:latin typeface="Calibri"/>
+              </a:defRPr>
+            </a:pPr>
+            <a:r>
+              <a:t>•  Tier 3 (50+ Trucks): 6 fleets · $3,200/mo avg · 140% net expansion</a:t>
+            </a:r>
+          </a:p>
+          <a:p>
+            <a:pPr>
+              <a:lnSpc>
+                <a:spcPct val="125000"/>
+              </a:lnSpc>
+              <a:spcAft>
+                <a:spcPts val="1400"/>
+              </a:spcAft>
+              <a:defRPr sz="1500">
+                <a:solidFill>
+                  <a:srgbClr val="1E293B"/>
+                </a:solidFill>
+                <a:latin typeface="Calibri"/>
+              </a:defRPr>
+            </a:pPr>
+            <a:r>
+              <a:t>•  Focus on Tier 2 expansion generates highest net contribution margin</a:t>
+            </a:r>
+          </a:p>
+        </p:txBody>
+      </p:sp>
+      <p:sp>
+        <p:nvSpPr>
+          <p:cNvPr id="6" name="TextBox 5"/>
+          <p:cNvSpPr txBox="1"/>
+          <p:nvPr/>
+        </p:nvSpPr>
+        <p:spPr>
+          <a:xfrm>
+            <a:off x="731520" y="6309360"/>
+            <a:ext cx="10698480" cy="365760"/>
+          </a:xfrm>
+          <a:prstGeom prst="rect">
+            <a:avLst/>
+          </a:prstGeom>
+          <a:noFill/>
+        </p:spPr>
+        <p:txBody>
+          <a:bodyPr wrap="none">
+            <a:spAutoFit/>
+          </a:bodyPr>
+          <a:lstStyle/>
+          <a:p>
+            <a:pPr>
+              <a:defRPr sz="900">
+                <a:solidFill>
+                  <a:srgbClr val="94A3B8"/>
+                </a:solidFill>
+                <a:latin typeface="Calibri"/>
+              </a:defRPr>
+            </a:pPr>
+            <a:r>
+              <a:t>Q4 2026 Executive Investor Update — Estella Williams · Slide 11 of 16</a:t>
+            </a:r>
+          </a:p>
+        </p:txBody>
+      </p:sp>
+    </p:spTree>
+  </p:cSld>
+  <p:clrMapOvr>
+    <a:masterClrMapping/>
+  </p:clrMapOvr>
+</p:sld>
+</file>
+
+<file path=ppt/slides/slide12.xml><?xml version="1.0" encoding="utf-8"?>
+<p:sld xmlns:a="http://schemas.openxmlformats.org/drawingml/2006/main" xmlns:p="http://schemas.openxmlformats.org/presentationml/2006/main" xmlns:r="http://schemas.openxmlformats.org/officeDocument/2006/relationships">
+  <p:cSld>
+    <p:spTree>
+      <p:nvGrpSpPr>
+        <p:cNvPr id="1" name=""/>
+        <p:cNvGrpSpPr/>
+        <p:nvPr/>
+      </p:nvGrpSpPr>
+      <p:grpSpPr/>
+      <p:sp>
+        <p:nvSpPr>
+          <p:cNvPr id="2" name="Rectangle 1"/>
+          <p:cNvSpPr/>
+          <p:nvPr/>
+        </p:nvSpPr>
+        <p:spPr>
+          <a:xfrm>
+            <a:off x="0" y="0"/>
+            <a:ext cx="12191695" cy="6858000"/>
+          </a:xfrm>
+          <a:prstGeom prst="rect">
+            <a:avLst/>
+          </a:prstGeom>
+          <a:solidFill>
+            <a:srgbClr val="FFFFFF"/>
+          </a:solidFill>
+          <a:ln>
+            <a:noFill/>
+          </a:ln>
+        </p:spPr>
+        <p:style>
+          <a:lnRef idx="1">
+            <a:schemeClr val="accent1"/>
+          </a:lnRef>
+          <a:fillRef idx="3">
+            <a:schemeClr val="accent1"/>
+          </a:fillRef>
+          <a:effectRef idx="2">
+            <a:schemeClr val="accent1"/>
+          </a:effectRef>
+          <a:fontRef idx="minor">
+            <a:schemeClr val="lt1"/>
+          </a:fontRef>
+        </p:style>
+        <p:txBody>
+          <a:bodyPr rtlCol="0" anchor="ctr"/>
+          <a:lstStyle/>
+          <a:p>
+            <a:pPr algn="ctr"/>
+          </a:p>
+        </p:txBody>
+      </p:sp>
+      <p:sp>
+        <p:nvSpPr>
+          <p:cNvPr id="3" name="TextBox 2"/>
+          <p:cNvSpPr txBox="1"/>
+          <p:nvPr/>
+        </p:nvSpPr>
+        <p:spPr>
+          <a:xfrm>
+            <a:off x="731520" y="548640"/>
+            <a:ext cx="10698480" cy="1188720"/>
+          </a:xfrm>
+          <a:prstGeom prst="rect">
+            <a:avLst/>
+          </a:prstGeom>
+          <a:noFill/>
+        </p:spPr>
+        <p:txBody>
+          <a:bodyPr wrap="square">
+            <a:spAutoFit/>
+          </a:bodyPr>
+          <a:lstStyle/>
+          <a:p>
+            <a:pPr>
+              <a:spcAft>
+                <a:spcPts val="400"/>
+              </a:spcAft>
+              <a:defRPr sz="1000" b="1">
+                <a:solidFill>
+                  <a:srgbClr val="2563EB"/>
+                </a:solidFill>
+                <a:latin typeface="Calibri"/>
+              </a:defRPr>
+            </a:pPr>
+            <a:r>
+              <a:t>Q4 2026 EXECUTIVE INVESTOR UPDATE — ESTELLA WILLIA</a:t>
+            </a:r>
+          </a:p>
+          <a:p>
+            <a:pPr>
+              <a:defRPr sz="2200" b="1">
+                <a:solidFill>
+                  <a:srgbClr val="0F172A"/>
+                </a:solidFill>
+                <a:latin typeface="Calibri"/>
+              </a:defRPr>
+            </a:pPr>
+            <a:r>
+              <a:t>2027 Headcount &amp; Organization Plan</a:t>
+            </a:r>
+          </a:p>
+          <a:p>
+            <a:pPr>
+              <a:spcBef>
+                <a:spcPts val="200"/>
+              </a:spcBef>
+              <a:defRPr sz="1200">
+                <a:solidFill>
+                  <a:srgbClr val="64748B"/>
+                </a:solidFill>
+                <a:latin typeface="Calibri"/>
+              </a:defRPr>
+            </a:pPr>
+            <a:r>
+              <a:t>Targeted Operational Scaling</a:t>
+            </a:r>
+          </a:p>
+        </p:txBody>
+      </p:sp>
+      <p:sp>
+        <p:nvSpPr>
+          <p:cNvPr id="4" name="Rectangle 3"/>
+          <p:cNvSpPr/>
+          <p:nvPr/>
+        </p:nvSpPr>
+        <p:spPr>
+          <a:xfrm>
+            <a:off x="731520" y="1737360"/>
+            <a:ext cx="10698480" cy="13716"/>
+          </a:xfrm>
+          <a:prstGeom prst="rect">
+            <a:avLst/>
+          </a:prstGeom>
+          <a:solidFill>
+            <a:srgbClr val="E2E8F0"/>
+          </a:solidFill>
+          <a:ln>
+            <a:noFill/>
+          </a:ln>
+        </p:spPr>
+        <p:style>
+          <a:lnRef idx="1">
+            <a:schemeClr val="accent1"/>
+          </a:lnRef>
+          <a:fillRef idx="3">
+            <a:schemeClr val="accent1"/>
+          </a:fillRef>
+          <a:effectRef idx="2">
+            <a:schemeClr val="accent1"/>
+          </a:effectRef>
+          <a:fontRef idx="minor">
+            <a:schemeClr val="lt1"/>
+          </a:fontRef>
+        </p:style>
+        <p:txBody>
+          <a:bodyPr rtlCol="0" anchor="ctr"/>
+          <a:lstStyle/>
+          <a:p>
+            <a:pPr algn="ctr"/>
+          </a:p>
+        </p:txBody>
+      </p:sp>
+      <p:sp>
+        <p:nvSpPr>
+          <p:cNvPr id="5" name="TextBox 4"/>
+          <p:cNvSpPr txBox="1"/>
+          <p:nvPr/>
+        </p:nvSpPr>
+        <p:spPr>
+          <a:xfrm>
+            <a:off x="731520" y="2011680"/>
+            <a:ext cx="10698480" cy="4114800"/>
+          </a:xfrm>
+          <a:prstGeom prst="rect">
+            <a:avLst/>
+          </a:prstGeom>
+          <a:noFill/>
+        </p:spPr>
+        <p:txBody>
+          <a:bodyPr wrap="square">
+            <a:spAutoFit/>
+          </a:bodyPr>
+          <a:lstStyle/>
+          <a:p>
+            <a:pPr>
+              <a:lnSpc>
+                <a:spcPct val="125000"/>
+              </a:lnSpc>
+              <a:spcAft>
+                <a:spcPts val="1400"/>
+              </a:spcAft>
+              <a:defRPr sz="1500">
+                <a:solidFill>
+                  <a:srgbClr val="1E293B"/>
+                </a:solidFill>
+                <a:latin typeface="Calibri"/>
+              </a:defRPr>
+            </a:pPr>
+            <a:r>
+              <a:t>•  Current Headcount: 14 FTEs (Engineering 7, Sales/CS 5, G&amp;A 2)</a:t>
+            </a:r>
+          </a:p>
+          <a:p>
+            <a:pPr>
+              <a:lnSpc>
+                <a:spcPct val="125000"/>
+              </a:lnSpc>
+              <a:spcAft>
+                <a:spcPts val="1400"/>
+              </a:spcAft>
+              <a:defRPr sz="1500">
+                <a:solidFill>
+                  <a:srgbClr val="1E293B"/>
+                </a:solidFill>
+                <a:latin typeface="Calibri"/>
+              </a:defRPr>
+            </a:pPr>
+            <a:r>
+              <a:t>•  Key Q1 Hires: VP of Enterprise Sales, Staff Distributed Systems Engineer</a:t>
+            </a:r>
+          </a:p>
+          <a:p>
+            <a:pPr>
+              <a:lnSpc>
+                <a:spcPct val="125000"/>
+              </a:lnSpc>
+              <a:spcAft>
+                <a:spcPts val="1400"/>
+              </a:spcAft>
+              <a:defRPr sz="1500">
+                <a:solidFill>
+                  <a:srgbClr val="1E293B"/>
+                </a:solidFill>
+                <a:latin typeface="Calibri"/>
+              </a:defRPr>
+            </a:pPr>
+            <a:r>
+              <a:t>•  Operational SOPs finalized for 4 core support &amp; dispatch roles</a:t>
+            </a:r>
+          </a:p>
+          <a:p>
+            <a:pPr>
+              <a:lnSpc>
+                <a:spcPct val="125000"/>
+              </a:lnSpc>
+              <a:spcAft>
+                <a:spcPts val="1400"/>
+              </a:spcAft>
+              <a:defRPr sz="1500">
+                <a:solidFill>
+                  <a:srgbClr val="1E293B"/>
+                </a:solidFill>
+                <a:latin typeface="Calibri"/>
+              </a:defRPr>
+            </a:pPr>
+            <a:r>
+              <a:t>•  Hiring plan gated strictly on achieving $4.8M ARR milestone</a:t>
+            </a:r>
+          </a:p>
+        </p:txBody>
+      </p:sp>
+      <p:sp>
+        <p:nvSpPr>
+          <p:cNvPr id="6" name="TextBox 5"/>
+          <p:cNvSpPr txBox="1"/>
+          <p:nvPr/>
+        </p:nvSpPr>
+        <p:spPr>
+          <a:xfrm>
+            <a:off x="731520" y="6309360"/>
+            <a:ext cx="10698480" cy="365760"/>
+          </a:xfrm>
+          <a:prstGeom prst="rect">
+            <a:avLst/>
+          </a:prstGeom>
+          <a:noFill/>
+        </p:spPr>
+        <p:txBody>
+          <a:bodyPr wrap="none">
+            <a:spAutoFit/>
+          </a:bodyPr>
+          <a:lstStyle/>
+          <a:p>
+            <a:pPr>
+              <a:defRPr sz="900">
+                <a:solidFill>
+                  <a:srgbClr val="94A3B8"/>
+                </a:solidFill>
+                <a:latin typeface="Calibri"/>
+              </a:defRPr>
+            </a:pPr>
+            <a:r>
+              <a:t>Q4 2026 Executive Investor Update — Estella Williams · Slide 12 of 16</a:t>
+            </a:r>
+          </a:p>
+        </p:txBody>
+      </p:sp>
+    </p:spTree>
+  </p:cSld>
+  <p:clrMapOvr>
+    <a:masterClrMapping/>
+  </p:clrMapOvr>
+</p:sld>
+</file>
+
+<file path=ppt/slides/slide13.xml><?xml version="1.0" encoding="utf-8"?>
+<p:sld xmlns:a="http://schemas.openxmlformats.org/drawingml/2006/main" xmlns:p="http://schemas.openxmlformats.org/presentationml/2006/main" xmlns:r="http://schemas.openxmlformats.org/officeDocument/2006/relationships">
+  <p:cSld>
+    <p:spTree>
+      <p:nvGrpSpPr>
+        <p:cNvPr id="1" name=""/>
+        <p:cNvGrpSpPr/>
+        <p:nvPr/>
+      </p:nvGrpSpPr>
+      <p:grpSpPr/>
+      <p:sp>
+        <p:nvSpPr>
+          <p:cNvPr id="2" name="Rectangle 1"/>
+          <p:cNvSpPr/>
+          <p:nvPr/>
+        </p:nvSpPr>
+        <p:spPr>
+          <a:xfrm>
+            <a:off x="0" y="0"/>
+            <a:ext cx="12191695" cy="6858000"/>
+          </a:xfrm>
+          <a:prstGeom prst="rect">
+            <a:avLst/>
+          </a:prstGeom>
+          <a:solidFill>
+            <a:srgbClr val="FFFFFF"/>
+          </a:solidFill>
+          <a:ln>
+            <a:noFill/>
+          </a:ln>
+        </p:spPr>
+        <p:style>
+          <a:lnRef idx="1">
+            <a:schemeClr val="accent1"/>
+          </a:lnRef>
+          <a:fillRef idx="3">
+            <a:schemeClr val="accent1"/>
+          </a:fillRef>
+          <a:effectRef idx="2">
+            <a:schemeClr val="accent1"/>
+          </a:effectRef>
+          <a:fontRef idx="minor">
+            <a:schemeClr val="lt1"/>
+          </a:fontRef>
+        </p:style>
+        <p:txBody>
+          <a:bodyPr rtlCol="0" anchor="ctr"/>
+          <a:lstStyle/>
+          <a:p>
+            <a:pPr algn="ctr"/>
+          </a:p>
+        </p:txBody>
+      </p:sp>
+      <p:sp>
+        <p:nvSpPr>
+          <p:cNvPr id="3" name="TextBox 2"/>
+          <p:cNvSpPr txBox="1"/>
+          <p:nvPr/>
+        </p:nvSpPr>
+        <p:spPr>
+          <a:xfrm>
+            <a:off x="731520" y="548640"/>
+            <a:ext cx="10698480" cy="1188720"/>
+          </a:xfrm>
+          <a:prstGeom prst="rect">
+            <a:avLst/>
+          </a:prstGeom>
+          <a:noFill/>
+        </p:spPr>
+        <p:txBody>
+          <a:bodyPr wrap="square">
+            <a:spAutoFit/>
+          </a:bodyPr>
+          <a:lstStyle/>
+          <a:p>
+            <a:pPr>
+              <a:spcAft>
+                <a:spcPts val="400"/>
+              </a:spcAft>
+              <a:defRPr sz="1000" b="1">
+                <a:solidFill>
+                  <a:srgbClr val="2563EB"/>
+                </a:solidFill>
+                <a:latin typeface="Calibri"/>
+              </a:defRPr>
+            </a:pPr>
+            <a:r>
+              <a:t>Q4 2026 EXECUTIVE INVESTOR UPDATE — ESTELLA WILLIA</a:t>
+            </a:r>
+          </a:p>
+          <a:p>
+            <a:pPr>
+              <a:defRPr sz="2200" b="1">
+                <a:solidFill>
+                  <a:srgbClr val="0F172A"/>
+                </a:solidFill>
+                <a:latin typeface="Calibri"/>
+              </a:defRPr>
+            </a:pPr>
+            <a:r>
+              <a:t>Cash Flow &amp; Runway Analysis</a:t>
+            </a:r>
+          </a:p>
+          <a:p>
+            <a:pPr>
+              <a:spcBef>
+                <a:spcPts val="200"/>
+              </a:spcBef>
+              <a:defRPr sz="1200">
+                <a:solidFill>
+                  <a:srgbClr val="64748B"/>
+                </a:solidFill>
+                <a:latin typeface="Calibri"/>
+              </a:defRPr>
+            </a:pPr>
+            <a:r>
+              <a:t>18.2 Months of Cash Runway</a:t>
+            </a:r>
+          </a:p>
+        </p:txBody>
+      </p:sp>
+      <p:sp>
+        <p:nvSpPr>
+          <p:cNvPr id="4" name="Rectangle 3"/>
+          <p:cNvSpPr/>
+          <p:nvPr/>
+        </p:nvSpPr>
+        <p:spPr>
+          <a:xfrm>
+            <a:off x="731520" y="1737360"/>
+            <a:ext cx="10698480" cy="13716"/>
+          </a:xfrm>
+          <a:prstGeom prst="rect">
+            <a:avLst/>
+          </a:prstGeom>
+          <a:solidFill>
+            <a:srgbClr val="E2E8F0"/>
+          </a:solidFill>
+          <a:ln>
+            <a:noFill/>
+          </a:ln>
+        </p:spPr>
+        <p:style>
+          <a:lnRef idx="1">
+            <a:schemeClr val="accent1"/>
+          </a:lnRef>
+          <a:fillRef idx="3">
+            <a:schemeClr val="accent1"/>
+          </a:fillRef>
+          <a:effectRef idx="2">
+            <a:schemeClr val="accent1"/>
+          </a:effectRef>
+          <a:fontRef idx="minor">
+            <a:schemeClr val="lt1"/>
+          </a:fontRef>
+        </p:style>
+        <p:txBody>
+          <a:bodyPr rtlCol="0" anchor="ctr"/>
+          <a:lstStyle/>
+          <a:p>
+            <a:pPr algn="ctr"/>
+          </a:p>
+        </p:txBody>
+      </p:sp>
+      <p:sp>
+        <p:nvSpPr>
+          <p:cNvPr id="5" name="TextBox 4"/>
+          <p:cNvSpPr txBox="1"/>
+          <p:nvPr/>
+        </p:nvSpPr>
+        <p:spPr>
+          <a:xfrm>
+            <a:off x="731520" y="2011680"/>
+            <a:ext cx="10698480" cy="4114800"/>
+          </a:xfrm>
+          <a:prstGeom prst="rect">
+            <a:avLst/>
+          </a:prstGeom>
+          <a:noFill/>
+        </p:spPr>
+        <p:txBody>
+          <a:bodyPr wrap="square">
+            <a:spAutoFit/>
+          </a:bodyPr>
+          <a:lstStyle/>
+          <a:p>
+            <a:pPr>
+              <a:lnSpc>
+                <a:spcPct val="125000"/>
+              </a:lnSpc>
+              <a:spcAft>
+                <a:spcPts val="1400"/>
+              </a:spcAft>
+              <a:defRPr sz="1500">
+                <a:solidFill>
+                  <a:srgbClr val="1E293B"/>
+                </a:solidFill>
+                <a:latin typeface="Calibri"/>
+              </a:defRPr>
+            </a:pPr>
+            <a:r>
+              <a:t>•  Ending Cash Balance as of Sept 30, 2026: $4.42M</a:t>
+            </a:r>
+          </a:p>
+          <a:p>
+            <a:pPr>
+              <a:lnSpc>
+                <a:spcPct val="125000"/>
+              </a:lnSpc>
+              <a:spcAft>
+                <a:spcPts val="1400"/>
+              </a:spcAft>
+              <a:defRPr sz="1500">
+                <a:solidFill>
+                  <a:srgbClr val="1E293B"/>
+                </a:solidFill>
+                <a:latin typeface="Calibri"/>
+              </a:defRPr>
+            </a:pPr>
+            <a:r>
+              <a:t>•  Average Net Monthly Burn: $94,000 (down from $138,000 in Q1)</a:t>
+            </a:r>
+          </a:p>
+          <a:p>
+            <a:pPr>
+              <a:lnSpc>
+                <a:spcPct val="125000"/>
+              </a:lnSpc>
+              <a:spcAft>
+                <a:spcPts val="1400"/>
+              </a:spcAft>
+              <a:defRPr sz="1500">
+                <a:solidFill>
+                  <a:srgbClr val="1E293B"/>
+                </a:solidFill>
+                <a:latin typeface="Calibri"/>
+              </a:defRPr>
+            </a:pPr>
+            <a:r>
+              <a:t>•  Current runway extends through April 2028 without additional capital</a:t>
+            </a:r>
+          </a:p>
+          <a:p>
+            <a:pPr>
+              <a:lnSpc>
+                <a:spcPct val="125000"/>
+              </a:lnSpc>
+              <a:spcAft>
+                <a:spcPts val="1400"/>
+              </a:spcAft>
+              <a:defRPr sz="1500">
+                <a:solidFill>
+                  <a:srgbClr val="1E293B"/>
+                </a:solidFill>
+                <a:latin typeface="Calibri"/>
+              </a:defRPr>
+            </a:pPr>
+            <a:r>
+              <a:t>•  Optionality to reach cash flow breakeven with 15% ARR growth</a:t>
+            </a:r>
+          </a:p>
+        </p:txBody>
+      </p:sp>
+      <p:sp>
+        <p:nvSpPr>
+          <p:cNvPr id="6" name="TextBox 5"/>
+          <p:cNvSpPr txBox="1"/>
+          <p:nvPr/>
+        </p:nvSpPr>
+        <p:spPr>
+          <a:xfrm>
+            <a:off x="731520" y="6309360"/>
+            <a:ext cx="10698480" cy="365760"/>
+          </a:xfrm>
+          <a:prstGeom prst="rect">
+            <a:avLst/>
+          </a:prstGeom>
+          <a:noFill/>
+        </p:spPr>
+        <p:txBody>
+          <a:bodyPr wrap="none">
+            <a:spAutoFit/>
+          </a:bodyPr>
+          <a:lstStyle/>
+          <a:p>
+            <a:pPr>
+              <a:defRPr sz="900">
+                <a:solidFill>
+                  <a:srgbClr val="94A3B8"/>
+                </a:solidFill>
+                <a:latin typeface="Calibri"/>
+              </a:defRPr>
+            </a:pPr>
+            <a:r>
+              <a:t>Q4 2026 Executive Investor Update — Estella Williams · Slide 13 of 16</a:t>
+            </a:r>
+          </a:p>
+        </p:txBody>
+      </p:sp>
+    </p:spTree>
+  </p:cSld>
+  <p:clrMapOvr>
+    <a:masterClrMapping/>
+  </p:clrMapOvr>
+</p:sld>
+</file>
+
+<file path=ppt/slides/slide14.xml><?xml version="1.0" encoding="utf-8"?>
+<p:sld xmlns:a="http://schemas.openxmlformats.org/drawingml/2006/main" xmlns:p="http://schemas.openxmlformats.org/presentationml/2006/main" xmlns:r="http://schemas.openxmlformats.org/officeDocument/2006/relationships">
+  <p:cSld>
+    <p:spTree>
+      <p:nvGrpSpPr>
+        <p:cNvPr id="1" name=""/>
+        <p:cNvGrpSpPr/>
+        <p:nvPr/>
+      </p:nvGrpSpPr>
+      <p:grpSpPr/>
+      <p:sp>
+        <p:nvSpPr>
+          <p:cNvPr id="2" name="Rectangle 1"/>
+          <p:cNvSpPr/>
+          <p:nvPr/>
+        </p:nvSpPr>
+        <p:spPr>
+          <a:xfrm>
+            <a:off x="0" y="0"/>
+            <a:ext cx="12191695" cy="6858000"/>
+          </a:xfrm>
+          <a:prstGeom prst="rect">
+            <a:avLst/>
+          </a:prstGeom>
+          <a:solidFill>
+            <a:srgbClr val="FFFFFF"/>
+          </a:solidFill>
+          <a:ln>
+            <a:noFill/>
+          </a:ln>
+        </p:spPr>
+        <p:style>
+          <a:lnRef idx="1">
+            <a:schemeClr val="accent1"/>
+          </a:lnRef>
+          <a:fillRef idx="3">
+            <a:schemeClr val="accent1"/>
+          </a:fillRef>
+          <a:effectRef idx="2">
+            <a:schemeClr val="accent1"/>
+          </a:effectRef>
+          <a:fontRef idx="minor">
+            <a:schemeClr val="lt1"/>
+          </a:fontRef>
+        </p:style>
+        <p:txBody>
+          <a:bodyPr rtlCol="0" anchor="ctr"/>
+          <a:lstStyle/>
+          <a:p>
+            <a:pPr algn="ctr"/>
+          </a:p>
+        </p:txBody>
+      </p:sp>
+      <p:sp>
+        <p:nvSpPr>
+          <p:cNvPr id="3" name="TextBox 2"/>
+          <p:cNvSpPr txBox="1"/>
+          <p:nvPr/>
+        </p:nvSpPr>
+        <p:spPr>
+          <a:xfrm>
+            <a:off x="731520" y="548640"/>
+            <a:ext cx="10698480" cy="1188720"/>
+          </a:xfrm>
+          <a:prstGeom prst="rect">
+            <a:avLst/>
+          </a:prstGeom>
+          <a:noFill/>
+        </p:spPr>
+        <p:txBody>
+          <a:bodyPr wrap="square">
+            <a:spAutoFit/>
+          </a:bodyPr>
+          <a:lstStyle/>
+          <a:p>
+            <a:pPr>
+              <a:spcAft>
+                <a:spcPts val="400"/>
+              </a:spcAft>
+              <a:defRPr sz="1000" b="1">
+                <a:solidFill>
+                  <a:srgbClr val="2563EB"/>
+                </a:solidFill>
+                <a:latin typeface="Calibri"/>
+              </a:defRPr>
+            </a:pPr>
+            <a:r>
+              <a:t>Q4 2026 EXECUTIVE INVESTOR UPDATE — ESTELLA WILLIA</a:t>
+            </a:r>
+          </a:p>
+          <a:p>
+            <a:pPr>
+              <a:defRPr sz="2200" b="1">
+                <a:solidFill>
+                  <a:srgbClr val="0F172A"/>
+                </a:solidFill>
+                <a:latin typeface="Calibri"/>
+              </a:defRPr>
+            </a:pPr>
+            <a:r>
+              <a:t>Cap Table &amp; Bridge Financing</a:t>
+            </a:r>
+          </a:p>
+          <a:p>
+            <a:pPr>
+              <a:spcBef>
+                <a:spcPts val="200"/>
+              </a:spcBef>
+              <a:defRPr sz="1200">
+                <a:solidFill>
+                  <a:srgbClr val="64748B"/>
+                </a:solidFill>
+                <a:latin typeface="Calibri"/>
+              </a:defRPr>
+            </a:pPr>
+            <a:r>
+              <a:t>Capital Structure Summary</a:t>
+            </a:r>
+          </a:p>
+        </p:txBody>
+      </p:sp>
+      <p:sp>
+        <p:nvSpPr>
+          <p:cNvPr id="4" name="Rectangle 3"/>
+          <p:cNvSpPr/>
+          <p:nvPr/>
+        </p:nvSpPr>
+        <p:spPr>
+          <a:xfrm>
+            <a:off x="731520" y="1737360"/>
+            <a:ext cx="10698480" cy="13716"/>
+          </a:xfrm>
+          <a:prstGeom prst="rect">
+            <a:avLst/>
+          </a:prstGeom>
+          <a:solidFill>
+            <a:srgbClr val="E2E8F0"/>
+          </a:solidFill>
+          <a:ln>
+            <a:noFill/>
+          </a:ln>
+        </p:spPr>
+        <p:style>
+          <a:lnRef idx="1">
+            <a:schemeClr val="accent1"/>
+          </a:lnRef>
+          <a:fillRef idx="3">
+            <a:schemeClr val="accent1"/>
+          </a:fillRef>
+          <a:effectRef idx="2">
+            <a:schemeClr val="accent1"/>
+          </a:effectRef>
+          <a:fontRef idx="minor">
+            <a:schemeClr val="lt1"/>
+          </a:fontRef>
+        </p:style>
+        <p:txBody>
+          <a:bodyPr rtlCol="0" anchor="ctr"/>
+          <a:lstStyle/>
+          <a:p>
+            <a:pPr algn="ctr"/>
+          </a:p>
+        </p:txBody>
+      </p:sp>
+      <p:sp>
+        <p:nvSpPr>
+          <p:cNvPr id="5" name="TextBox 4"/>
+          <p:cNvSpPr txBox="1"/>
+          <p:nvPr/>
+        </p:nvSpPr>
+        <p:spPr>
+          <a:xfrm>
+            <a:off x="731520" y="2011680"/>
+            <a:ext cx="10698480" cy="4114800"/>
+          </a:xfrm>
+          <a:prstGeom prst="rect">
+            <a:avLst/>
+          </a:prstGeom>
+          <a:noFill/>
+        </p:spPr>
+        <p:txBody>
+          <a:bodyPr wrap="square">
+            <a:spAutoFit/>
+          </a:bodyPr>
+          <a:lstStyle/>
+          <a:p>
+            <a:pPr>
+              <a:lnSpc>
+                <a:spcPct val="125000"/>
+              </a:lnSpc>
+              <a:spcAft>
+                <a:spcPts val="1400"/>
+              </a:spcAft>
+              <a:defRPr sz="1500">
+                <a:solidFill>
+                  <a:srgbClr val="1E293B"/>
+                </a:solidFill>
+                <a:latin typeface="Calibri"/>
+              </a:defRPr>
+            </a:pPr>
+            <a:r>
+              <a:t>•  Founders &amp; Common Stock: 68.4% fully diluted</a:t>
+            </a:r>
+          </a:p>
+          <a:p>
+            <a:pPr>
+              <a:lnSpc>
+                <a:spcPct val="125000"/>
+              </a:lnSpc>
+              <a:spcAft>
+                <a:spcPts val="1400"/>
+              </a:spcAft>
+              <a:defRPr sz="1500">
+                <a:solidFill>
+                  <a:srgbClr val="1E293B"/>
+                </a:solidFill>
+                <a:latin typeface="Calibri"/>
+              </a:defRPr>
+            </a:pPr>
+            <a:r>
+              <a:t>•  Series Seed Investors: 18.2% (SAFE notes converted)</a:t>
+            </a:r>
+          </a:p>
+          <a:p>
+            <a:pPr>
+              <a:lnSpc>
+                <a:spcPct val="125000"/>
+              </a:lnSpc>
+              <a:spcAft>
+                <a:spcPts val="1400"/>
+              </a:spcAft>
+              <a:defRPr sz="1500">
+                <a:solidFill>
+                  <a:srgbClr val="1E293B"/>
+                </a:solidFill>
+                <a:latin typeface="Calibri"/>
+              </a:defRPr>
+            </a:pPr>
+            <a:r>
+              <a:t>•  Unallocated Option Pool: 13.4% reserved for key technical hires</a:t>
+            </a:r>
+          </a:p>
+          <a:p>
+            <a:pPr>
+              <a:lnSpc>
+                <a:spcPct val="125000"/>
+              </a:lnSpc>
+              <a:spcAft>
+                <a:spcPts val="1400"/>
+              </a:spcAft>
+              <a:defRPr sz="1500">
+                <a:solidFill>
+                  <a:srgbClr val="1E293B"/>
+                </a:solidFill>
+                <a:latin typeface="Calibri"/>
+              </a:defRPr>
+            </a:pPr>
+            <a:r>
+              <a:t>•  Bridge Financing: $150K strategic working capital tranche settled Oct 2026</a:t>
+            </a:r>
+          </a:p>
+        </p:txBody>
+      </p:sp>
+      <p:sp>
+        <p:nvSpPr>
+          <p:cNvPr id="6" name="TextBox 5"/>
+          <p:cNvSpPr txBox="1"/>
+          <p:nvPr/>
+        </p:nvSpPr>
+        <p:spPr>
+          <a:xfrm>
+            <a:off x="731520" y="6309360"/>
+            <a:ext cx="10698480" cy="365760"/>
+          </a:xfrm>
+          <a:prstGeom prst="rect">
+            <a:avLst/>
+          </a:prstGeom>
+          <a:noFill/>
+        </p:spPr>
+        <p:txBody>
+          <a:bodyPr wrap="none">
+            <a:spAutoFit/>
+          </a:bodyPr>
+          <a:lstStyle/>
+          <a:p>
+            <a:pPr>
+              <a:defRPr sz="900">
+                <a:solidFill>
+                  <a:srgbClr val="94A3B8"/>
+                </a:solidFill>
+                <a:latin typeface="Calibri"/>
+              </a:defRPr>
+            </a:pPr>
+            <a:r>
+              <a:t>Q4 2026 Executive Investor Update — Estella Williams · Slide 14 of 16</a:t>
+            </a:r>
+          </a:p>
+        </p:txBody>
+      </p:sp>
+    </p:spTree>
+  </p:cSld>
+  <p:clrMapOvr>
+    <a:masterClrMapping/>
+  </p:clrMapOvr>
+</p:sld>
+</file>
+
+<file path=ppt/slides/slide15.xml><?xml version="1.0" encoding="utf-8"?>
+<p:sld xmlns:a="http://schemas.openxmlformats.org/drawingml/2006/main" xmlns:p="http://schemas.openxmlformats.org/presentationml/2006/main" xmlns:r="http://schemas.openxmlformats.org/officeDocument/2006/relationships">
+  <p:cSld>
+    <p:spTree>
+      <p:nvGrpSpPr>
+        <p:cNvPr id="1" name=""/>
+        <p:cNvGrpSpPr/>
+        <p:nvPr/>
+      </p:nvGrpSpPr>
+      <p:grpSpPr/>
+      <p:sp>
+        <p:nvSpPr>
+          <p:cNvPr id="2" name="Rectangle 1"/>
+          <p:cNvSpPr/>
+          <p:nvPr/>
+        </p:nvSpPr>
+        <p:spPr>
+          <a:xfrm>
+            <a:off x="0" y="0"/>
+            <a:ext cx="12191695" cy="6858000"/>
+          </a:xfrm>
+          <a:prstGeom prst="rect">
+            <a:avLst/>
+          </a:prstGeom>
+          <a:solidFill>
+            <a:srgbClr val="FFFFFF"/>
+          </a:solidFill>
+          <a:ln>
+            <a:noFill/>
+          </a:ln>
+        </p:spPr>
+        <p:style>
+          <a:lnRef idx="1">
+            <a:schemeClr val="accent1"/>
+          </a:lnRef>
+          <a:fillRef idx="3">
+            <a:schemeClr val="accent1"/>
+          </a:fillRef>
+          <a:effectRef idx="2">
+            <a:schemeClr val="accent1"/>
+          </a:effectRef>
+          <a:fontRef idx="minor">
+            <a:schemeClr val="lt1"/>
+          </a:fontRef>
+        </p:style>
+        <p:txBody>
+          <a:bodyPr rtlCol="0" anchor="ctr"/>
+          <a:lstStyle/>
+          <a:p>
+            <a:pPr algn="ctr"/>
+          </a:p>
+        </p:txBody>
+      </p:sp>
+      <p:sp>
+        <p:nvSpPr>
+          <p:cNvPr id="3" name="TextBox 2"/>
+          <p:cNvSpPr txBox="1"/>
+          <p:nvPr/>
+        </p:nvSpPr>
+        <p:spPr>
+          <a:xfrm>
+            <a:off x="731520" y="548640"/>
+            <a:ext cx="10698480" cy="1188720"/>
+          </a:xfrm>
+          <a:prstGeom prst="rect">
+            <a:avLst/>
+          </a:prstGeom>
+          <a:noFill/>
+        </p:spPr>
+        <p:txBody>
+          <a:bodyPr wrap="square">
+            <a:spAutoFit/>
+          </a:bodyPr>
+          <a:lstStyle/>
+          <a:p>
+            <a:pPr>
+              <a:spcAft>
+                <a:spcPts val="400"/>
+              </a:spcAft>
+              <a:defRPr sz="1000" b="1">
+                <a:solidFill>
+                  <a:srgbClr val="2563EB"/>
+                </a:solidFill>
+                <a:latin typeface="Calibri"/>
+              </a:defRPr>
+            </a:pPr>
+            <a:r>
+              <a:t>Q4 2026 EXECUTIVE INVESTOR UPDATE — ESTELLA WILLIA</a:t>
+            </a:r>
+          </a:p>
+          <a:p>
+            <a:pPr>
+              <a:defRPr sz="2200" b="1">
+                <a:solidFill>
+                  <a:srgbClr val="0F172A"/>
+                </a:solidFill>
+                <a:latin typeface="Calibri"/>
+              </a:defRPr>
+            </a:pPr>
+            <a:r>
+              <a:t>Strategic Priorities for Q1 2027</a:t>
+            </a:r>
+          </a:p>
+          <a:p>
+            <a:pPr>
+              <a:spcBef>
+                <a:spcPts val="200"/>
+              </a:spcBef>
+              <a:defRPr sz="1200">
+                <a:solidFill>
+                  <a:srgbClr val="64748B"/>
+                </a:solidFill>
+                <a:latin typeface="Calibri"/>
+              </a:defRPr>
+            </a:pPr>
+            <a:r>
+              <a:t>Execution Milestones</a:t>
+            </a:r>
+          </a:p>
+        </p:txBody>
+      </p:sp>
+      <p:sp>
+        <p:nvSpPr>
+          <p:cNvPr id="4" name="Rectangle 3"/>
+          <p:cNvSpPr/>
+          <p:nvPr/>
+        </p:nvSpPr>
+        <p:spPr>
+          <a:xfrm>
+            <a:off x="731520" y="1737360"/>
+            <a:ext cx="10698480" cy="13716"/>
+          </a:xfrm>
+          <a:prstGeom prst="rect">
+            <a:avLst/>
+          </a:prstGeom>
+          <a:solidFill>
+            <a:srgbClr val="E2E8F0"/>
+          </a:solidFill>
+          <a:ln>
+            <a:noFill/>
+          </a:ln>
+        </p:spPr>
+        <p:style>
+          <a:lnRef idx="1">
+            <a:schemeClr val="accent1"/>
+          </a:lnRef>
+          <a:fillRef idx="3">
+            <a:schemeClr val="accent1"/>
+          </a:fillRef>
+          <a:effectRef idx="2">
+            <a:schemeClr val="accent1"/>
+          </a:effectRef>
+          <a:fontRef idx="minor">
+            <a:schemeClr val="lt1"/>
+          </a:fontRef>
+        </p:style>
+        <p:txBody>
+          <a:bodyPr rtlCol="0" anchor="ctr"/>
+          <a:lstStyle/>
+          <a:p>
+            <a:pPr algn="ctr"/>
+          </a:p>
+        </p:txBody>
+      </p:sp>
+      <p:sp>
+        <p:nvSpPr>
+          <p:cNvPr id="5" name="TextBox 4"/>
+          <p:cNvSpPr txBox="1"/>
+          <p:nvPr/>
+        </p:nvSpPr>
+        <p:spPr>
+          <a:xfrm>
+            <a:off x="731520" y="2011680"/>
+            <a:ext cx="10698480" cy="4114800"/>
+          </a:xfrm>
+          <a:prstGeom prst="rect">
+            <a:avLst/>
+          </a:prstGeom>
+          <a:noFill/>
+        </p:spPr>
+        <p:txBody>
+          <a:bodyPr wrap="square">
+            <a:spAutoFit/>
+          </a:bodyPr>
+          <a:lstStyle/>
+          <a:p>
+            <a:pPr>
+              <a:lnSpc>
+                <a:spcPct val="125000"/>
+              </a:lnSpc>
+              <a:spcAft>
+                <a:spcPts val="1400"/>
+              </a:spcAft>
+              <a:defRPr sz="1500">
+                <a:solidFill>
+                  <a:srgbClr val="1E293B"/>
+                </a:solidFill>
+                <a:latin typeface="Calibri"/>
+              </a:defRPr>
+            </a:pPr>
+            <a:r>
+              <a:t>•  Scale enterprise terminal count from 65 to 110 facilities</a:t>
+            </a:r>
+          </a:p>
+          <a:p>
+            <a:pPr>
+              <a:lnSpc>
+                <a:spcPct val="125000"/>
+              </a:lnSpc>
+              <a:spcAft>
+                <a:spcPts val="1400"/>
+              </a:spcAft>
+              <a:defRPr sz="1500">
+                <a:solidFill>
+                  <a:srgbClr val="1E293B"/>
+                </a:solidFill>
+                <a:latin typeface="Calibri"/>
+              </a:defRPr>
+            </a:pPr>
+            <a:r>
+              <a:t>•  Complete SAP PartnerEdge certification for direct marketplace listing</a:t>
+            </a:r>
+          </a:p>
+          <a:p>
+            <a:pPr>
+              <a:lnSpc>
+                <a:spcPct val="125000"/>
+              </a:lnSpc>
+              <a:spcAft>
+                <a:spcPts val="1400"/>
+              </a:spcAft>
+              <a:defRPr sz="1500">
+                <a:solidFill>
+                  <a:srgbClr val="1E293B"/>
+                </a:solidFill>
+                <a:latin typeface="Calibri"/>
+              </a:defRPr>
+            </a:pPr>
+            <a:r>
+              <a:t>•  Launch automated driver detention compensation dispute module</a:t>
+            </a:r>
+          </a:p>
+          <a:p>
+            <a:pPr>
+              <a:lnSpc>
+                <a:spcPct val="125000"/>
+              </a:lnSpc>
+              <a:spcAft>
+                <a:spcPts val="1400"/>
+              </a:spcAft>
+              <a:defRPr sz="1500">
+                <a:solidFill>
+                  <a:srgbClr val="1E293B"/>
+                </a:solidFill>
+                <a:latin typeface="Calibri"/>
+              </a:defRPr>
+            </a:pPr>
+            <a:r>
+              <a:t>•  Target ARR: $5.6M with gross margin surpassing 79%</a:t>
+            </a:r>
+          </a:p>
+        </p:txBody>
+      </p:sp>
+      <p:sp>
+        <p:nvSpPr>
+          <p:cNvPr id="6" name="TextBox 5"/>
+          <p:cNvSpPr txBox="1"/>
+          <p:nvPr/>
+        </p:nvSpPr>
+        <p:spPr>
+          <a:xfrm>
+            <a:off x="731520" y="6309360"/>
+            <a:ext cx="10698480" cy="365760"/>
+          </a:xfrm>
+          <a:prstGeom prst="rect">
+            <a:avLst/>
+          </a:prstGeom>
+          <a:noFill/>
+        </p:spPr>
+        <p:txBody>
+          <a:bodyPr wrap="none">
+            <a:spAutoFit/>
+          </a:bodyPr>
+          <a:lstStyle/>
+          <a:p>
+            <a:pPr>
+              <a:defRPr sz="900">
+                <a:solidFill>
+                  <a:srgbClr val="94A3B8"/>
+                </a:solidFill>
+                <a:latin typeface="Calibri"/>
+              </a:defRPr>
+            </a:pPr>
+            <a:r>
+              <a:t>Q4 2026 Executive Investor Update — Estella Williams · Slide 15 of 16</a:t>
+            </a:r>
+          </a:p>
+        </p:txBody>
+      </p:sp>
+    </p:spTree>
+  </p:cSld>
+  <p:clrMapOvr>
+    <a:masterClrMapping/>
+  </p:clrMapOvr>
+</p:sld>
+</file>
+
+<file path=ppt/slides/slide16.xml><?xml version="1.0" encoding="utf-8"?>
+<p:sld xmlns:a="http://schemas.openxmlformats.org/drawingml/2006/main" xmlns:p="http://schemas.openxmlformats.org/presentationml/2006/main" xmlns:r="http://schemas.openxmlformats.org/officeDocument/2006/relationships">
+  <p:cSld>
+    <p:spTree>
+      <p:nvGrpSpPr>
+        <p:cNvPr id="1" name=""/>
+        <p:cNvGrpSpPr/>
+        <p:nvPr/>
+      </p:nvGrpSpPr>
+      <p:grpSpPr/>
+      <p:sp>
+        <p:nvSpPr>
+          <p:cNvPr id="2" name="Rectangle 1"/>
+          <p:cNvSpPr/>
+          <p:nvPr/>
+        </p:nvSpPr>
+        <p:spPr>
+          <a:xfrm>
+            <a:off x="0" y="0"/>
+            <a:ext cx="12191695" cy="6858000"/>
+          </a:xfrm>
+          <a:prstGeom prst="rect">
+            <a:avLst/>
+          </a:prstGeom>
+          <a:solidFill>
+            <a:srgbClr val="FFFFFF"/>
+          </a:solidFill>
+          <a:ln>
+            <a:noFill/>
+          </a:ln>
+        </p:spPr>
+        <p:style>
+          <a:lnRef idx="1">
+            <a:schemeClr val="accent1"/>
+          </a:lnRef>
+          <a:fillRef idx="3">
+            <a:schemeClr val="accent1"/>
+          </a:fillRef>
+          <a:effectRef idx="2">
+            <a:schemeClr val="accent1"/>
+          </a:effectRef>
+          <a:fontRef idx="minor">
+            <a:schemeClr val="lt1"/>
+          </a:fontRef>
+        </p:style>
+        <p:txBody>
+          <a:bodyPr rtlCol="0" anchor="ctr"/>
+          <a:lstStyle/>
+          <a:p>
+            <a:pPr algn="ctr"/>
+          </a:p>
+        </p:txBody>
+      </p:sp>
+      <p:sp>
+        <p:nvSpPr>
+          <p:cNvPr id="3" name="TextBox 2"/>
+          <p:cNvSpPr txBox="1"/>
+          <p:nvPr/>
+        </p:nvSpPr>
+        <p:spPr>
+          <a:xfrm>
+            <a:off x="731520" y="548640"/>
+            <a:ext cx="10698480" cy="1188720"/>
+          </a:xfrm>
+          <a:prstGeom prst="rect">
+            <a:avLst/>
+          </a:prstGeom>
+          <a:noFill/>
+        </p:spPr>
+        <p:txBody>
+          <a:bodyPr wrap="square">
+            <a:spAutoFit/>
+          </a:bodyPr>
+          <a:lstStyle/>
+          <a:p>
+            <a:pPr>
+              <a:spcAft>
+                <a:spcPts val="400"/>
+              </a:spcAft>
+              <a:defRPr sz="1000" b="1">
+                <a:solidFill>
+                  <a:srgbClr val="2563EB"/>
+                </a:solidFill>
+                <a:latin typeface="Calibri"/>
+              </a:defRPr>
+            </a:pPr>
+            <a:r>
+              <a:t>Q4 2026 EXECUTIVE INVESTOR UPDATE — ESTELLA WILLIA</a:t>
+            </a:r>
+          </a:p>
+          <a:p>
+            <a:pPr>
+              <a:defRPr sz="2200" b="1">
+                <a:solidFill>
+                  <a:srgbClr val="0F172A"/>
+                </a:solidFill>
+                <a:latin typeface="Calibri"/>
+              </a:defRPr>
+            </a:pPr>
+            <a:r>
+              <a:t>Board Resolution &amp; Next Steps</a:t>
+            </a:r>
+          </a:p>
+          <a:p>
+            <a:pPr>
+              <a:spcBef>
+                <a:spcPts val="200"/>
+              </a:spcBef>
+              <a:defRPr sz="1200">
+                <a:solidFill>
+                  <a:srgbClr val="64748B"/>
+                </a:solidFill>
+                <a:latin typeface="Calibri"/>
+              </a:defRPr>
+            </a:pPr>
+            <a:r>
+              <a:t>Items for Board Vote</a:t>
+            </a:r>
+          </a:p>
+        </p:txBody>
+      </p:sp>
+      <p:sp>
+        <p:nvSpPr>
+          <p:cNvPr id="4" name="Rectangle 3"/>
+          <p:cNvSpPr/>
+          <p:nvPr/>
+        </p:nvSpPr>
+        <p:spPr>
+          <a:xfrm>
+            <a:off x="731520" y="1737360"/>
+            <a:ext cx="10698480" cy="13716"/>
+          </a:xfrm>
+          <a:prstGeom prst="rect">
+            <a:avLst/>
+          </a:prstGeom>
+          <a:solidFill>
+            <a:srgbClr val="E2E8F0"/>
+          </a:solidFill>
+          <a:ln>
+            <a:noFill/>
+          </a:ln>
+        </p:spPr>
+        <p:style>
+          <a:lnRef idx="1">
+            <a:schemeClr val="accent1"/>
+          </a:lnRef>
+          <a:fillRef idx="3">
+            <a:schemeClr val="accent1"/>
+          </a:fillRef>
+          <a:effectRef idx="2">
+            <a:schemeClr val="accent1"/>
+          </a:effectRef>
+          <a:fontRef idx="minor">
+            <a:schemeClr val="lt1"/>
+          </a:fontRef>
+        </p:style>
+        <p:txBody>
+          <a:bodyPr rtlCol="0" anchor="ctr"/>
+          <a:lstStyle/>
+          <a:p>
+            <a:pPr algn="ctr"/>
+          </a:p>
+        </p:txBody>
+      </p:sp>
+      <p:sp>
+        <p:nvSpPr>
+          <p:cNvPr id="5" name="TextBox 4"/>
+          <p:cNvSpPr txBox="1"/>
+          <p:nvPr/>
+        </p:nvSpPr>
+        <p:spPr>
+          <a:xfrm>
+            <a:off x="731520" y="2011680"/>
+            <a:ext cx="10698480" cy="4114800"/>
+          </a:xfrm>
+          <a:prstGeom prst="rect">
+            <a:avLst/>
+          </a:prstGeom>
+          <a:noFill/>
+        </p:spPr>
+        <p:txBody>
+          <a:bodyPr wrap="square">
+            <a:spAutoFit/>
+          </a:bodyPr>
+          <a:lstStyle/>
+          <a:p>
+            <a:pPr>
+              <a:lnSpc>
+                <a:spcPct val="125000"/>
+              </a:lnSpc>
+              <a:spcAft>
+                <a:spcPts val="1400"/>
+              </a:spcAft>
+              <a:defRPr sz="1500">
+                <a:solidFill>
+                  <a:srgbClr val="1E293B"/>
+                </a:solidFill>
+                <a:latin typeface="Calibri"/>
+              </a:defRPr>
+            </a:pPr>
+            <a:r>
+              <a:t>•  Approval of 2027 Annual Operating Plan and Gated Headcount Budget</a:t>
+            </a:r>
+          </a:p>
+          <a:p>
+            <a:pPr>
+              <a:lnSpc>
+                <a:spcPct val="125000"/>
+              </a:lnSpc>
+              <a:spcAft>
+                <a:spcPts val="1400"/>
+              </a:spcAft>
+              <a:defRPr sz="1500">
+                <a:solidFill>
+                  <a:srgbClr val="1E293B"/>
+                </a:solidFill>
+                <a:latin typeface="Calibri"/>
+              </a:defRPr>
+            </a:pPr>
+            <a:r>
+              <a:t>•  Authorization of expanded 15% equity incentive pool for engineering leads</a:t>
+            </a:r>
+          </a:p>
+          <a:p>
+            <a:pPr>
+              <a:lnSpc>
+                <a:spcPct val="125000"/>
+              </a:lnSpc>
+              <a:spcAft>
+                <a:spcPts val="1400"/>
+              </a:spcAft>
+              <a:defRPr sz="1500">
+                <a:solidFill>
+                  <a:srgbClr val="1E293B"/>
+                </a:solidFill>
+                <a:latin typeface="Calibri"/>
+              </a:defRPr>
+            </a:pPr>
+            <a:r>
+              <a:t>•  Scheduling of Q1 Board Meeting for Thursday, February 18, 2027</a:t>
+            </a:r>
+          </a:p>
+          <a:p>
+            <a:pPr>
+              <a:lnSpc>
+                <a:spcPct val="125000"/>
+              </a:lnSpc>
+              <a:spcAft>
+                <a:spcPts val="1400"/>
+              </a:spcAft>
+              <a:defRPr sz="1500">
+                <a:solidFill>
+                  <a:srgbClr val="1E293B"/>
+                </a:solidFill>
+                <a:latin typeface="Calibri"/>
+              </a:defRPr>
+            </a:pPr>
+            <a:r>
+              <a:t>•  Direct Contact: Estella Williams (estella@infiniai.online)</a:t>
+            </a:r>
+          </a:p>
+        </p:txBody>
+      </p:sp>
+      <p:sp>
+        <p:nvSpPr>
+          <p:cNvPr id="6" name="TextBox 5"/>
+          <p:cNvSpPr txBox="1"/>
+          <p:nvPr/>
+        </p:nvSpPr>
+        <p:spPr>
+          <a:xfrm>
+            <a:off x="731520" y="6309360"/>
+            <a:ext cx="10698480" cy="365760"/>
+          </a:xfrm>
+          <a:prstGeom prst="rect">
+            <a:avLst/>
+          </a:prstGeom>
+          <a:noFill/>
+        </p:spPr>
+        <p:txBody>
+          <a:bodyPr wrap="none">
+            <a:spAutoFit/>
+          </a:bodyPr>
+          <a:lstStyle/>
+          <a:p>
+            <a:pPr>
+              <a:defRPr sz="900">
+                <a:solidFill>
+                  <a:srgbClr val="94A3B8"/>
+                </a:solidFill>
+                <a:latin typeface="Calibri"/>
+              </a:defRPr>
+            </a:pPr>
+            <a:r>
+              <a:t>Q4 2026 Executive Investor Update — Estella Williams · Slide 16 of 16</a:t>
             </a:r>
           </a:p>
         </p:txBody>
@@ -3335,7 +5493,7 @@
               </a:defRPr>
             </a:pPr>
             <a:r>
-              <a:t>OPERATING HIGHLIGHTS</a:t>
+              <a:t>Q4 2026 EXECUTIVE INVESTOR UPDATE — ESTELLA WILLIA</a:t>
             </a:r>
           </a:p>
           <a:p>
@@ -3348,7 +5506,7 @@
               </a:defRPr>
             </a:pPr>
             <a:r>
-              <a:t>Q3 2026 Executive Performance Dashboard</a:t>
+              <a:t>Executive Summary &amp; Q3 Highlights</a:t>
             </a:r>
           </a:p>
           <a:p>
@@ -3364,7 +5522,7 @@
               </a:defRPr>
             </a:pPr>
             <a:r>
-              <a:t>Accelerating enterprise adoption, expanding terminal velocity, and zero logo attrition</a:t>
+              <a:t>Accelerating Enterprise Terminal Adoption</a:t>
             </a:r>
           </a:p>
         </p:txBody>
@@ -3414,59 +5572,14 @@
       </p:sp>
       <p:sp>
         <p:nvSpPr>
-          <p:cNvPr id="5" name="Rounded Rectangle 4"/>
-          <p:cNvSpPr/>
-          <p:nvPr/>
-        </p:nvSpPr>
-        <p:spPr>
-          <a:xfrm>
-            <a:off x="731520" y="1920240"/>
-            <a:ext cx="2468880" cy="4114800"/>
-          </a:xfrm>
-          <a:prstGeom prst="roundRect">
-            <a:avLst/>
-          </a:prstGeom>
-          <a:solidFill>
-            <a:srgbClr val="F8FAFC"/>
-          </a:solidFill>
-          <a:ln w="12700">
-            <a:solidFill>
-              <a:srgbClr val="CBD5E1"/>
-            </a:solidFill>
-          </a:ln>
-        </p:spPr>
-        <p:style>
-          <a:lnRef idx="1">
-            <a:schemeClr val="accent1"/>
-          </a:lnRef>
-          <a:fillRef idx="3">
-            <a:schemeClr val="accent1"/>
-          </a:fillRef>
-          <a:effectRef idx="2">
-            <a:schemeClr val="accent1"/>
-          </a:effectRef>
-          <a:fontRef idx="minor">
-            <a:schemeClr val="lt1"/>
-          </a:fontRef>
-        </p:style>
-        <p:txBody>
-          <a:bodyPr rtlCol="0" anchor="ctr"/>
-          <a:lstStyle/>
-          <a:p>
-            <a:pPr algn="ctr"/>
-          </a:p>
-        </p:txBody>
-      </p:sp>
-      <p:sp>
-        <p:nvSpPr>
-          <p:cNvPr id="6" name="TextBox 5"/>
+          <p:cNvPr id="5" name="TextBox 4"/>
           <p:cNvSpPr txBox="1"/>
           <p:nvPr/>
         </p:nvSpPr>
         <p:spPr>
           <a:xfrm>
-            <a:off x="1005840" y="2286000"/>
-            <a:ext cx="1920240" cy="3383280"/>
+            <a:off x="731520" y="2011680"/>
+            <a:ext cx="10698480" cy="4114800"/>
           </a:xfrm>
           <a:prstGeom prst="rect">
             <a:avLst/>
@@ -3480,106 +5593,92 @@
           <a:lstStyle/>
           <a:p>
             <a:pPr>
+              <a:lnSpc>
+                <a:spcPct val="125000"/>
+              </a:lnSpc>
               <a:spcAft>
-                <a:spcPts val="1000"/>
+                <a:spcPts val="1400"/>
               </a:spcAft>
-              <a:defRPr sz="3600" b="1">
-                <a:solidFill>
-                  <a:srgbClr val="2563EB"/>
-                </a:solidFill>
-                <a:latin typeface="Calibri"/>
-              </a:defRPr>
-            </a:pPr>
-            <a:r>
-              <a:t>$4.2M</a:t>
-            </a:r>
-          </a:p>
-          <a:p>
-            <a:pPr>
+              <a:defRPr sz="1500">
+                <a:solidFill>
+                  <a:srgbClr val="1E293B"/>
+                </a:solidFill>
+                <a:latin typeface="Calibri"/>
+              </a:defRPr>
+            </a:pPr>
+            <a:r>
+              <a:t>•  $4.2M Current Annual Recurring Revenue (+18% QoQ expansion)</a:t>
+            </a:r>
+          </a:p>
+          <a:p>
+            <a:pPr>
+              <a:lnSpc>
+                <a:spcPct val="125000"/>
+              </a:lnSpc>
               <a:spcAft>
-                <a:spcPts val="800"/>
+                <a:spcPts val="1400"/>
               </a:spcAft>
-              <a:defRPr sz="1400" b="1">
-                <a:solidFill>
-                  <a:srgbClr val="0F172A"/>
-                </a:solidFill>
-                <a:latin typeface="Calibri"/>
-              </a:defRPr>
-            </a:pPr>
-            <a:r>
-              <a:t>Current ARR</a:t>
-            </a:r>
-          </a:p>
-          <a:p>
-            <a:pPr>
-              <a:defRPr sz="1100">
-                <a:solidFill>
-                  <a:srgbClr val="64748B"/>
-                </a:solidFill>
-                <a:latin typeface="Calibri"/>
-              </a:defRPr>
-            </a:pPr>
-            <a:r>
-              <a:t>+18% QoQ expansion across 180 active terminals</a:t>
-            </a:r>
-          </a:p>
-        </p:txBody>
-      </p:sp>
-      <p:sp>
-        <p:nvSpPr>
-          <p:cNvPr id="7" name="Rounded Rectangle 6"/>
-          <p:cNvSpPr/>
-          <p:nvPr/>
-        </p:nvSpPr>
-        <p:spPr>
-          <a:xfrm>
-            <a:off x="3474720" y="1920240"/>
-            <a:ext cx="2468880" cy="4114800"/>
-          </a:xfrm>
-          <a:prstGeom prst="roundRect">
-            <a:avLst/>
-          </a:prstGeom>
-          <a:solidFill>
-            <a:srgbClr val="F8FAFC"/>
-          </a:solidFill>
-          <a:ln w="12700">
-            <a:solidFill>
-              <a:srgbClr val="CBD5E1"/>
-            </a:solidFill>
-          </a:ln>
-        </p:spPr>
-        <p:style>
-          <a:lnRef idx="1">
-            <a:schemeClr val="accent1"/>
-          </a:lnRef>
-          <a:fillRef idx="3">
-            <a:schemeClr val="accent1"/>
-          </a:fillRef>
-          <a:effectRef idx="2">
-            <a:schemeClr val="accent1"/>
-          </a:effectRef>
-          <a:fontRef idx="minor">
-            <a:schemeClr val="lt1"/>
-          </a:fontRef>
-        </p:style>
-        <p:txBody>
-          <a:bodyPr rtlCol="0" anchor="ctr"/>
-          <a:lstStyle/>
-          <a:p>
-            <a:pPr algn="ctr"/>
-          </a:p>
-        </p:txBody>
-      </p:sp>
-      <p:sp>
-        <p:nvSpPr>
-          <p:cNvPr id="8" name="TextBox 7"/>
+              <a:defRPr sz="1500">
+                <a:solidFill>
+                  <a:srgbClr val="1E293B"/>
+                </a:solidFill>
+                <a:latin typeface="Calibri"/>
+              </a:defRPr>
+            </a:pPr>
+            <a:r>
+              <a:t>•  114% Net Revenue Retention across mid-market enterprise carrier tier</a:t>
+            </a:r>
+          </a:p>
+          <a:p>
+            <a:pPr>
+              <a:lnSpc>
+                <a:spcPct val="125000"/>
+              </a:lnSpc>
+              <a:spcAft>
+                <a:spcPts val="1400"/>
+              </a:spcAft>
+              <a:defRPr sz="1500">
+                <a:solidFill>
+                  <a:srgbClr val="1E293B"/>
+                </a:solidFill>
+                <a:latin typeface="Calibri"/>
+              </a:defRPr>
+            </a:pPr>
+            <a:r>
+              <a:t>•  Gross margin expanded to 77.2% through automated infrastructure scaling</a:t>
+            </a:r>
+          </a:p>
+          <a:p>
+            <a:pPr>
+              <a:lnSpc>
+                <a:spcPct val="125000"/>
+              </a:lnSpc>
+              <a:spcAft>
+                <a:spcPts val="1400"/>
+              </a:spcAft>
+              <a:defRPr sz="1500">
+                <a:solidFill>
+                  <a:srgbClr val="1E293B"/>
+                </a:solidFill>
+                <a:latin typeface="Calibri"/>
+              </a:defRPr>
+            </a:pPr>
+            <a:r>
+              <a:t>•  Net monthly burn reduced to $94K with 18.2-month cash runway</a:t>
+            </a:r>
+          </a:p>
+        </p:txBody>
+      </p:sp>
+      <p:sp>
+        <p:nvSpPr>
+          <p:cNvPr id="6" name="TextBox 5"/>
           <p:cNvSpPr txBox="1"/>
           <p:nvPr/>
         </p:nvSpPr>
         <p:spPr>
           <a:xfrm>
-            <a:off x="3749040" y="2286000"/>
-            <a:ext cx="1920240" cy="3383280"/>
+            <a:off x="731520" y="6309360"/>
+            <a:ext cx="10698480" cy="365760"/>
           </a:xfrm>
           <a:prstGeom prst="rect">
             <a:avLst/>
@@ -3587,300 +5686,6 @@
           <a:noFill/>
         </p:spPr>
         <p:txBody>
-          <a:bodyPr wrap="square">
-            <a:spAutoFit/>
-          </a:bodyPr>
-          <a:lstStyle/>
-          <a:p>
-            <a:pPr>
-              <a:spcAft>
-                <a:spcPts val="1000"/>
-              </a:spcAft>
-              <a:defRPr sz="3600" b="1">
-                <a:solidFill>
-                  <a:srgbClr val="2563EB"/>
-                </a:solidFill>
-                <a:latin typeface="Calibri"/>
-              </a:defRPr>
-            </a:pPr>
-            <a:r>
-              <a:t>114%</a:t>
-            </a:r>
-          </a:p>
-          <a:p>
-            <a:pPr>
-              <a:spcAft>
-                <a:spcPts val="800"/>
-              </a:spcAft>
-              <a:defRPr sz="1400" b="1">
-                <a:solidFill>
-                  <a:srgbClr val="0F172A"/>
-                </a:solidFill>
-                <a:latin typeface="Calibri"/>
-              </a:defRPr>
-            </a:pPr>
-            <a:r>
-              <a:t>Net Revenue Retention</a:t>
-            </a:r>
-          </a:p>
-          <a:p>
-            <a:pPr>
-              <a:defRPr sz="1100">
-                <a:solidFill>
-                  <a:srgbClr val="64748B"/>
-                </a:solidFill>
-                <a:latin typeface="Calibri"/>
-              </a:defRPr>
-            </a:pPr>
-            <a:r>
-              <a:t>Driven by volumetric dockdoor throughput tiers</a:t>
-            </a:r>
-          </a:p>
-        </p:txBody>
-      </p:sp>
-      <p:sp>
-        <p:nvSpPr>
-          <p:cNvPr id="9" name="Rounded Rectangle 8"/>
-          <p:cNvSpPr/>
-          <p:nvPr/>
-        </p:nvSpPr>
-        <p:spPr>
-          <a:xfrm>
-            <a:off x="6217920" y="1920240"/>
-            <a:ext cx="2468880" cy="4114800"/>
-          </a:xfrm>
-          <a:prstGeom prst="roundRect">
-            <a:avLst/>
-          </a:prstGeom>
-          <a:solidFill>
-            <a:srgbClr val="F8FAFC"/>
-          </a:solidFill>
-          <a:ln w="12700">
-            <a:solidFill>
-              <a:srgbClr val="CBD5E1"/>
-            </a:solidFill>
-          </a:ln>
-        </p:spPr>
-        <p:style>
-          <a:lnRef idx="1">
-            <a:schemeClr val="accent1"/>
-          </a:lnRef>
-          <a:fillRef idx="3">
-            <a:schemeClr val="accent1"/>
-          </a:fillRef>
-          <a:effectRef idx="2">
-            <a:schemeClr val="accent1"/>
-          </a:effectRef>
-          <a:fontRef idx="minor">
-            <a:schemeClr val="lt1"/>
-          </a:fontRef>
-        </p:style>
-        <p:txBody>
-          <a:bodyPr rtlCol="0" anchor="ctr"/>
-          <a:lstStyle/>
-          <a:p>
-            <a:pPr algn="ctr"/>
-          </a:p>
-        </p:txBody>
-      </p:sp>
-      <p:sp>
-        <p:nvSpPr>
-          <p:cNvPr id="10" name="TextBox 9"/>
-          <p:cNvSpPr txBox="1"/>
-          <p:nvPr/>
-        </p:nvSpPr>
-        <p:spPr>
-          <a:xfrm>
-            <a:off x="6492240" y="2286000"/>
-            <a:ext cx="1920240" cy="3383280"/>
-          </a:xfrm>
-          <a:prstGeom prst="rect">
-            <a:avLst/>
-          </a:prstGeom>
-          <a:noFill/>
-        </p:spPr>
-        <p:txBody>
-          <a:bodyPr wrap="square">
-            <a:spAutoFit/>
-          </a:bodyPr>
-          <a:lstStyle/>
-          <a:p>
-            <a:pPr>
-              <a:spcAft>
-                <a:spcPts val="1000"/>
-              </a:spcAft>
-              <a:defRPr sz="3600" b="1">
-                <a:solidFill>
-                  <a:srgbClr val="2563EB"/>
-                </a:solidFill>
-                <a:latin typeface="Calibri"/>
-              </a:defRPr>
-            </a:pPr>
-            <a:r>
-              <a:t>0.0%</a:t>
-            </a:r>
-          </a:p>
-          <a:p>
-            <a:pPr>
-              <a:spcAft>
-                <a:spcPts val="800"/>
-              </a:spcAft>
-              <a:defRPr sz="1400" b="1">
-                <a:solidFill>
-                  <a:srgbClr val="0F172A"/>
-                </a:solidFill>
-                <a:latin typeface="Calibri"/>
-              </a:defRPr>
-            </a:pPr>
-            <a:r>
-              <a:t>Enterprise Logo Churn</a:t>
-            </a:r>
-          </a:p>
-          <a:p>
-            <a:pPr>
-              <a:defRPr sz="1100">
-                <a:solidFill>
-                  <a:srgbClr val="64748B"/>
-                </a:solidFill>
-                <a:latin typeface="Calibri"/>
-              </a:defRPr>
-            </a:pPr>
-            <a:r>
-              <a:t>Zero cancellations across 6 consecutive quarters</a:t>
-            </a:r>
-          </a:p>
-        </p:txBody>
-      </p:sp>
-      <p:sp>
-        <p:nvSpPr>
-          <p:cNvPr id="11" name="Rounded Rectangle 10"/>
-          <p:cNvSpPr/>
-          <p:nvPr/>
-        </p:nvSpPr>
-        <p:spPr>
-          <a:xfrm>
-            <a:off x="8961120" y="1920240"/>
-            <a:ext cx="2468880" cy="4114800"/>
-          </a:xfrm>
-          <a:prstGeom prst="roundRect">
-            <a:avLst/>
-          </a:prstGeom>
-          <a:solidFill>
-            <a:srgbClr val="F8FAFC"/>
-          </a:solidFill>
-          <a:ln w="12700">
-            <a:solidFill>
-              <a:srgbClr val="CBD5E1"/>
-            </a:solidFill>
-          </a:ln>
-        </p:spPr>
-        <p:style>
-          <a:lnRef idx="1">
-            <a:schemeClr val="accent1"/>
-          </a:lnRef>
-          <a:fillRef idx="3">
-            <a:schemeClr val="accent1"/>
-          </a:fillRef>
-          <a:effectRef idx="2">
-            <a:schemeClr val="accent1"/>
-          </a:effectRef>
-          <a:fontRef idx="minor">
-            <a:schemeClr val="lt1"/>
-          </a:fontRef>
-        </p:style>
-        <p:txBody>
-          <a:bodyPr rtlCol="0" anchor="ctr"/>
-          <a:lstStyle/>
-          <a:p>
-            <a:pPr algn="ctr"/>
-          </a:p>
-        </p:txBody>
-      </p:sp>
-      <p:sp>
-        <p:nvSpPr>
-          <p:cNvPr id="12" name="TextBox 11"/>
-          <p:cNvSpPr txBox="1"/>
-          <p:nvPr/>
-        </p:nvSpPr>
-        <p:spPr>
-          <a:xfrm>
-            <a:off x="9235440" y="2286000"/>
-            <a:ext cx="1920240" cy="3383280"/>
-          </a:xfrm>
-          <a:prstGeom prst="rect">
-            <a:avLst/>
-          </a:prstGeom>
-          <a:noFill/>
-        </p:spPr>
-        <p:txBody>
-          <a:bodyPr wrap="square">
-            <a:spAutoFit/>
-          </a:bodyPr>
-          <a:lstStyle/>
-          <a:p>
-            <a:pPr>
-              <a:spcAft>
-                <a:spcPts val="1000"/>
-              </a:spcAft>
-              <a:defRPr sz="3600" b="1">
-                <a:solidFill>
-                  <a:srgbClr val="2563EB"/>
-                </a:solidFill>
-                <a:latin typeface="Calibri"/>
-              </a:defRPr>
-            </a:pPr>
-            <a:r>
-              <a:t>78.4%</a:t>
-            </a:r>
-          </a:p>
-          <a:p>
-            <a:pPr>
-              <a:spcAft>
-                <a:spcPts val="800"/>
-              </a:spcAft>
-              <a:defRPr sz="1400" b="1">
-                <a:solidFill>
-                  <a:srgbClr val="0F172A"/>
-                </a:solidFill>
-                <a:latin typeface="Calibri"/>
-              </a:defRPr>
-            </a:pPr>
-            <a:r>
-              <a:t>Gross Margin</a:t>
-            </a:r>
-          </a:p>
-          <a:p>
-            <a:pPr>
-              <a:defRPr sz="1100">
-                <a:solidFill>
-                  <a:srgbClr val="64748B"/>
-                </a:solidFill>
-                <a:latin typeface="Calibri"/>
-              </a:defRPr>
-            </a:pPr>
-            <a:r>
-              <a:t>Pure SaaS economics with hardware-agnostic API</a:t>
-            </a:r>
-          </a:p>
-        </p:txBody>
-      </p:sp>
-      <p:sp>
-        <p:nvSpPr>
-          <p:cNvPr id="13" name="TextBox 12"/>
-          <p:cNvSpPr txBox="1"/>
-          <p:nvPr/>
-        </p:nvSpPr>
-        <p:spPr>
-          <a:xfrm>
-            <a:off x="731520" y="6309360"/>
-            <a:ext cx="10698480" cy="365760"/>
-          </a:xfrm>
-          <a:prstGeom prst="rect">
-            <a:avLst/>
-          </a:prstGeom>
-          <a:noFill/>
-        </p:spPr>
-        <p:txBody>
           <a:bodyPr wrap="none">
             <a:spAutoFit/>
           </a:bodyPr>
@@ -3895,7 +5700,7 @@
               </a:defRPr>
             </a:pPr>
             <a:r>
-              <a:t>Williams Logistics Network · Q4 2026 Executive Investor Update · Slide 2 of 7</a:t>
+              <a:t>Q4 2026 Executive Investor Update — Estella Williams · Slide 2 of 16</a:t>
             </a:r>
           </a:p>
         </p:txBody>
@@ -3995,7 +5800,7 @@
               </a:defRPr>
             </a:pPr>
             <a:r>
-              <a:t>FINANCIAL TRAJECTORY</a:t>
+              <a:t>Q4 2026 EXECUTIVE INVESTOR UPDATE — ESTELLA WILLIA</a:t>
             </a:r>
           </a:p>
           <a:p>
@@ -4008,7 +5813,7 @@
               </a:defRPr>
             </a:pPr>
             <a:r>
-              <a:t>Quarterly ARR Bridge &amp; Expansion Velocity</a:t>
+              <a:t>Financial Trajectory &amp; ARR Bridge</a:t>
             </a:r>
           </a:p>
           <a:p>
@@ -4024,7 +5829,7 @@
               </a:defRPr>
             </a:pPr>
             <a:r>
-              <a:t>Clear line of sight to $6.8M ARR exit run-rate in FY 2027</a:t>
+              <a:t>Q1 2026 Actuals to FY 2027 Projections</a:t>
             </a:r>
           </a:p>
         </p:txBody>
@@ -4074,59 +5879,14 @@
       </p:sp>
       <p:sp>
         <p:nvSpPr>
-          <p:cNvPr id="5" name="Rounded Rectangle 4"/>
-          <p:cNvSpPr/>
-          <p:nvPr/>
-        </p:nvSpPr>
-        <p:spPr>
-          <a:xfrm>
-            <a:off x="731520" y="1920240"/>
-            <a:ext cx="3352800" cy="4114800"/>
-          </a:xfrm>
-          <a:prstGeom prst="roundRect">
-            <a:avLst/>
-          </a:prstGeom>
-          <a:solidFill>
-            <a:srgbClr val="F8FAFC"/>
-          </a:solidFill>
-          <a:ln w="12700">
-            <a:solidFill>
-              <a:srgbClr val="CBD5E1"/>
-            </a:solidFill>
-          </a:ln>
-        </p:spPr>
-        <p:style>
-          <a:lnRef idx="1">
-            <a:schemeClr val="accent1"/>
-          </a:lnRef>
-          <a:fillRef idx="3">
-            <a:schemeClr val="accent1"/>
-          </a:fillRef>
-          <a:effectRef idx="2">
-            <a:schemeClr val="accent1"/>
-          </a:effectRef>
-          <a:fontRef idx="minor">
-            <a:schemeClr val="lt1"/>
-          </a:fontRef>
-        </p:style>
-        <p:txBody>
-          <a:bodyPr rtlCol="0" anchor="ctr"/>
-          <a:lstStyle/>
-          <a:p>
-            <a:pPr algn="ctr"/>
-          </a:p>
-        </p:txBody>
-      </p:sp>
-      <p:sp>
-        <p:nvSpPr>
-          <p:cNvPr id="6" name="TextBox 5"/>
+          <p:cNvPr id="5" name="TextBox 4"/>
           <p:cNvSpPr txBox="1"/>
           <p:nvPr/>
         </p:nvSpPr>
         <p:spPr>
           <a:xfrm>
-            <a:off x="1005840" y="2194560"/>
-            <a:ext cx="2804160" cy="3566160"/>
+            <a:off x="731520" y="2011680"/>
+            <a:ext cx="10698480" cy="4114800"/>
           </a:xfrm>
           <a:prstGeom prst="rect">
             <a:avLst/>
@@ -4140,125 +5900,111 @@
           <a:lstStyle/>
           <a:p>
             <a:pPr>
+              <a:lnSpc>
+                <a:spcPct val="125000"/>
+              </a:lnSpc>
               <a:spcAft>
-                <a:spcPts val="1000"/>
+                <a:spcPts val="1400"/>
               </a:spcAft>
-              <a:defRPr sz="1500" b="1">
-                <a:solidFill>
-                  <a:srgbClr val="0F172A"/>
-                </a:solidFill>
-                <a:latin typeface="Calibri"/>
-              </a:defRPr>
-            </a:pPr>
-            <a:r>
-              <a:t>Q1–Q3 2026 Actual Growth</a:t>
-            </a:r>
-          </a:p>
-          <a:p>
-            <a:pPr>
+              <a:defRPr sz="1500">
+                <a:solidFill>
+                  <a:srgbClr val="1E293B"/>
+                </a:solidFill>
+                <a:latin typeface="Calibri"/>
+              </a:defRPr>
+            </a:pPr>
+            <a:r>
+              <a:t>•  Q1 Actuals: $2.8M ARR across 180 active terminals</a:t>
+            </a:r>
+          </a:p>
+          <a:p>
+            <a:pPr>
+              <a:lnSpc>
+                <a:spcPct val="125000"/>
+              </a:lnSpc>
               <a:spcAft>
-                <a:spcPts val="600"/>
+                <a:spcPts val="1400"/>
               </a:spcAft>
-              <a:defRPr sz="1100">
-                <a:solidFill>
-                  <a:srgbClr val="334155"/>
-                </a:solidFill>
-                <a:latin typeface="Calibri"/>
-              </a:defRPr>
-            </a:pPr>
-            <a:r>
-              <a:t>•  Q1 2026: $2.8M ARR across 128 contracted distribution hubs</a:t>
-            </a:r>
-          </a:p>
-          <a:p>
-            <a:pPr>
+              <a:defRPr sz="1500">
+                <a:solidFill>
+                  <a:srgbClr val="1E293B"/>
+                </a:solidFill>
+                <a:latin typeface="Calibri"/>
+              </a:defRPr>
+            </a:pPr>
+            <a:r>
+              <a:t>•  Q2 Actuals: $3.4M ARR with 28 new carrier fleet logos</a:t>
+            </a:r>
+          </a:p>
+          <a:p>
+            <a:pPr>
+              <a:lnSpc>
+                <a:spcPct val="125000"/>
+              </a:lnSpc>
               <a:spcAft>
-                <a:spcPts val="600"/>
+                <a:spcPts val="1400"/>
               </a:spcAft>
-              <a:defRPr sz="1100">
-                <a:solidFill>
-                  <a:srgbClr val="334155"/>
-                </a:solidFill>
-                <a:latin typeface="Calibri"/>
-              </a:defRPr>
-            </a:pPr>
-            <a:r>
-              <a:t>•  Q2 2026: $3.4M ARR with 28 new carrier fleet enterprise logos</a:t>
-            </a:r>
-          </a:p>
-          <a:p>
-            <a:pPr>
+              <a:defRPr sz="1500">
+                <a:solidFill>
+                  <a:srgbClr val="1E293B"/>
+                </a:solidFill>
+                <a:latin typeface="Calibri"/>
+              </a:defRPr>
+            </a:pPr>
+            <a:r>
+              <a:t>•  Q3 Actuals: $4.2M ARR driven by $420K organic expansion</a:t>
+            </a:r>
+          </a:p>
+          <a:p>
+            <a:pPr>
+              <a:lnSpc>
+                <a:spcPct val="125000"/>
+              </a:lnSpc>
               <a:spcAft>
-                <a:spcPts val="600"/>
+                <a:spcPts val="1400"/>
               </a:spcAft>
-              <a:defRPr sz="1100">
-                <a:solidFill>
-                  <a:srgbClr val="334155"/>
-                </a:solidFill>
-                <a:latin typeface="Calibri"/>
-              </a:defRPr>
-            </a:pPr>
-            <a:r>
-              <a:t>•  Q3 2026: $4.2M ARR driven by Midwest freight corridor expansion</a:t>
-            </a:r>
-          </a:p>
-        </p:txBody>
-      </p:sp>
-      <p:sp>
-        <p:nvSpPr>
-          <p:cNvPr id="7" name="Rounded Rectangle 6"/>
-          <p:cNvSpPr/>
-          <p:nvPr/>
-        </p:nvSpPr>
-        <p:spPr>
-          <a:xfrm>
-            <a:off x="4404360" y="1920240"/>
-            <a:ext cx="3352800" cy="4114800"/>
-          </a:xfrm>
-          <a:prstGeom prst="roundRect">
-            <a:avLst/>
-          </a:prstGeom>
-          <a:solidFill>
-            <a:srgbClr val="F8FAFC"/>
-          </a:solidFill>
-          <a:ln w="12700">
-            <a:solidFill>
-              <a:srgbClr val="CBD5E1"/>
-            </a:solidFill>
-          </a:ln>
-        </p:spPr>
-        <p:style>
-          <a:lnRef idx="1">
-            <a:schemeClr val="accent1"/>
-          </a:lnRef>
-          <a:fillRef idx="3">
-            <a:schemeClr val="accent1"/>
-          </a:fillRef>
-          <a:effectRef idx="2">
-            <a:schemeClr val="accent1"/>
-          </a:effectRef>
-          <a:fontRef idx="minor">
-            <a:schemeClr val="lt1"/>
-          </a:fontRef>
-        </p:style>
-        <p:txBody>
-          <a:bodyPr rtlCol="0" anchor="ctr"/>
-          <a:lstStyle/>
-          <a:p>
-            <a:pPr algn="ctr"/>
-          </a:p>
-        </p:txBody>
-      </p:sp>
-      <p:sp>
-        <p:nvSpPr>
-          <p:cNvPr id="8" name="TextBox 7"/>
+              <a:defRPr sz="1500">
+                <a:solidFill>
+                  <a:srgbClr val="1E293B"/>
+                </a:solidFill>
+                <a:latin typeface="Calibri"/>
+              </a:defRPr>
+            </a:pPr>
+            <a:r>
+              <a:t>•  Q4 2026 Target: $5.1M ARR (92% visibility on pipeline contracts)</a:t>
+            </a:r>
+          </a:p>
+          <a:p>
+            <a:pPr>
+              <a:lnSpc>
+                <a:spcPct val="125000"/>
+              </a:lnSpc>
+              <a:spcAft>
+                <a:spcPts val="1400"/>
+              </a:spcAft>
+              <a:defRPr sz="1500">
+                <a:solidFill>
+                  <a:srgbClr val="1E293B"/>
+                </a:solidFill>
+                <a:latin typeface="Calibri"/>
+              </a:defRPr>
+            </a:pPr>
+            <a:r>
+              <a:t>•  FY 2027 Plan: $7.8M ARR with positive operating cash flow by Q3</a:t>
+            </a:r>
+          </a:p>
+        </p:txBody>
+      </p:sp>
+      <p:sp>
+        <p:nvSpPr>
+          <p:cNvPr id="6" name="TextBox 5"/>
           <p:cNvSpPr txBox="1"/>
           <p:nvPr/>
         </p:nvSpPr>
         <p:spPr>
           <a:xfrm>
-            <a:off x="4678680" y="2194560"/>
-            <a:ext cx="2804160" cy="3566160"/>
+            <a:off x="731520" y="6309360"/>
+            <a:ext cx="10698480" cy="365760"/>
           </a:xfrm>
           <a:prstGeom prst="rect">
             <a:avLst/>
@@ -4266,225 +6012,6 @@
           <a:noFill/>
         </p:spPr>
         <p:txBody>
-          <a:bodyPr wrap="square">
-            <a:spAutoFit/>
-          </a:bodyPr>
-          <a:lstStyle/>
-          <a:p>
-            <a:pPr>
-              <a:spcAft>
-                <a:spcPts val="1000"/>
-              </a:spcAft>
-              <a:defRPr sz="1500" b="1">
-                <a:solidFill>
-                  <a:srgbClr val="0F172A"/>
-                </a:solidFill>
-                <a:latin typeface="Calibri"/>
-              </a:defRPr>
-            </a:pPr>
-            <a:r>
-              <a:t>Q4 Forecast &amp; FY2027 Budget</a:t>
-            </a:r>
-          </a:p>
-          <a:p>
-            <a:pPr>
-              <a:spcAft>
-                <a:spcPts val="600"/>
-              </a:spcAft>
-              <a:defRPr sz="1100">
-                <a:solidFill>
-                  <a:srgbClr val="334155"/>
-                </a:solidFill>
-                <a:latin typeface="Calibri"/>
-              </a:defRPr>
-            </a:pPr>
-            <a:r>
-              <a:t>•  Q4 2026 Target: $5.1M ARR (94% contracted pipeline coverage)</a:t>
-            </a:r>
-          </a:p>
-          <a:p>
-            <a:pPr>
-              <a:spcAft>
-                <a:spcPts val="600"/>
-              </a:spcAft>
-              <a:defRPr sz="1100">
-                <a:solidFill>
-                  <a:srgbClr val="334155"/>
-                </a:solidFill>
-                <a:latin typeface="Calibri"/>
-              </a:defRPr>
-            </a:pPr>
-            <a:r>
-              <a:t>•  FY 2027 Projected: $6.8M ARR with 310 terminal deployments</a:t>
-            </a:r>
-          </a:p>
-          <a:p>
-            <a:pPr>
-              <a:spcAft>
-                <a:spcPts val="600"/>
-              </a:spcAft>
-              <a:defRPr sz="1100">
-                <a:solidFill>
-                  <a:srgbClr val="334155"/>
-                </a:solidFill>
-                <a:latin typeface="Calibri"/>
-              </a:defRPr>
-            </a:pPr>
-            <a:r>
-              <a:t>•  Cash flow breakeven anticipated in Q2 2027 without secondary financing</a:t>
-            </a:r>
-          </a:p>
-        </p:txBody>
-      </p:sp>
-      <p:sp>
-        <p:nvSpPr>
-          <p:cNvPr id="9" name="Rounded Rectangle 8"/>
-          <p:cNvSpPr/>
-          <p:nvPr/>
-        </p:nvSpPr>
-        <p:spPr>
-          <a:xfrm>
-            <a:off x="8077200" y="1920240"/>
-            <a:ext cx="3352800" cy="4114800"/>
-          </a:xfrm>
-          <a:prstGeom prst="roundRect">
-            <a:avLst/>
-          </a:prstGeom>
-          <a:solidFill>
-            <a:srgbClr val="F8FAFC"/>
-          </a:solidFill>
-          <a:ln w="12700">
-            <a:solidFill>
-              <a:srgbClr val="CBD5E1"/>
-            </a:solidFill>
-          </a:ln>
-        </p:spPr>
-        <p:style>
-          <a:lnRef idx="1">
-            <a:schemeClr val="accent1"/>
-          </a:lnRef>
-          <a:fillRef idx="3">
-            <a:schemeClr val="accent1"/>
-          </a:fillRef>
-          <a:effectRef idx="2">
-            <a:schemeClr val="accent1"/>
-          </a:effectRef>
-          <a:fontRef idx="minor">
-            <a:schemeClr val="lt1"/>
-          </a:fontRef>
-        </p:style>
-        <p:txBody>
-          <a:bodyPr rtlCol="0" anchor="ctr"/>
-          <a:lstStyle/>
-          <a:p>
-            <a:pPr algn="ctr"/>
-          </a:p>
-        </p:txBody>
-      </p:sp>
-      <p:sp>
-        <p:nvSpPr>
-          <p:cNvPr id="10" name="TextBox 9"/>
-          <p:cNvSpPr txBox="1"/>
-          <p:nvPr/>
-        </p:nvSpPr>
-        <p:spPr>
-          <a:xfrm>
-            <a:off x="8351520" y="2194560"/>
-            <a:ext cx="2804160" cy="3566160"/>
-          </a:xfrm>
-          <a:prstGeom prst="rect">
-            <a:avLst/>
-          </a:prstGeom>
-          <a:noFill/>
-        </p:spPr>
-        <p:txBody>
-          <a:bodyPr wrap="square">
-            <a:spAutoFit/>
-          </a:bodyPr>
-          <a:lstStyle/>
-          <a:p>
-            <a:pPr>
-              <a:spcAft>
-                <a:spcPts val="1000"/>
-              </a:spcAft>
-              <a:defRPr sz="1500" b="1">
-                <a:solidFill>
-                  <a:srgbClr val="0F172A"/>
-                </a:solidFill>
-                <a:latin typeface="Calibri"/>
-              </a:defRPr>
-            </a:pPr>
-            <a:r>
-              <a:t>Unit Economics &amp; Payback</a:t>
-            </a:r>
-          </a:p>
-          <a:p>
-            <a:pPr>
-              <a:spcAft>
-                <a:spcPts val="600"/>
-              </a:spcAft>
-              <a:defRPr sz="1100">
-                <a:solidFill>
-                  <a:srgbClr val="334155"/>
-                </a:solidFill>
-                <a:latin typeface="Calibri"/>
-              </a:defRPr>
-            </a:pPr>
-            <a:r>
-              <a:t>•  Average Contract Value (ACV): $28,500/year per terminal hub</a:t>
-            </a:r>
-          </a:p>
-          <a:p>
-            <a:pPr>
-              <a:spcAft>
-                <a:spcPts val="600"/>
-              </a:spcAft>
-              <a:defRPr sz="1100">
-                <a:solidFill>
-                  <a:srgbClr val="334155"/>
-                </a:solidFill>
-                <a:latin typeface="Calibri"/>
-              </a:defRPr>
-            </a:pPr>
-            <a:r>
-              <a:t>•  Customer Acquisition Cost (CAC): $5,900 per enterprise logo</a:t>
-            </a:r>
-          </a:p>
-          <a:p>
-            <a:pPr>
-              <a:spcAft>
-                <a:spcPts val="600"/>
-              </a:spcAft>
-              <a:defRPr sz="1100">
-                <a:solidFill>
-                  <a:srgbClr val="334155"/>
-                </a:solidFill>
-                <a:latin typeface="Calibri"/>
-              </a:defRPr>
-            </a:pPr>
-            <a:r>
-              <a:t>•  LTV to CAC Ratio: 5.4x with 6.2 month cash payback window</a:t>
-            </a:r>
-          </a:p>
-        </p:txBody>
-      </p:sp>
-      <p:sp>
-        <p:nvSpPr>
-          <p:cNvPr id="11" name="TextBox 10"/>
-          <p:cNvSpPr txBox="1"/>
-          <p:nvPr/>
-        </p:nvSpPr>
-        <p:spPr>
-          <a:xfrm>
-            <a:off x="731520" y="6309360"/>
-            <a:ext cx="10698480" cy="365760"/>
-          </a:xfrm>
-          <a:prstGeom prst="rect">
-            <a:avLst/>
-          </a:prstGeom>
-          <a:noFill/>
-        </p:spPr>
-        <p:txBody>
           <a:bodyPr wrap="none">
             <a:spAutoFit/>
           </a:bodyPr>
@@ -4499,7 +6026,7 @@
               </a:defRPr>
             </a:pPr>
             <a:r>
-              <a:t>Williams Logistics Network · Q4 2026 Executive Investor Update · Slide 3 of 7</a:t>
+              <a:t>Q4 2026 Executive Investor Update — Estella Williams · Slide 3 of 16</a:t>
             </a:r>
           </a:p>
         </p:txBody>
@@ -4599,7 +6126,7 @@
               </a:defRPr>
             </a:pPr>
             <a:r>
-              <a:t>CORE PRODUCT INNOVATION</a:t>
+              <a:t>Q4 2026 EXECUTIVE INVESTOR UPDATE — ESTELLA WILLIA</a:t>
             </a:r>
           </a:p>
           <a:p>
@@ -4612,7 +6139,7 @@
               </a:defRPr>
             </a:pPr>
             <a:r>
-              <a:t>DockDoor 2.0: Automated Cross-Dock Orchestration</a:t>
+              <a:t>Net Revenue Retention &amp; Cohort Health</a:t>
             </a:r>
           </a:p>
           <a:p>
@@ -4628,7 +6155,7 @@
               </a:defRPr>
             </a:pPr>
             <a:r>
-              <a:t>Replacing manual whiteboards, phone tag, and demurrage penalties with automated gate logic</a:t>
+              <a:t>Zero Enterprise Logo Churn Across 6 Consecutive Quarters</a:t>
             </a:r>
           </a:p>
         </p:txBody>
@@ -4678,59 +6205,14 @@
       </p:sp>
       <p:sp>
         <p:nvSpPr>
-          <p:cNvPr id="5" name="Rounded Rectangle 4"/>
-          <p:cNvSpPr/>
-          <p:nvPr/>
-        </p:nvSpPr>
-        <p:spPr>
-          <a:xfrm>
-            <a:off x="731520" y="1920240"/>
-            <a:ext cx="3352800" cy="4114800"/>
-          </a:xfrm>
-          <a:prstGeom prst="roundRect">
-            <a:avLst/>
-          </a:prstGeom>
-          <a:solidFill>
-            <a:srgbClr val="F8FAFC"/>
-          </a:solidFill>
-          <a:ln w="12700">
-            <a:solidFill>
-              <a:srgbClr val="CBD5E1"/>
-            </a:solidFill>
-          </a:ln>
-        </p:spPr>
-        <p:style>
-          <a:lnRef idx="1">
-            <a:schemeClr val="accent1"/>
-          </a:lnRef>
-          <a:fillRef idx="3">
-            <a:schemeClr val="accent1"/>
-          </a:fillRef>
-          <a:effectRef idx="2">
-            <a:schemeClr val="accent1"/>
-          </a:effectRef>
-          <a:fontRef idx="minor">
-            <a:schemeClr val="lt1"/>
-          </a:fontRef>
-        </p:style>
-        <p:txBody>
-          <a:bodyPr rtlCol="0" anchor="ctr"/>
-          <a:lstStyle/>
-          <a:p>
-            <a:pPr algn="ctr"/>
-          </a:p>
-        </p:txBody>
-      </p:sp>
-      <p:sp>
-        <p:nvSpPr>
-          <p:cNvPr id="6" name="TextBox 5"/>
+          <p:cNvPr id="5" name="TextBox 4"/>
           <p:cNvSpPr txBox="1"/>
           <p:nvPr/>
         </p:nvSpPr>
         <p:spPr>
           <a:xfrm>
-            <a:off x="1005840" y="2194560"/>
-            <a:ext cx="2804160" cy="3566160"/>
+            <a:off x="731520" y="2011680"/>
+            <a:ext cx="10698480" cy="4114800"/>
           </a:xfrm>
           <a:prstGeom prst="rect">
             <a:avLst/>
@@ -4744,125 +6226,92 @@
           <a:lstStyle/>
           <a:p>
             <a:pPr>
+              <a:lnSpc>
+                <a:spcPct val="125000"/>
+              </a:lnSpc>
               <a:spcAft>
-                <a:spcPts val="1000"/>
+                <a:spcPts val="1400"/>
               </a:spcAft>
-              <a:defRPr sz="1500" b="1">
-                <a:solidFill>
-                  <a:srgbClr val="0F172A"/>
-                </a:solidFill>
-                <a:latin typeface="Calibri"/>
-              </a:defRPr>
-            </a:pPr>
-            <a:r>
-              <a:t>1. Geofenced Driver Intake</a:t>
-            </a:r>
-          </a:p>
-          <a:p>
-            <a:pPr>
+              <a:defRPr sz="1500">
+                <a:solidFill>
+                  <a:srgbClr val="1E293B"/>
+                </a:solidFill>
+                <a:latin typeface="Calibri"/>
+              </a:defRPr>
+            </a:pPr>
+            <a:r>
+              <a:t>•  Gross Revenue Retention: 96.4% across all contract vintages</a:t>
+            </a:r>
+          </a:p>
+          <a:p>
+            <a:pPr>
+              <a:lnSpc>
+                <a:spcPct val="125000"/>
+              </a:lnSpc>
               <a:spcAft>
-                <a:spcPts val="600"/>
+                <a:spcPts val="1400"/>
               </a:spcAft>
-              <a:defRPr sz="1100">
-                <a:solidFill>
-                  <a:srgbClr val="334155"/>
-                </a:solidFill>
-                <a:latin typeface="Calibri"/>
-              </a:defRPr>
-            </a:pPr>
-            <a:r>
-              <a:t>•  Automated arrival trigger 2 miles from terminal perimeter</a:t>
-            </a:r>
-          </a:p>
-          <a:p>
-            <a:pPr>
+              <a:defRPr sz="1500">
+                <a:solidFill>
+                  <a:srgbClr val="1E293B"/>
+                </a:solidFill>
+                <a:latin typeface="Calibri"/>
+              </a:defRPr>
+            </a:pPr>
+            <a:r>
+              <a:t>•  Net Expansion Rate: 114% driven by dockdoor volume tier upgrades</a:t>
+            </a:r>
+          </a:p>
+          <a:p>
+            <a:pPr>
+              <a:lnSpc>
+                <a:spcPct val="125000"/>
+              </a:lnSpc>
               <a:spcAft>
-                <a:spcPts val="600"/>
+                <a:spcPts val="1400"/>
               </a:spcAft>
-              <a:defRPr sz="1100">
-                <a:solidFill>
-                  <a:srgbClr val="334155"/>
-                </a:solidFill>
-                <a:latin typeface="Calibri"/>
-              </a:defRPr>
-            </a:pPr>
-            <a:r>
-              <a:t>•  No app download required; runs via responsive web container</a:t>
-            </a:r>
-          </a:p>
-          <a:p>
-            <a:pPr>
+              <a:defRPr sz="1500">
+                <a:solidFill>
+                  <a:srgbClr val="1E293B"/>
+                </a:solidFill>
+                <a:latin typeface="Calibri"/>
+              </a:defRPr>
+            </a:pPr>
+            <a:r>
+              <a:t>•  Cohort health shows full CAC payback achieved within 7.2 months of go-live</a:t>
+            </a:r>
+          </a:p>
+          <a:p>
+            <a:pPr>
+              <a:lnSpc>
+                <a:spcPct val="125000"/>
+              </a:lnSpc>
               <a:spcAft>
-                <a:spcPts val="600"/>
+                <a:spcPts val="1400"/>
               </a:spcAft>
-              <a:defRPr sz="1100">
-                <a:solidFill>
-                  <a:srgbClr val="334155"/>
-                </a:solidFill>
-                <a:latin typeface="Calibri"/>
-              </a:defRPr>
-            </a:pPr>
-            <a:r>
-              <a:t>•  Instantly verifies trailer seal number and cargo bill of lading</a:t>
-            </a:r>
-          </a:p>
-        </p:txBody>
-      </p:sp>
-      <p:sp>
-        <p:nvSpPr>
-          <p:cNvPr id="7" name="Rounded Rectangle 6"/>
-          <p:cNvSpPr/>
-          <p:nvPr/>
-        </p:nvSpPr>
-        <p:spPr>
-          <a:xfrm>
-            <a:off x="4404360" y="1920240"/>
-            <a:ext cx="3352800" cy="4114800"/>
-          </a:xfrm>
-          <a:prstGeom prst="roundRect">
-            <a:avLst/>
-          </a:prstGeom>
-          <a:solidFill>
-            <a:srgbClr val="F8FAFC"/>
-          </a:solidFill>
-          <a:ln w="12700">
-            <a:solidFill>
-              <a:srgbClr val="CBD5E1"/>
-            </a:solidFill>
-          </a:ln>
-        </p:spPr>
-        <p:style>
-          <a:lnRef idx="1">
-            <a:schemeClr val="accent1"/>
-          </a:lnRef>
-          <a:fillRef idx="3">
-            <a:schemeClr val="accent1"/>
-          </a:fillRef>
-          <a:effectRef idx="2">
-            <a:schemeClr val="accent1"/>
-          </a:effectRef>
-          <a:fontRef idx="minor">
-            <a:schemeClr val="lt1"/>
-          </a:fontRef>
-        </p:style>
-        <p:txBody>
-          <a:bodyPr rtlCol="0" anchor="ctr"/>
-          <a:lstStyle/>
-          <a:p>
-            <a:pPr algn="ctr"/>
-          </a:p>
-        </p:txBody>
-      </p:sp>
-      <p:sp>
-        <p:nvSpPr>
-          <p:cNvPr id="8" name="TextBox 7"/>
+              <a:defRPr sz="1500">
+                <a:solidFill>
+                  <a:srgbClr val="1E293B"/>
+                </a:solidFill>
+                <a:latin typeface="Calibri"/>
+              </a:defRPr>
+            </a:pPr>
+            <a:r>
+              <a:t>•  Average terminal usage increased from 42 trailers/day to 74 trailers/day</a:t>
+            </a:r>
+          </a:p>
+        </p:txBody>
+      </p:sp>
+      <p:sp>
+        <p:nvSpPr>
+          <p:cNvPr id="6" name="TextBox 5"/>
           <p:cNvSpPr txBox="1"/>
           <p:nvPr/>
         </p:nvSpPr>
         <p:spPr>
           <a:xfrm>
-            <a:off x="4678680" y="2194560"/>
-            <a:ext cx="2804160" cy="3566160"/>
+            <a:off x="731520" y="6309360"/>
+            <a:ext cx="10698480" cy="365760"/>
           </a:xfrm>
           <a:prstGeom prst="rect">
             <a:avLst/>
@@ -4870,225 +6319,6 @@
           <a:noFill/>
         </p:spPr>
         <p:txBody>
-          <a:bodyPr wrap="square">
-            <a:spAutoFit/>
-          </a:bodyPr>
-          <a:lstStyle/>
-          <a:p>
-            <a:pPr>
-              <a:spcAft>
-                <a:spcPts val="1000"/>
-              </a:spcAft>
-              <a:defRPr sz="1500" b="1">
-                <a:solidFill>
-                  <a:srgbClr val="0F172A"/>
-                </a:solidFill>
-                <a:latin typeface="Calibri"/>
-              </a:defRPr>
-            </a:pPr>
-            <a:r>
-              <a:t>2. Dynamic Bay Allocation</a:t>
-            </a:r>
-          </a:p>
-          <a:p>
-            <a:pPr>
-              <a:spcAft>
-                <a:spcPts val="600"/>
-              </a:spcAft>
-              <a:defRPr sz="1100">
-                <a:solidFill>
-                  <a:srgbClr val="334155"/>
-                </a:solidFill>
-                <a:latin typeface="Calibri"/>
-              </a:defRPr>
-            </a:pPr>
-            <a:r>
-              <a:t>•  Algorithms assign dock doors based on liftgate and reefer class</a:t>
-            </a:r>
-          </a:p>
-          <a:p>
-            <a:pPr>
-              <a:spcAft>
-                <a:spcPts val="600"/>
-              </a:spcAft>
-              <a:defRPr sz="1100">
-                <a:solidFill>
-                  <a:srgbClr val="334155"/>
-                </a:solidFill>
-                <a:latin typeface="Calibri"/>
-              </a:defRPr>
-            </a:pPr>
-            <a:r>
-              <a:t>•  Balances forklift staging distance to reduce cross-dock congestion</a:t>
-            </a:r>
-          </a:p>
-          <a:p>
-            <a:pPr>
-              <a:spcAft>
-                <a:spcPts val="600"/>
-              </a:spcAft>
-              <a:defRPr sz="1100">
-                <a:solidFill>
-                  <a:srgbClr val="334155"/>
-                </a:solidFill>
-                <a:latin typeface="Calibri"/>
-              </a:defRPr>
-            </a:pPr>
-            <a:r>
-              <a:t>•  Reduces average yard dwell time from 114 minutes to 38 minutes</a:t>
-            </a:r>
-          </a:p>
-        </p:txBody>
-      </p:sp>
-      <p:sp>
-        <p:nvSpPr>
-          <p:cNvPr id="9" name="Rounded Rectangle 8"/>
-          <p:cNvSpPr/>
-          <p:nvPr/>
-        </p:nvSpPr>
-        <p:spPr>
-          <a:xfrm>
-            <a:off x="8077200" y="1920240"/>
-            <a:ext cx="3352800" cy="4114800"/>
-          </a:xfrm>
-          <a:prstGeom prst="roundRect">
-            <a:avLst/>
-          </a:prstGeom>
-          <a:solidFill>
-            <a:srgbClr val="F8FAFC"/>
-          </a:solidFill>
-          <a:ln w="12700">
-            <a:solidFill>
-              <a:srgbClr val="CBD5E1"/>
-            </a:solidFill>
-          </a:ln>
-        </p:spPr>
-        <p:style>
-          <a:lnRef idx="1">
-            <a:schemeClr val="accent1"/>
-          </a:lnRef>
-          <a:fillRef idx="3">
-            <a:schemeClr val="accent1"/>
-          </a:fillRef>
-          <a:effectRef idx="2">
-            <a:schemeClr val="accent1"/>
-          </a:effectRef>
-          <a:fontRef idx="minor">
-            <a:schemeClr val="lt1"/>
-          </a:fontRef>
-        </p:style>
-        <p:txBody>
-          <a:bodyPr rtlCol="0" anchor="ctr"/>
-          <a:lstStyle/>
-          <a:p>
-            <a:pPr algn="ctr"/>
-          </a:p>
-        </p:txBody>
-      </p:sp>
-      <p:sp>
-        <p:nvSpPr>
-          <p:cNvPr id="10" name="TextBox 9"/>
-          <p:cNvSpPr txBox="1"/>
-          <p:nvPr/>
-        </p:nvSpPr>
-        <p:spPr>
-          <a:xfrm>
-            <a:off x="8351520" y="2194560"/>
-            <a:ext cx="2804160" cy="3566160"/>
-          </a:xfrm>
-          <a:prstGeom prst="rect">
-            <a:avLst/>
-          </a:prstGeom>
-          <a:noFill/>
-        </p:spPr>
-        <p:txBody>
-          <a:bodyPr wrap="square">
-            <a:spAutoFit/>
-          </a:bodyPr>
-          <a:lstStyle/>
-          <a:p>
-            <a:pPr>
-              <a:spcAft>
-                <a:spcPts val="1000"/>
-              </a:spcAft>
-              <a:defRPr sz="1500" b="1">
-                <a:solidFill>
-                  <a:srgbClr val="0F172A"/>
-                </a:solidFill>
-                <a:latin typeface="Calibri"/>
-              </a:defRPr>
-            </a:pPr>
-            <a:r>
-              <a:t>3. Sign-on-Glass Electronic BOL</a:t>
-            </a:r>
-          </a:p>
-          <a:p>
-            <a:pPr>
-              <a:spcAft>
-                <a:spcPts val="600"/>
-              </a:spcAft>
-              <a:defRPr sz="1100">
-                <a:solidFill>
-                  <a:srgbClr val="334155"/>
-                </a:solidFill>
-                <a:latin typeface="Calibri"/>
-              </a:defRPr>
-            </a:pPr>
-            <a:r>
-              <a:t>•  Digital damage exception markup with high-res photo capture</a:t>
-            </a:r>
-          </a:p>
-          <a:p>
-            <a:pPr>
-              <a:spcAft>
-                <a:spcPts val="600"/>
-              </a:spcAft>
-              <a:defRPr sz="1100">
-                <a:solidFill>
-                  <a:srgbClr val="334155"/>
-                </a:solidFill>
-                <a:latin typeface="Calibri"/>
-              </a:defRPr>
-            </a:pPr>
-            <a:r>
-              <a:t>•  Instant PDF bill-of-lading dispatch to carrier, broker, and consignee</a:t>
-            </a:r>
-          </a:p>
-          <a:p>
-            <a:pPr>
-              <a:spcAft>
-                <a:spcPts val="600"/>
-              </a:spcAft>
-              <a:defRPr sz="1100">
-                <a:solidFill>
-                  <a:srgbClr val="334155"/>
-                </a:solidFill>
-                <a:latin typeface="Calibri"/>
-              </a:defRPr>
-            </a:pPr>
-            <a:r>
-              <a:t>•  100% audit compliance with zero lost freight documentation</a:t>
-            </a:r>
-          </a:p>
-        </p:txBody>
-      </p:sp>
-      <p:sp>
-        <p:nvSpPr>
-          <p:cNvPr id="11" name="TextBox 10"/>
-          <p:cNvSpPr txBox="1"/>
-          <p:nvPr/>
-        </p:nvSpPr>
-        <p:spPr>
-          <a:xfrm>
-            <a:off x="731520" y="6309360"/>
-            <a:ext cx="10698480" cy="365760"/>
-          </a:xfrm>
-          <a:prstGeom prst="rect">
-            <a:avLst/>
-          </a:prstGeom>
-          <a:noFill/>
-        </p:spPr>
-        <p:txBody>
           <a:bodyPr wrap="none">
             <a:spAutoFit/>
           </a:bodyPr>
@@ -5103,7 +6333,7 @@
               </a:defRPr>
             </a:pPr>
             <a:r>
-              <a:t>Williams Logistics Network · Q4 2026 Executive Investor Update · Slide 4 of 7</a:t>
+              <a:t>Q4 2026 Executive Investor Update — Estella Williams · Slide 4 of 16</a:t>
             </a:r>
           </a:p>
         </p:txBody>
@@ -5203,7 +6433,7 @@
               </a:defRPr>
             </a:pPr>
             <a:r>
-              <a:t>ENTERPRISE PILOT CASE STUDY</a:t>
+              <a:t>Q4 2026 EXECUTIVE INVESTOR UPDATE — ESTELLA WILLIA</a:t>
             </a:r>
           </a:p>
           <a:p>
@@ -5216,7 +6446,7 @@
               </a:defRPr>
             </a:pPr>
             <a:r>
-              <a:t>Mid-States 3PL Case Study: Measurable Operational ROI</a:t>
+              <a:t>Gross Margin &amp; Infrastructure Efficiency</a:t>
             </a:r>
           </a:p>
           <a:p>
@@ -5232,7 +6462,7 @@
               </a:defRPr>
             </a:pPr>
             <a:r>
-              <a:t>Deployment across 4 regional cross-dock distribution hubs in Dallas, Kansas City, and Memphis</a:t>
+              <a:t>COGS Optimization Strategy</a:t>
             </a:r>
           </a:p>
         </p:txBody>
@@ -5282,59 +6512,14 @@
       </p:sp>
       <p:sp>
         <p:nvSpPr>
-          <p:cNvPr id="5" name="Rounded Rectangle 4"/>
-          <p:cNvSpPr/>
-          <p:nvPr/>
-        </p:nvSpPr>
-        <p:spPr>
-          <a:xfrm>
-            <a:off x="731520" y="1920240"/>
-            <a:ext cx="2468880" cy="4114800"/>
-          </a:xfrm>
-          <a:prstGeom prst="roundRect">
-            <a:avLst/>
-          </a:prstGeom>
-          <a:solidFill>
-            <a:srgbClr val="F8FAFC"/>
-          </a:solidFill>
-          <a:ln w="12700">
-            <a:solidFill>
-              <a:srgbClr val="CBD5E1"/>
-            </a:solidFill>
-          </a:ln>
-        </p:spPr>
-        <p:style>
-          <a:lnRef idx="1">
-            <a:schemeClr val="accent1"/>
-          </a:lnRef>
-          <a:fillRef idx="3">
-            <a:schemeClr val="accent1"/>
-          </a:fillRef>
-          <a:effectRef idx="2">
-            <a:schemeClr val="accent1"/>
-          </a:effectRef>
-          <a:fontRef idx="minor">
-            <a:schemeClr val="lt1"/>
-          </a:fontRef>
-        </p:style>
-        <p:txBody>
-          <a:bodyPr rtlCol="0" anchor="ctr"/>
-          <a:lstStyle/>
-          <a:p>
-            <a:pPr algn="ctr"/>
-          </a:p>
-        </p:txBody>
-      </p:sp>
-      <p:sp>
-        <p:nvSpPr>
-          <p:cNvPr id="6" name="TextBox 5"/>
+          <p:cNvPr id="5" name="TextBox 4"/>
           <p:cNvSpPr txBox="1"/>
           <p:nvPr/>
         </p:nvSpPr>
         <p:spPr>
           <a:xfrm>
-            <a:off x="1005840" y="2286000"/>
-            <a:ext cx="1920240" cy="3383280"/>
+            <a:off x="731520" y="2011680"/>
+            <a:ext cx="10698480" cy="4114800"/>
           </a:xfrm>
           <a:prstGeom prst="rect">
             <a:avLst/>
@@ -5348,106 +6533,92 @@
           <a:lstStyle/>
           <a:p>
             <a:pPr>
+              <a:lnSpc>
+                <a:spcPct val="125000"/>
+              </a:lnSpc>
               <a:spcAft>
-                <a:spcPts val="1000"/>
+                <a:spcPts val="1400"/>
               </a:spcAft>
-              <a:defRPr sz="3600" b="1">
-                <a:solidFill>
-                  <a:srgbClr val="2563EB"/>
-                </a:solidFill>
-                <a:latin typeface="Calibri"/>
-              </a:defRPr>
-            </a:pPr>
-            <a:r>
-              <a:t>-41%</a:t>
-            </a:r>
-          </a:p>
-          <a:p>
-            <a:pPr>
+              <a:defRPr sz="1500">
+                <a:solidFill>
+                  <a:srgbClr val="1E293B"/>
+                </a:solidFill>
+                <a:latin typeface="Calibri"/>
+              </a:defRPr>
+            </a:pPr>
+            <a:r>
+              <a:t>•  Cloud hosting cost per terminal declined from $142 to $84/month</a:t>
+            </a:r>
+          </a:p>
+          <a:p>
+            <a:pPr>
+              <a:lnSpc>
+                <a:spcPct val="125000"/>
+              </a:lnSpc>
               <a:spcAft>
-                <a:spcPts val="800"/>
+                <a:spcPts val="1400"/>
               </a:spcAft>
-              <a:defRPr sz="1400" b="1">
-                <a:solidFill>
-                  <a:srgbClr val="0F172A"/>
-                </a:solidFill>
-                <a:latin typeface="Calibri"/>
-              </a:defRPr>
-            </a:pPr>
-            <a:r>
-              <a:t>Detention Claims</a:t>
-            </a:r>
-          </a:p>
-          <a:p>
-            <a:pPr>
-              <a:defRPr sz="1100">
-                <a:solidFill>
-                  <a:srgbClr val="64748B"/>
-                </a:solidFill>
-                <a:latin typeface="Calibri"/>
-              </a:defRPr>
-            </a:pPr>
-            <a:r>
-              <a:t>Saved $184,000 in trailer detention fees in 90 days</a:t>
-            </a:r>
-          </a:p>
-        </p:txBody>
-      </p:sp>
-      <p:sp>
-        <p:nvSpPr>
-          <p:cNvPr id="7" name="Rounded Rectangle 6"/>
-          <p:cNvSpPr/>
-          <p:nvPr/>
-        </p:nvSpPr>
-        <p:spPr>
-          <a:xfrm>
-            <a:off x="3474720" y="1920240"/>
-            <a:ext cx="2468880" cy="4114800"/>
-          </a:xfrm>
-          <a:prstGeom prst="roundRect">
-            <a:avLst/>
-          </a:prstGeom>
-          <a:solidFill>
-            <a:srgbClr val="F8FAFC"/>
-          </a:solidFill>
-          <a:ln w="12700">
-            <a:solidFill>
-              <a:srgbClr val="CBD5E1"/>
-            </a:solidFill>
-          </a:ln>
-        </p:spPr>
-        <p:style>
-          <a:lnRef idx="1">
-            <a:schemeClr val="accent1"/>
-          </a:lnRef>
-          <a:fillRef idx="3">
-            <a:schemeClr val="accent1"/>
-          </a:fillRef>
-          <a:effectRef idx="2">
-            <a:schemeClr val="accent1"/>
-          </a:effectRef>
-          <a:fontRef idx="minor">
-            <a:schemeClr val="lt1"/>
-          </a:fontRef>
-        </p:style>
-        <p:txBody>
-          <a:bodyPr rtlCol="0" anchor="ctr"/>
-          <a:lstStyle/>
-          <a:p>
-            <a:pPr algn="ctr"/>
-          </a:p>
-        </p:txBody>
-      </p:sp>
-      <p:sp>
-        <p:nvSpPr>
-          <p:cNvPr id="8" name="TextBox 7"/>
+              <a:defRPr sz="1500">
+                <a:solidFill>
+                  <a:srgbClr val="1E293B"/>
+                </a:solidFill>
+                <a:latin typeface="Calibri"/>
+              </a:defRPr>
+            </a:pPr>
+            <a:r>
+              <a:t>•  Automated OCR bill of lading processing cut manual audit labor by 64%</a:t>
+            </a:r>
+          </a:p>
+          <a:p>
+            <a:pPr>
+              <a:lnSpc>
+                <a:spcPct val="125000"/>
+              </a:lnSpc>
+              <a:spcAft>
+                <a:spcPts val="1400"/>
+              </a:spcAft>
+              <a:defRPr sz="1500">
+                <a:solidFill>
+                  <a:srgbClr val="1E293B"/>
+                </a:solidFill>
+                <a:latin typeface="Calibri"/>
+              </a:defRPr>
+            </a:pPr>
+            <a:r>
+              <a:t>•  Gross margin path: 74% (Q1) -&gt; 76% (Q2) -&gt; 77% (Q3) -&gt; 81% (Target FY27)</a:t>
+            </a:r>
+          </a:p>
+          <a:p>
+            <a:pPr>
+              <a:lnSpc>
+                <a:spcPct val="125000"/>
+              </a:lnSpc>
+              <a:spcAft>
+                <a:spcPts val="1400"/>
+              </a:spcAft>
+              <a:defRPr sz="1500">
+                <a:solidFill>
+                  <a:srgbClr val="1E293B"/>
+                </a:solidFill>
+                <a:latin typeface="Calibri"/>
+              </a:defRPr>
+            </a:pPr>
+            <a:r>
+              <a:t>•  Fixed vs variable margin cushion absorbs regional freight volume swings</a:t>
+            </a:r>
+          </a:p>
+        </p:txBody>
+      </p:sp>
+      <p:sp>
+        <p:nvSpPr>
+          <p:cNvPr id="6" name="TextBox 5"/>
           <p:cNvSpPr txBox="1"/>
           <p:nvPr/>
         </p:nvSpPr>
         <p:spPr>
           <a:xfrm>
-            <a:off x="3749040" y="2286000"/>
-            <a:ext cx="1920240" cy="3383280"/>
+            <a:off x="731520" y="6309360"/>
+            <a:ext cx="10698480" cy="365760"/>
           </a:xfrm>
           <a:prstGeom prst="rect">
             <a:avLst/>
@@ -5455,300 +6626,6 @@
           <a:noFill/>
         </p:spPr>
         <p:txBody>
-          <a:bodyPr wrap="square">
-            <a:spAutoFit/>
-          </a:bodyPr>
-          <a:lstStyle/>
-          <a:p>
-            <a:pPr>
-              <a:spcAft>
-                <a:spcPts val="1000"/>
-              </a:spcAft>
-              <a:defRPr sz="3600" b="1">
-                <a:solidFill>
-                  <a:srgbClr val="2563EB"/>
-                </a:solidFill>
-                <a:latin typeface="Calibri"/>
-              </a:defRPr>
-            </a:pPr>
-            <a:r>
-              <a:t>14 hrs</a:t>
-            </a:r>
-          </a:p>
-          <a:p>
-            <a:pPr>
-              <a:spcAft>
-                <a:spcPts val="800"/>
-              </a:spcAft>
-              <a:defRPr sz="1400" b="1">
-                <a:solidFill>
-                  <a:srgbClr val="0F172A"/>
-                </a:solidFill>
-                <a:latin typeface="Calibri"/>
-              </a:defRPr>
-            </a:pPr>
-            <a:r>
-              <a:t>Weekly Time Saved</a:t>
-            </a:r>
-          </a:p>
-          <a:p>
-            <a:pPr>
-              <a:defRPr sz="1100">
-                <a:solidFill>
-                  <a:srgbClr val="64748B"/>
-                </a:solidFill>
-                <a:latin typeface="Calibri"/>
-              </a:defRPr>
-            </a:pPr>
-            <a:r>
-              <a:t>Saved per dispatcher on phone check-ins and paper filing</a:t>
-            </a:r>
-          </a:p>
-        </p:txBody>
-      </p:sp>
-      <p:sp>
-        <p:nvSpPr>
-          <p:cNvPr id="9" name="Rounded Rectangle 8"/>
-          <p:cNvSpPr/>
-          <p:nvPr/>
-        </p:nvSpPr>
-        <p:spPr>
-          <a:xfrm>
-            <a:off x="6217920" y="1920240"/>
-            <a:ext cx="2468880" cy="4114800"/>
-          </a:xfrm>
-          <a:prstGeom prst="roundRect">
-            <a:avLst/>
-          </a:prstGeom>
-          <a:solidFill>
-            <a:srgbClr val="F8FAFC"/>
-          </a:solidFill>
-          <a:ln w="12700">
-            <a:solidFill>
-              <a:srgbClr val="CBD5E1"/>
-            </a:solidFill>
-          </a:ln>
-        </p:spPr>
-        <p:style>
-          <a:lnRef idx="1">
-            <a:schemeClr val="accent1"/>
-          </a:lnRef>
-          <a:fillRef idx="3">
-            <a:schemeClr val="accent1"/>
-          </a:fillRef>
-          <a:effectRef idx="2">
-            <a:schemeClr val="accent1"/>
-          </a:effectRef>
-          <a:fontRef idx="minor">
-            <a:schemeClr val="lt1"/>
-          </a:fontRef>
-        </p:style>
-        <p:txBody>
-          <a:bodyPr rtlCol="0" anchor="ctr"/>
-          <a:lstStyle/>
-          <a:p>
-            <a:pPr algn="ctr"/>
-          </a:p>
-        </p:txBody>
-      </p:sp>
-      <p:sp>
-        <p:nvSpPr>
-          <p:cNvPr id="10" name="TextBox 9"/>
-          <p:cNvSpPr txBox="1"/>
-          <p:nvPr/>
-        </p:nvSpPr>
-        <p:spPr>
-          <a:xfrm>
-            <a:off x="6492240" y="2286000"/>
-            <a:ext cx="1920240" cy="3383280"/>
-          </a:xfrm>
-          <a:prstGeom prst="rect">
-            <a:avLst/>
-          </a:prstGeom>
-          <a:noFill/>
-        </p:spPr>
-        <p:txBody>
-          <a:bodyPr wrap="square">
-            <a:spAutoFit/>
-          </a:bodyPr>
-          <a:lstStyle/>
-          <a:p>
-            <a:pPr>
-              <a:spcAft>
-                <a:spcPts val="1000"/>
-              </a:spcAft>
-              <a:defRPr sz="3600" b="1">
-                <a:solidFill>
-                  <a:srgbClr val="2563EB"/>
-                </a:solidFill>
-                <a:latin typeface="Calibri"/>
-              </a:defRPr>
-            </a:pPr>
-            <a:r>
-              <a:t>18,400</a:t>
-            </a:r>
-          </a:p>
-          <a:p>
-            <a:pPr>
-              <a:spcAft>
-                <a:spcPts val="800"/>
-              </a:spcAft>
-              <a:defRPr sz="1400" b="1">
-                <a:solidFill>
-                  <a:srgbClr val="0F172A"/>
-                </a:solidFill>
-                <a:latin typeface="Calibri"/>
-              </a:defRPr>
-            </a:pPr>
-            <a:r>
-              <a:t>BOLs Cleared</a:t>
-            </a:r>
-          </a:p>
-          <a:p>
-            <a:pPr>
-              <a:defRPr sz="1100">
-                <a:solidFill>
-                  <a:srgbClr val="64748B"/>
-                </a:solidFill>
-                <a:latin typeface="Calibri"/>
-              </a:defRPr>
-            </a:pPr>
-            <a:r>
-              <a:t>100% digital audit trace with zero disputed shortages</a:t>
-            </a:r>
-          </a:p>
-        </p:txBody>
-      </p:sp>
-      <p:sp>
-        <p:nvSpPr>
-          <p:cNvPr id="11" name="Rounded Rectangle 10"/>
-          <p:cNvSpPr/>
-          <p:nvPr/>
-        </p:nvSpPr>
-        <p:spPr>
-          <a:xfrm>
-            <a:off x="8961120" y="1920240"/>
-            <a:ext cx="2468880" cy="4114800"/>
-          </a:xfrm>
-          <a:prstGeom prst="roundRect">
-            <a:avLst/>
-          </a:prstGeom>
-          <a:solidFill>
-            <a:srgbClr val="F8FAFC"/>
-          </a:solidFill>
-          <a:ln w="12700">
-            <a:solidFill>
-              <a:srgbClr val="CBD5E1"/>
-            </a:solidFill>
-          </a:ln>
-        </p:spPr>
-        <p:style>
-          <a:lnRef idx="1">
-            <a:schemeClr val="accent1"/>
-          </a:lnRef>
-          <a:fillRef idx="3">
-            <a:schemeClr val="accent1"/>
-          </a:fillRef>
-          <a:effectRef idx="2">
-            <a:schemeClr val="accent1"/>
-          </a:effectRef>
-          <a:fontRef idx="minor">
-            <a:schemeClr val="lt1"/>
-          </a:fontRef>
-        </p:style>
-        <p:txBody>
-          <a:bodyPr rtlCol="0" anchor="ctr"/>
-          <a:lstStyle/>
-          <a:p>
-            <a:pPr algn="ctr"/>
-          </a:p>
-        </p:txBody>
-      </p:sp>
-      <p:sp>
-        <p:nvSpPr>
-          <p:cNvPr id="12" name="TextBox 11"/>
-          <p:cNvSpPr txBox="1"/>
-          <p:nvPr/>
-        </p:nvSpPr>
-        <p:spPr>
-          <a:xfrm>
-            <a:off x="9235440" y="2286000"/>
-            <a:ext cx="1920240" cy="3383280"/>
-          </a:xfrm>
-          <a:prstGeom prst="rect">
-            <a:avLst/>
-          </a:prstGeom>
-          <a:noFill/>
-        </p:spPr>
-        <p:txBody>
-          <a:bodyPr wrap="square">
-            <a:spAutoFit/>
-          </a:bodyPr>
-          <a:lstStyle/>
-          <a:p>
-            <a:pPr>
-              <a:spcAft>
-                <a:spcPts val="1000"/>
-              </a:spcAft>
-              <a:defRPr sz="3600" b="1">
-                <a:solidFill>
-                  <a:srgbClr val="2563EB"/>
-                </a:solidFill>
-                <a:latin typeface="Calibri"/>
-              </a:defRPr>
-            </a:pPr>
-            <a:r>
-              <a:t>3.8x</a:t>
-            </a:r>
-          </a:p>
-          <a:p>
-            <a:pPr>
-              <a:spcAft>
-                <a:spcPts val="800"/>
-              </a:spcAft>
-              <a:defRPr sz="1400" b="1">
-                <a:solidFill>
-                  <a:srgbClr val="0F172A"/>
-                </a:solidFill>
-                <a:latin typeface="Calibri"/>
-              </a:defRPr>
-            </a:pPr>
-            <a:r>
-              <a:t>First-Year ROI</a:t>
-            </a:r>
-          </a:p>
-          <a:p>
-            <a:pPr>
-              <a:defRPr sz="1100">
-                <a:solidFill>
-                  <a:srgbClr val="64748B"/>
-                </a:solidFill>
-                <a:latin typeface="Calibri"/>
-              </a:defRPr>
-            </a:pPr>
-            <a:r>
-              <a:t>Platform paid for itself within the first 60 days of go-live</a:t>
-            </a:r>
-          </a:p>
-        </p:txBody>
-      </p:sp>
-      <p:sp>
-        <p:nvSpPr>
-          <p:cNvPr id="13" name="TextBox 12"/>
-          <p:cNvSpPr txBox="1"/>
-          <p:nvPr/>
-        </p:nvSpPr>
-        <p:spPr>
-          <a:xfrm>
-            <a:off x="731520" y="6309360"/>
-            <a:ext cx="10698480" cy="365760"/>
-          </a:xfrm>
-          <a:prstGeom prst="rect">
-            <a:avLst/>
-          </a:prstGeom>
-          <a:noFill/>
-        </p:spPr>
-        <p:txBody>
           <a:bodyPr wrap="none">
             <a:spAutoFit/>
           </a:bodyPr>
@@ -5763,7 +6640,7 @@
               </a:defRPr>
             </a:pPr>
             <a:r>
-              <a:t>Williams Logistics Network · Q4 2026 Executive Investor Update · Slide 5 of 7</a:t>
+              <a:t>Q4 2026 Executive Investor Update — Estella Williams · Slide 5 of 16</a:t>
             </a:r>
           </a:p>
         </p:txBody>
@@ -5863,7 +6740,7 @@
               </a:defRPr>
             </a:pPr>
             <a:r>
-              <a:t>ENTERPRISE PIPELINE &amp; GTM</a:t>
+              <a:t>Q4 2026 EXECUTIVE INVESTOR UPDATE — ESTELLA WILLIA</a:t>
             </a:r>
           </a:p>
           <a:p>
@@ -5876,7 +6753,7 @@
               </a:defRPr>
             </a:pPr>
             <a:r>
-              <a:t>Enterprise Pipeline Coverage &amp; Distribution Corridors</a:t>
+              <a:t>Unit Economics &amp; Customer Acquisition</a:t>
             </a:r>
           </a:p>
           <a:p>
@@ -5892,7 +6769,7 @@
               </a:defRPr>
             </a:pPr>
             <a:r>
-              <a:t>Strong mid-market carrier density across Texas triangular freight corridors</a:t>
+              <a:t>17.5x LTV/CAC Ratio</a:t>
             </a:r>
           </a:p>
         </p:txBody>
@@ -5977,7 +6854,7 @@
               </a:defRPr>
             </a:pPr>
             <a:r>
-              <a:t>•  Total Active Sales Pipeline: $3.8M in qualified enterprise opportunities under technical POC review.</a:t>
+              <a:t>•  Blended Customer Acquisition Cost (CAC): $480 per terminal</a:t>
             </a:r>
           </a:p>
           <a:p>
@@ -5996,7 +6873,7 @@
               </a:defRPr>
             </a:pPr>
             <a:r>
-              <a:t>•  Average Enterprise Sales Cycle: 42 calendar days from initial terminal survey to paid production pilot.</a:t>
+              <a:t>•  Average Revenue Per Account (ARPU): $507/month ($6,084 annual)</a:t>
             </a:r>
           </a:p>
           <a:p>
@@ -6015,7 +6892,7 @@
               </a:defRPr>
             </a:pPr>
             <a:r>
-              <a:t>•  Channel Partnerships: Direct certified integrations with Descartes, SAP TM, Oracle OTM, and Blue Yonder.</a:t>
+              <a:t>•  Customer Lifetime Value (LTV): $8,450 based on 4-year retention curve</a:t>
             </a:r>
           </a:p>
           <a:p>
@@ -6034,7 +6911,7 @@
               </a:defRPr>
             </a:pPr>
             <a:r>
-              <a:t>•  Expansion Motions: 68% of new ARR derived from existing carrier logos adding secondary and tertiary regional terminals.</a:t>
+              <a:t>•  CAC payback period sustained at under 8 months across all sales channels</a:t>
             </a:r>
           </a:p>
         </p:txBody>
@@ -6070,7 +6947,7 @@
               </a:defRPr>
             </a:pPr>
             <a:r>
-              <a:t>Williams Logistics Network · Q4 2026 Executive Investor Update · Slide 6 of 7</a:t>
+              <a:t>Q4 2026 Executive Investor Update — Estella Williams · Slide 6 of 16</a:t>
             </a:r>
           </a:p>
         </p:txBody>
@@ -6170,7 +7047,7 @@
               </a:defRPr>
             </a:pPr>
             <a:r>
-              <a:t>CAPITAL &amp; GOVERNANCE</a:t>
+              <a:t>Q4 2026 EXECUTIVE INVESTOR UPDATE — ESTELLA WILLIA</a:t>
             </a:r>
           </a:p>
           <a:p>
@@ -6183,7 +7060,7 @@
               </a:defRPr>
             </a:pPr>
             <a:r>
-              <a:t>Capital Runway, Balance Sheet &amp; Board Resolutions</a:t>
+              <a:t>Product Roadmap &amp; Enterprise Moat</a:t>
             </a:r>
           </a:p>
           <a:p>
@@ -6199,7 +7076,7 @@
               </a:defRPr>
             </a:pPr>
             <a:r>
-              <a:t>Prudent runway management with 24+ months of cash at current growth trajectory</a:t>
+              <a:t>Core Platform Enhancements</a:t>
             </a:r>
           </a:p>
         </p:txBody>
@@ -6249,25 +7126,176 @@
       </p:sp>
       <p:sp>
         <p:nvSpPr>
-          <p:cNvPr id="5" name="Rounded Rectangle 4"/>
+          <p:cNvPr id="5" name="TextBox 4"/>
+          <p:cNvSpPr txBox="1"/>
+          <p:nvPr/>
+        </p:nvSpPr>
+        <p:spPr>
+          <a:xfrm>
+            <a:off x="731520" y="2011680"/>
+            <a:ext cx="10698480" cy="4114800"/>
+          </a:xfrm>
+          <a:prstGeom prst="rect">
+            <a:avLst/>
+          </a:prstGeom>
+          <a:noFill/>
+        </p:spPr>
+        <p:txBody>
+          <a:bodyPr wrap="square">
+            <a:spAutoFit/>
+          </a:bodyPr>
+          <a:lstStyle/>
+          <a:p>
+            <a:pPr>
+              <a:lnSpc>
+                <a:spcPct val="125000"/>
+              </a:lnSpc>
+              <a:spcAft>
+                <a:spcPts val="1400"/>
+              </a:spcAft>
+              <a:defRPr sz="1500">
+                <a:solidFill>
+                  <a:srgbClr val="1E293B"/>
+                </a:solidFill>
+                <a:latin typeface="Calibri"/>
+              </a:defRPr>
+            </a:pPr>
+            <a:r>
+              <a:t>•  Live: Geofenced trailer arrival check-in with multilingual driver SMS</a:t>
+            </a:r>
+          </a:p>
+          <a:p>
+            <a:pPr>
+              <a:lnSpc>
+                <a:spcPct val="125000"/>
+              </a:lnSpc>
+              <a:spcAft>
+                <a:spcPts val="1400"/>
+              </a:spcAft>
+              <a:defRPr sz="1500">
+                <a:solidFill>
+                  <a:srgbClr val="1E293B"/>
+                </a:solidFill>
+                <a:latin typeface="Calibri"/>
+              </a:defRPr>
+            </a:pPr>
+            <a:r>
+              <a:t>•  In Pilot: Real-time bi-directional EDI connectors for SAP TMS and Blue Yonder</a:t>
+            </a:r>
+          </a:p>
+          <a:p>
+            <a:pPr>
+              <a:lnSpc>
+                <a:spcPct val="125000"/>
+              </a:lnSpc>
+              <a:spcAft>
+                <a:spcPts val="1400"/>
+              </a:spcAft>
+              <a:defRPr sz="1500">
+                <a:solidFill>
+                  <a:srgbClr val="1E293B"/>
+                </a:solidFill>
+                <a:latin typeface="Calibri"/>
+              </a:defRPr>
+            </a:pPr>
+            <a:r>
+              <a:t>•  Q1 2027: Predictive dock detention warning engine (patent pending)</a:t>
+            </a:r>
+          </a:p>
+          <a:p>
+            <a:pPr>
+              <a:lnSpc>
+                <a:spcPct val="125000"/>
+              </a:lnSpc>
+              <a:spcAft>
+                <a:spcPts val="1400"/>
+              </a:spcAft>
+              <a:defRPr sz="1500">
+                <a:solidFill>
+                  <a:srgbClr val="1E293B"/>
+                </a:solidFill>
+                <a:latin typeface="Calibri"/>
+              </a:defRPr>
+            </a:pPr>
+            <a:r>
+              <a:t>•  Enterprise single sign-on (SSO) and SOC-2 Type II audit report delivered</a:t>
+            </a:r>
+          </a:p>
+        </p:txBody>
+      </p:sp>
+      <p:sp>
+        <p:nvSpPr>
+          <p:cNvPr id="6" name="TextBox 5"/>
+          <p:cNvSpPr txBox="1"/>
+          <p:nvPr/>
+        </p:nvSpPr>
+        <p:spPr>
+          <a:xfrm>
+            <a:off x="731520" y="6309360"/>
+            <a:ext cx="10698480" cy="365760"/>
+          </a:xfrm>
+          <a:prstGeom prst="rect">
+            <a:avLst/>
+          </a:prstGeom>
+          <a:noFill/>
+        </p:spPr>
+        <p:txBody>
+          <a:bodyPr wrap="none">
+            <a:spAutoFit/>
+          </a:bodyPr>
+          <a:lstStyle/>
+          <a:p>
+            <a:pPr>
+              <a:defRPr sz="900">
+                <a:solidFill>
+                  <a:srgbClr val="94A3B8"/>
+                </a:solidFill>
+                <a:latin typeface="Calibri"/>
+              </a:defRPr>
+            </a:pPr>
+            <a:r>
+              <a:t>Q4 2026 Executive Investor Update — Estella Williams · Slide 7 of 16</a:t>
+            </a:r>
+          </a:p>
+        </p:txBody>
+      </p:sp>
+    </p:spTree>
+  </p:cSld>
+  <p:clrMapOvr>
+    <a:masterClrMapping/>
+  </p:clrMapOvr>
+</p:sld>
+</file>
+
+<file path=ppt/slides/slide8.xml><?xml version="1.0" encoding="utf-8"?>
+<p:sld xmlns:a="http://schemas.openxmlformats.org/drawingml/2006/main" xmlns:p="http://schemas.openxmlformats.org/presentationml/2006/main" xmlns:r="http://schemas.openxmlformats.org/officeDocument/2006/relationships">
+  <p:cSld>
+    <p:spTree>
+      <p:nvGrpSpPr>
+        <p:cNvPr id="1" name=""/>
+        <p:cNvGrpSpPr/>
+        <p:nvPr/>
+      </p:nvGrpSpPr>
+      <p:grpSpPr/>
+      <p:sp>
+        <p:nvSpPr>
+          <p:cNvPr id="2" name="Rectangle 1"/>
           <p:cNvSpPr/>
           <p:nvPr/>
         </p:nvSpPr>
         <p:spPr>
           <a:xfrm>
-            <a:off x="731520" y="1920240"/>
-            <a:ext cx="3352800" cy="4114800"/>
-          </a:xfrm>
-          <a:prstGeom prst="roundRect">
+            <a:off x="0" y="0"/>
+            <a:ext cx="12191695" cy="6858000"/>
+          </a:xfrm>
+          <a:prstGeom prst="rect">
             <a:avLst/>
           </a:prstGeom>
           <a:solidFill>
-            <a:srgbClr val="F8FAFC"/>
+            <a:srgbClr val="FFFFFF"/>
           </a:solidFill>
-          <a:ln w="12700">
-            <a:solidFill>
-              <a:srgbClr val="CBD5E1"/>
-            </a:solidFill>
+          <a:ln>
+            <a:noFill/>
           </a:ln>
         </p:spPr>
         <p:style>
@@ -6294,14 +7322,14 @@
       </p:sp>
       <p:sp>
         <p:nvSpPr>
-          <p:cNvPr id="6" name="TextBox 5"/>
+          <p:cNvPr id="3" name="TextBox 2"/>
           <p:cNvSpPr txBox="1"/>
           <p:nvPr/>
         </p:nvSpPr>
         <p:spPr>
           <a:xfrm>
-            <a:off x="1005840" y="2194560"/>
-            <a:ext cx="2804160" cy="3566160"/>
+            <a:off x="731520" y="548640"/>
+            <a:ext cx="10698480" cy="1188720"/>
           </a:xfrm>
           <a:prstGeom prst="rect">
             <a:avLst/>
@@ -6316,9 +7344,22 @@
           <a:p>
             <a:pPr>
               <a:spcAft>
-                <a:spcPts val="1000"/>
+                <a:spcPts val="400"/>
               </a:spcAft>
-              <a:defRPr sz="1500" b="1">
+              <a:defRPr sz="1000" b="1">
+                <a:solidFill>
+                  <a:srgbClr val="2563EB"/>
+                </a:solidFill>
+                <a:latin typeface="Calibri"/>
+              </a:defRPr>
+            </a:pPr>
+            <a:r>
+              <a:t>Q4 2026 EXECUTIVE INVESTOR UPDATE — ESTELLA WILLIA</a:t>
+            </a:r>
+          </a:p>
+          <a:p>
+            <a:pPr>
+              <a:defRPr sz="2200" b="1">
                 <a:solidFill>
                   <a:srgbClr val="0F172A"/>
                 </a:solidFill>
@@ -6326,80 +7367,46 @@
               </a:defRPr>
             </a:pPr>
             <a:r>
-              <a:t>Cash Position &amp; Runway</a:t>
-            </a:r>
-          </a:p>
-          <a:p>
-            <a:pPr>
-              <a:spcAft>
-                <a:spcPts val="600"/>
-              </a:spcAft>
-              <a:defRPr sz="1100">
-                <a:solidFill>
-                  <a:srgbClr val="334155"/>
-                </a:solidFill>
-                <a:latin typeface="Calibri"/>
-              </a:defRPr>
-            </a:pPr>
-            <a:r>
-              <a:t>•  Cash in Bank (Silicon Valley Bank / First Citizens): $3,120,000</a:t>
-            </a:r>
-          </a:p>
-          <a:p>
-            <a:pPr>
-              <a:spcAft>
-                <a:spcPts val="600"/>
-              </a:spcAft>
-              <a:defRPr sz="1100">
-                <a:solidFill>
-                  <a:srgbClr val="334155"/>
-                </a:solidFill>
-                <a:latin typeface="Calibri"/>
-              </a:defRPr>
-            </a:pPr>
-            <a:r>
-              <a:t>•  Average Monthly Net Cash Burn: $58,000</a:t>
-            </a:r>
-          </a:p>
-          <a:p>
-            <a:pPr>
-              <a:spcAft>
-                <a:spcPts val="600"/>
-              </a:spcAft>
-              <a:defRPr sz="1100">
-                <a:solidFill>
-                  <a:srgbClr val="334155"/>
-                </a:solidFill>
-                <a:latin typeface="Calibri"/>
-              </a:defRPr>
-            </a:pPr>
-            <a:r>
-              <a:t>•  Runway: 24+ months at zero revenue growth; profitable by Q2 2027</a:t>
-            </a:r>
-          </a:p>
-        </p:txBody>
-      </p:sp>
-      <p:sp>
-        <p:nvSpPr>
-          <p:cNvPr id="7" name="Rounded Rectangle 6"/>
+              <a:t>Mid-Market Logistics Traction</a:t>
+            </a:r>
+          </a:p>
+          <a:p>
+            <a:pPr>
+              <a:spcBef>
+                <a:spcPts val="200"/>
+              </a:spcBef>
+              <a:defRPr sz="1200">
+                <a:solidFill>
+                  <a:srgbClr val="64748B"/>
+                </a:solidFill>
+                <a:latin typeface="Calibri"/>
+              </a:defRPr>
+            </a:pPr>
+            <a:r>
+              <a:t>Asset-Based Carrier Adoption</a:t>
+            </a:r>
+          </a:p>
+        </p:txBody>
+      </p:sp>
+      <p:sp>
+        <p:nvSpPr>
+          <p:cNvPr id="4" name="Rectangle 3"/>
           <p:cNvSpPr/>
           <p:nvPr/>
         </p:nvSpPr>
         <p:spPr>
           <a:xfrm>
-            <a:off x="4404360" y="1920240"/>
-            <a:ext cx="3352800" cy="4114800"/>
-          </a:xfrm>
-          <a:prstGeom prst="roundRect">
+            <a:off x="731520" y="1737360"/>
+            <a:ext cx="10698480" cy="13716"/>
+          </a:xfrm>
+          <a:prstGeom prst="rect">
             <a:avLst/>
           </a:prstGeom>
           <a:solidFill>
-            <a:srgbClr val="F8FAFC"/>
+            <a:srgbClr val="E2E8F0"/>
           </a:solidFill>
-          <a:ln w="12700">
-            <a:solidFill>
-              <a:srgbClr val="CBD5E1"/>
-            </a:solidFill>
+          <a:ln>
+            <a:noFill/>
           </a:ln>
         </p:spPr>
         <p:style>
@@ -6426,14 +7433,14 @@
       </p:sp>
       <p:sp>
         <p:nvSpPr>
-          <p:cNvPr id="8" name="TextBox 7"/>
+          <p:cNvPr id="5" name="TextBox 4"/>
           <p:cNvSpPr txBox="1"/>
           <p:nvPr/>
         </p:nvSpPr>
         <p:spPr>
           <a:xfrm>
-            <a:off x="4678680" y="2194560"/>
-            <a:ext cx="2804160" cy="3566160"/>
+            <a:off x="731520" y="2011680"/>
+            <a:ext cx="10698480" cy="4114800"/>
           </a:xfrm>
           <a:prstGeom prst="rect">
             <a:avLst/>
@@ -6447,91 +7454,155 @@
           <a:lstStyle/>
           <a:p>
             <a:pPr>
+              <a:lnSpc>
+                <a:spcPct val="125000"/>
+              </a:lnSpc>
               <a:spcAft>
-                <a:spcPts val="1000"/>
+                <a:spcPts val="1400"/>
               </a:spcAft>
-              <a:defRPr sz="1500" b="1">
-                <a:solidFill>
-                  <a:srgbClr val="0F172A"/>
-                </a:solidFill>
-                <a:latin typeface="Calibri"/>
-              </a:defRPr>
-            </a:pPr>
-            <a:r>
-              <a:t>FY2027 Resource Allocation</a:t>
-            </a:r>
-          </a:p>
-          <a:p>
-            <a:pPr>
+              <a:defRPr sz="1500">
+                <a:solidFill>
+                  <a:srgbClr val="1E293B"/>
+                </a:solidFill>
+                <a:latin typeface="Calibri"/>
+              </a:defRPr>
+            </a:pPr>
+            <a:r>
+              <a:t>•  65 live freight terminals across Midwest, Texas, and Pacific Northwest</a:t>
+            </a:r>
+          </a:p>
+          <a:p>
+            <a:pPr>
+              <a:lnSpc>
+                <a:spcPct val="125000"/>
+              </a:lnSpc>
               <a:spcAft>
-                <a:spcPts val="600"/>
+                <a:spcPts val="1400"/>
               </a:spcAft>
-              <a:defRPr sz="1100">
-                <a:solidFill>
-                  <a:srgbClr val="334155"/>
-                </a:solidFill>
-                <a:latin typeface="Calibri"/>
-              </a:defRPr>
-            </a:pPr>
-            <a:r>
-              <a:t>•  55% Engineering &amp; Mobile Product Innovation (5 Senior Full-Stack Hires)</a:t>
-            </a:r>
-          </a:p>
-          <a:p>
-            <a:pPr>
+              <a:defRPr sz="1500">
+                <a:solidFill>
+                  <a:srgbClr val="1E293B"/>
+                </a:solidFill>
+                <a:latin typeface="Calibri"/>
+              </a:defRPr>
+            </a:pPr>
+            <a:r>
+              <a:t>•  Key win: Apex Cold Storage expanded from 3 to 14 facilities in Q3</a:t>
+            </a:r>
+          </a:p>
+          <a:p>
+            <a:pPr>
+              <a:lnSpc>
+                <a:spcPct val="125000"/>
+              </a:lnSpc>
               <a:spcAft>
-                <a:spcPts val="600"/>
+                <a:spcPts val="1400"/>
               </a:spcAft>
-              <a:defRPr sz="1100">
-                <a:solidFill>
-                  <a:srgbClr val="334155"/>
-                </a:solidFill>
-                <a:latin typeface="Calibri"/>
-              </a:defRPr>
-            </a:pPr>
-            <a:r>
-              <a:t>•  30% Dedicated Field Enterprise Sales &amp; Solution Architecture</a:t>
-            </a:r>
-          </a:p>
-          <a:p>
-            <a:pPr>
+              <a:defRPr sz="1500">
+                <a:solidFill>
+                  <a:srgbClr val="1E293B"/>
+                </a:solidFill>
+                <a:latin typeface="Calibri"/>
+              </a:defRPr>
+            </a:pPr>
+            <a:r>
+              <a:t>•  Average customer detention fee savings: $14,800 per terminal per month</a:t>
+            </a:r>
+          </a:p>
+          <a:p>
+            <a:pPr>
+              <a:lnSpc>
+                <a:spcPct val="125000"/>
+              </a:lnSpc>
               <a:spcAft>
-                <a:spcPts val="600"/>
+                <a:spcPts val="1400"/>
               </a:spcAft>
-              <a:defRPr sz="1100">
-                <a:solidFill>
-                  <a:srgbClr val="334155"/>
-                </a:solidFill>
-                <a:latin typeface="Calibri"/>
-              </a:defRPr>
-            </a:pPr>
-            <a:r>
-              <a:t>•  15% Information Security, SOC 2 Type II Recertification &amp; G&amp;A</a:t>
-            </a:r>
-          </a:p>
-        </p:txBody>
-      </p:sp>
-      <p:sp>
-        <p:nvSpPr>
-          <p:cNvPr id="9" name="Rounded Rectangle 8"/>
+              <a:defRPr sz="1500">
+                <a:solidFill>
+                  <a:srgbClr val="1E293B"/>
+                </a:solidFill>
+                <a:latin typeface="Calibri"/>
+              </a:defRPr>
+            </a:pPr>
+            <a:r>
+              <a:t>•  Frontline dispatcher satisfaction score: 4.9/5 across 840 active operators</a:t>
+            </a:r>
+          </a:p>
+        </p:txBody>
+      </p:sp>
+      <p:sp>
+        <p:nvSpPr>
+          <p:cNvPr id="6" name="TextBox 5"/>
+          <p:cNvSpPr txBox="1"/>
+          <p:nvPr/>
+        </p:nvSpPr>
+        <p:spPr>
+          <a:xfrm>
+            <a:off x="731520" y="6309360"/>
+            <a:ext cx="10698480" cy="365760"/>
+          </a:xfrm>
+          <a:prstGeom prst="rect">
+            <a:avLst/>
+          </a:prstGeom>
+          <a:noFill/>
+        </p:spPr>
+        <p:txBody>
+          <a:bodyPr wrap="none">
+            <a:spAutoFit/>
+          </a:bodyPr>
+          <a:lstStyle/>
+          <a:p>
+            <a:pPr>
+              <a:defRPr sz="900">
+                <a:solidFill>
+                  <a:srgbClr val="94A3B8"/>
+                </a:solidFill>
+                <a:latin typeface="Calibri"/>
+              </a:defRPr>
+            </a:pPr>
+            <a:r>
+              <a:t>Q4 2026 Executive Investor Update — Estella Williams · Slide 8 of 16</a:t>
+            </a:r>
+          </a:p>
+        </p:txBody>
+      </p:sp>
+    </p:spTree>
+  </p:cSld>
+  <p:clrMapOvr>
+    <a:masterClrMapping/>
+  </p:clrMapOvr>
+</p:sld>
+</file>
+
+<file path=ppt/slides/slide9.xml><?xml version="1.0" encoding="utf-8"?>
+<p:sld xmlns:a="http://schemas.openxmlformats.org/drawingml/2006/main" xmlns:p="http://schemas.openxmlformats.org/presentationml/2006/main" xmlns:r="http://schemas.openxmlformats.org/officeDocument/2006/relationships">
+  <p:cSld>
+    <p:spTree>
+      <p:nvGrpSpPr>
+        <p:cNvPr id="1" name=""/>
+        <p:cNvGrpSpPr/>
+        <p:nvPr/>
+      </p:nvGrpSpPr>
+      <p:grpSpPr/>
+      <p:sp>
+        <p:nvSpPr>
+          <p:cNvPr id="2" name="Rectangle 1"/>
           <p:cNvSpPr/>
           <p:nvPr/>
         </p:nvSpPr>
         <p:spPr>
           <a:xfrm>
-            <a:off x="8077200" y="1920240"/>
-            <a:ext cx="3352800" cy="4114800"/>
-          </a:xfrm>
-          <a:prstGeom prst="roundRect">
+            <a:off x="0" y="0"/>
+            <a:ext cx="12191695" cy="6858000"/>
+          </a:xfrm>
+          <a:prstGeom prst="rect">
             <a:avLst/>
           </a:prstGeom>
           <a:solidFill>
-            <a:srgbClr val="F8FAFC"/>
+            <a:srgbClr val="FFFFFF"/>
           </a:solidFill>
-          <a:ln w="12700">
-            <a:solidFill>
-              <a:srgbClr val="CBD5E1"/>
-            </a:solidFill>
+          <a:ln>
+            <a:noFill/>
           </a:ln>
         </p:spPr>
         <p:style>
@@ -6558,14 +7629,14 @@
       </p:sp>
       <p:sp>
         <p:nvSpPr>
-          <p:cNvPr id="10" name="TextBox 9"/>
+          <p:cNvPr id="3" name="TextBox 2"/>
           <p:cNvSpPr txBox="1"/>
           <p:nvPr/>
         </p:nvSpPr>
         <p:spPr>
           <a:xfrm>
-            <a:off x="8351520" y="2194560"/>
-            <a:ext cx="2804160" cy="3566160"/>
+            <a:off x="731520" y="548640"/>
+            <a:ext cx="10698480" cy="1188720"/>
           </a:xfrm>
           <a:prstGeom prst="rect">
             <a:avLst/>
@@ -6580,9 +7651,22 @@
           <a:p>
             <a:pPr>
               <a:spcAft>
-                <a:spcPts val="1000"/>
+                <a:spcPts val="400"/>
               </a:spcAft>
-              <a:defRPr sz="1500" b="1">
+              <a:defRPr sz="1000" b="1">
+                <a:solidFill>
+                  <a:srgbClr val="2563EB"/>
+                </a:solidFill>
+                <a:latin typeface="Calibri"/>
+              </a:defRPr>
+            </a:pPr>
+            <a:r>
+              <a:t>Q4 2026 EXECUTIVE INVESTOR UPDATE — ESTELLA WILLIA</a:t>
+            </a:r>
+          </a:p>
+          <a:p>
+            <a:pPr>
+              <a:defRPr sz="2200" b="1">
                 <a:solidFill>
                   <a:srgbClr val="0F172A"/>
                 </a:solidFill>
@@ -6590,69 +7674,80 @@
               </a:defRPr>
             </a:pPr>
             <a:r>
-              <a:t>Board Action Items Requested</a:t>
-            </a:r>
-          </a:p>
-          <a:p>
-            <a:pPr>
-              <a:spcAft>
-                <a:spcPts val="600"/>
-              </a:spcAft>
-              <a:defRPr sz="1100">
-                <a:solidFill>
-                  <a:srgbClr val="334155"/>
-                </a:solidFill>
-                <a:latin typeface="Calibri"/>
-              </a:defRPr>
-            </a:pPr>
-            <a:r>
-              <a:t>•  Formal adoption of FY 2027 Operating Budget &amp; Headcount Plan</a:t>
-            </a:r>
-          </a:p>
-          <a:p>
-            <a:pPr>
-              <a:spcAft>
-                <a:spcPts val="600"/>
-              </a:spcAft>
-              <a:defRPr sz="1100">
-                <a:solidFill>
-                  <a:srgbClr val="334155"/>
-                </a:solidFill>
-                <a:latin typeface="Calibri"/>
-              </a:defRPr>
-            </a:pPr>
-            <a:r>
-              <a:t>•  Approval of 3% Employee Option Pool expansion for executive hires</a:t>
-            </a:r>
-          </a:p>
-          <a:p>
-            <a:pPr>
-              <a:spcAft>
-                <a:spcPts val="600"/>
-              </a:spcAft>
-              <a:defRPr sz="1100">
-                <a:solidFill>
-                  <a:srgbClr val="334155"/>
-                </a:solidFill>
-                <a:latin typeface="Calibri"/>
-              </a:defRPr>
-            </a:pPr>
-            <a:r>
-              <a:t>•  Confirmation of Q1 2027 Board Meeting Date (January 22, 2027)</a:t>
-            </a:r>
-          </a:p>
-        </p:txBody>
-      </p:sp>
-      <p:sp>
-        <p:nvSpPr>
-          <p:cNvPr id="11" name="TextBox 10"/>
+              <a:t>Sales Pipeline &amp; Territory Velocity</a:t>
+            </a:r>
+          </a:p>
+          <a:p>
+            <a:pPr>
+              <a:spcBef>
+                <a:spcPts val="200"/>
+              </a:spcBef>
+              <a:defRPr sz="1200">
+                <a:solidFill>
+                  <a:srgbClr val="64748B"/>
+                </a:solidFill>
+                <a:latin typeface="Calibri"/>
+              </a:defRPr>
+            </a:pPr>
+            <a:r>
+              <a:t>Weighted Pipeline of $1.8M ARR</a:t>
+            </a:r>
+          </a:p>
+        </p:txBody>
+      </p:sp>
+      <p:sp>
+        <p:nvSpPr>
+          <p:cNvPr id="4" name="Rectangle 3"/>
+          <p:cNvSpPr/>
+          <p:nvPr/>
+        </p:nvSpPr>
+        <p:spPr>
+          <a:xfrm>
+            <a:off x="731520" y="1737360"/>
+            <a:ext cx="10698480" cy="13716"/>
+          </a:xfrm>
+          <a:prstGeom prst="rect">
+            <a:avLst/>
+          </a:prstGeom>
+          <a:solidFill>
+            <a:srgbClr val="E2E8F0"/>
+          </a:solidFill>
+          <a:ln>
+            <a:noFill/>
+          </a:ln>
+        </p:spPr>
+        <p:style>
+          <a:lnRef idx="1">
+            <a:schemeClr val="accent1"/>
+          </a:lnRef>
+          <a:fillRef idx="3">
+            <a:schemeClr val="accent1"/>
+          </a:fillRef>
+          <a:effectRef idx="2">
+            <a:schemeClr val="accent1"/>
+          </a:effectRef>
+          <a:fontRef idx="minor">
+            <a:schemeClr val="lt1"/>
+          </a:fontRef>
+        </p:style>
+        <p:txBody>
+          <a:bodyPr rtlCol="0" anchor="ctr"/>
+          <a:lstStyle/>
+          <a:p>
+            <a:pPr algn="ctr"/>
+          </a:p>
+        </p:txBody>
+      </p:sp>
+      <p:sp>
+        <p:nvSpPr>
+          <p:cNvPr id="5" name="TextBox 4"/>
           <p:cNvSpPr txBox="1"/>
           <p:nvPr/>
         </p:nvSpPr>
         <p:spPr>
           <a:xfrm>
-            <a:off x="731520" y="6309360"/>
-            <a:ext cx="10698480" cy="365760"/>
+            <a:off x="731520" y="2011680"/>
+            <a:ext cx="10698480" cy="4114800"/>
           </a:xfrm>
           <a:prstGeom prst="rect">
             <a:avLst/>
@@ -6660,6 +7755,105 @@
           <a:noFill/>
         </p:spPr>
         <p:txBody>
+          <a:bodyPr wrap="square">
+            <a:spAutoFit/>
+          </a:bodyPr>
+          <a:lstStyle/>
+          <a:p>
+            <a:pPr>
+              <a:lnSpc>
+                <a:spcPct val="125000"/>
+              </a:lnSpc>
+              <a:spcAft>
+                <a:spcPts val="1400"/>
+              </a:spcAft>
+              <a:defRPr sz="1500">
+                <a:solidFill>
+                  <a:srgbClr val="1E293B"/>
+                </a:solidFill>
+                <a:latin typeface="Calibri"/>
+              </a:defRPr>
+            </a:pPr>
+            <a:r>
+              <a:t>•  65 qualified opportunities in active sales evaluation stages</a:t>
+            </a:r>
+          </a:p>
+          <a:p>
+            <a:pPr>
+              <a:lnSpc>
+                <a:spcPct val="125000"/>
+              </a:lnSpc>
+              <a:spcAft>
+                <a:spcPts val="1400"/>
+              </a:spcAft>
+              <a:defRPr sz="1500">
+                <a:solidFill>
+                  <a:srgbClr val="1E293B"/>
+                </a:solidFill>
+                <a:latin typeface="Calibri"/>
+              </a:defRPr>
+            </a:pPr>
+            <a:r>
+              <a:t>•  Average enterprise sales cycle compressed from 64 to 38 days</a:t>
+            </a:r>
+          </a:p>
+          <a:p>
+            <a:pPr>
+              <a:lnSpc>
+                <a:spcPct val="125000"/>
+              </a:lnSpc>
+              <a:spcAft>
+                <a:spcPts val="1400"/>
+              </a:spcAft>
+              <a:defRPr sz="1500">
+                <a:solidFill>
+                  <a:srgbClr val="1E293B"/>
+                </a:solidFill>
+                <a:latin typeface="Calibri"/>
+              </a:defRPr>
+            </a:pPr>
+            <a:r>
+              <a:t>•  Inbound demo conversion rate: 38% from organic search and industry referrals</a:t>
+            </a:r>
+          </a:p>
+          <a:p>
+            <a:pPr>
+              <a:lnSpc>
+                <a:spcPct val="125000"/>
+              </a:lnSpc>
+              <a:spcAft>
+                <a:spcPts val="1400"/>
+              </a:spcAft>
+              <a:defRPr sz="1500">
+                <a:solidFill>
+                  <a:srgbClr val="1E293B"/>
+                </a:solidFill>
+                <a:latin typeface="Calibri"/>
+              </a:defRPr>
+            </a:pPr>
+            <a:r>
+              <a:t>•  Channel partner distribution agreements signed with 2 major TMS consultancies</a:t>
+            </a:r>
+          </a:p>
+        </p:txBody>
+      </p:sp>
+      <p:sp>
+        <p:nvSpPr>
+          <p:cNvPr id="6" name="TextBox 5"/>
+          <p:cNvSpPr txBox="1"/>
+          <p:nvPr/>
+        </p:nvSpPr>
+        <p:spPr>
+          <a:xfrm>
+            <a:off x="731520" y="6309360"/>
+            <a:ext cx="10698480" cy="365760"/>
+          </a:xfrm>
+          <a:prstGeom prst="rect">
+            <a:avLst/>
+          </a:prstGeom>
+          <a:noFill/>
+        </p:spPr>
+        <p:txBody>
           <a:bodyPr wrap="none">
             <a:spAutoFit/>
           </a:bodyPr>
@@ -6674,7 +7868,7 @@
               </a:defRPr>
             </a:pPr>
             <a:r>
-              <a:t>Williams Logistics Network · Q4 2026 Executive Investor Update · Slide 7 of 7</a:t>
+              <a:t>Q4 2026 Executive Investor Update — Estella Williams · Slide 9 of 16</a:t>
             </a:r>
           </a:p>
         </p:txBody>

--- a/public/chat_files/estella_q4_executive_investor_deck_final.pptx
+++ b/public/chat_files/estella_q4_executive_investor_deck_final.pptx
@@ -12,15 +12,6 @@
     <p:sldId id="260" r:id="rId11"/>
     <p:sldId id="261" r:id="rId12"/>
     <p:sldId id="262" r:id="rId13"/>
-    <p:sldId id="263" r:id="rId14"/>
-    <p:sldId id="264" r:id="rId15"/>
-    <p:sldId id="265" r:id="rId16"/>
-    <p:sldId id="266" r:id="rId17"/>
-    <p:sldId id="267" r:id="rId18"/>
-    <p:sldId id="268" r:id="rId19"/>
-    <p:sldId id="269" r:id="rId20"/>
-    <p:sldId id="270" r:id="rId21"/>
-    <p:sldId id="271" r:id="rId22"/>
   </p:sldIdLst>
   <p:sldSz cx="12191695" cy="6858000" type="screen4x3"/>
   <p:notesSz cx="6858000" cy="9144000"/>
@@ -3180,7 +3171,7 @@
               </a:defRPr>
             </a:pPr>
             <a:r>
-              <a:t>CONFIDENTIAL &amp; PROPRIETARY</a:t>
+              <a:t>CONFIDENTIAL BOARD BRIEFING · OCTOBER 2026</a:t>
             </a:r>
           </a:p>
           <a:p>
@@ -3196,7 +3187,7 @@
               </a:defRPr>
             </a:pPr>
             <a:r>
-              <a:t>InfiniAI Logistics Platform</a:t>
+              <a:t>Williams Logistics Network · Q4 2026 Strategic Review</a:t>
             </a:r>
           </a:p>
           <a:p>
@@ -3212,7 +3203,7 @@
               </a:defRPr>
             </a:pPr>
             <a:r>
-              <a:t>Q4 2026 Executive Investor Update · Board Briefing</a:t>
+              <a:t>Presented by Estella Williams, Founder &amp; CEO · Enterprise Cross-Dock Telematics Platform</a:t>
             </a:r>
           </a:p>
           <a:p>
@@ -3228,7 +3219,7 @@
               </a:defRPr>
             </a:pPr>
             <a:r>
-              <a:t>Presented by Estella Williams, Founder &amp; CEO</a:t>
+              <a:t>Board of Directors Review Copy · Series A Operational Update</a:t>
             </a:r>
           </a:p>
           <a:p>
@@ -3244,2156 +3235,7 @@
               </a:defRPr>
             </a:pPr>
             <a:r>
-              <a:t>Confidential Board of Directors Review · October 2026</a:t>
-            </a:r>
-          </a:p>
-        </p:txBody>
-      </p:sp>
-    </p:spTree>
-  </p:cSld>
-  <p:clrMapOvr>
-    <a:masterClrMapping/>
-  </p:clrMapOvr>
-</p:sld>
-</file>
-
-<file path=ppt/slides/slide10.xml><?xml version="1.0" encoding="utf-8"?>
-<p:sld xmlns:a="http://schemas.openxmlformats.org/drawingml/2006/main" xmlns:p="http://schemas.openxmlformats.org/presentationml/2006/main" xmlns:r="http://schemas.openxmlformats.org/officeDocument/2006/relationships">
-  <p:cSld>
-    <p:spTree>
-      <p:nvGrpSpPr>
-        <p:cNvPr id="1" name=""/>
-        <p:cNvGrpSpPr/>
-        <p:nvPr/>
-      </p:nvGrpSpPr>
-      <p:grpSpPr/>
-      <p:sp>
-        <p:nvSpPr>
-          <p:cNvPr id="2" name="Rectangle 1"/>
-          <p:cNvSpPr/>
-          <p:nvPr/>
-        </p:nvSpPr>
-        <p:spPr>
-          <a:xfrm>
-            <a:off x="0" y="0"/>
-            <a:ext cx="12191695" cy="6858000"/>
-          </a:xfrm>
-          <a:prstGeom prst="rect">
-            <a:avLst/>
-          </a:prstGeom>
-          <a:solidFill>
-            <a:srgbClr val="FFFFFF"/>
-          </a:solidFill>
-          <a:ln>
-            <a:noFill/>
-          </a:ln>
-        </p:spPr>
-        <p:style>
-          <a:lnRef idx="1">
-            <a:schemeClr val="accent1"/>
-          </a:lnRef>
-          <a:fillRef idx="3">
-            <a:schemeClr val="accent1"/>
-          </a:fillRef>
-          <a:effectRef idx="2">
-            <a:schemeClr val="accent1"/>
-          </a:effectRef>
-          <a:fontRef idx="minor">
-            <a:schemeClr val="lt1"/>
-          </a:fontRef>
-        </p:style>
-        <p:txBody>
-          <a:bodyPr rtlCol="0" anchor="ctr"/>
-          <a:lstStyle/>
-          <a:p>
-            <a:pPr algn="ctr"/>
-          </a:p>
-        </p:txBody>
-      </p:sp>
-      <p:sp>
-        <p:nvSpPr>
-          <p:cNvPr id="3" name="TextBox 2"/>
-          <p:cNvSpPr txBox="1"/>
-          <p:nvPr/>
-        </p:nvSpPr>
-        <p:spPr>
-          <a:xfrm>
-            <a:off x="731520" y="548640"/>
-            <a:ext cx="10698480" cy="1188720"/>
-          </a:xfrm>
-          <a:prstGeom prst="rect">
-            <a:avLst/>
-          </a:prstGeom>
-          <a:noFill/>
-        </p:spPr>
-        <p:txBody>
-          <a:bodyPr wrap="square">
-            <a:spAutoFit/>
-          </a:bodyPr>
-          <a:lstStyle/>
-          <a:p>
-            <a:pPr>
-              <a:spcAft>
-                <a:spcPts val="400"/>
-              </a:spcAft>
-              <a:defRPr sz="1000" b="1">
-                <a:solidFill>
-                  <a:srgbClr val="2563EB"/>
-                </a:solidFill>
-                <a:latin typeface="Calibri"/>
-              </a:defRPr>
-            </a:pPr>
-            <a:r>
-              <a:t>Q4 2026 EXECUTIVE INVESTOR UPDATE — ESTELLA WILLIA</a:t>
-            </a:r>
-          </a:p>
-          <a:p>
-            <a:pPr>
-              <a:defRPr sz="2200" b="1">
-                <a:solidFill>
-                  <a:srgbClr val="0F172A"/>
-                </a:solidFill>
-                <a:latin typeface="Calibri"/>
-              </a:defRPr>
-            </a:pPr>
-            <a:r>
-              <a:t>Security, Governance &amp; Compliance</a:t>
-            </a:r>
-          </a:p>
-          <a:p>
-            <a:pPr>
-              <a:spcBef>
-                <a:spcPts val="200"/>
-              </a:spcBef>
-              <a:defRPr sz="1200">
-                <a:solidFill>
-                  <a:srgbClr val="64748B"/>
-                </a:solidFill>
-                <a:latin typeface="Calibri"/>
-              </a:defRPr>
-            </a:pPr>
-            <a:r>
-              <a:t>Enterprise Trust Infrastructure</a:t>
-            </a:r>
-          </a:p>
-        </p:txBody>
-      </p:sp>
-      <p:sp>
-        <p:nvSpPr>
-          <p:cNvPr id="4" name="Rectangle 3"/>
-          <p:cNvSpPr/>
-          <p:nvPr/>
-        </p:nvSpPr>
-        <p:spPr>
-          <a:xfrm>
-            <a:off x="731520" y="1737360"/>
-            <a:ext cx="10698480" cy="13716"/>
-          </a:xfrm>
-          <a:prstGeom prst="rect">
-            <a:avLst/>
-          </a:prstGeom>
-          <a:solidFill>
-            <a:srgbClr val="E2E8F0"/>
-          </a:solidFill>
-          <a:ln>
-            <a:noFill/>
-          </a:ln>
-        </p:spPr>
-        <p:style>
-          <a:lnRef idx="1">
-            <a:schemeClr val="accent1"/>
-          </a:lnRef>
-          <a:fillRef idx="3">
-            <a:schemeClr val="accent1"/>
-          </a:fillRef>
-          <a:effectRef idx="2">
-            <a:schemeClr val="accent1"/>
-          </a:effectRef>
-          <a:fontRef idx="minor">
-            <a:schemeClr val="lt1"/>
-          </a:fontRef>
-        </p:style>
-        <p:txBody>
-          <a:bodyPr rtlCol="0" anchor="ctr"/>
-          <a:lstStyle/>
-          <a:p>
-            <a:pPr algn="ctr"/>
-          </a:p>
-        </p:txBody>
-      </p:sp>
-      <p:sp>
-        <p:nvSpPr>
-          <p:cNvPr id="5" name="TextBox 4"/>
-          <p:cNvSpPr txBox="1"/>
-          <p:nvPr/>
-        </p:nvSpPr>
-        <p:spPr>
-          <a:xfrm>
-            <a:off x="731520" y="2011680"/>
-            <a:ext cx="10698480" cy="4114800"/>
-          </a:xfrm>
-          <a:prstGeom prst="rect">
-            <a:avLst/>
-          </a:prstGeom>
-          <a:noFill/>
-        </p:spPr>
-        <p:txBody>
-          <a:bodyPr wrap="square">
-            <a:spAutoFit/>
-          </a:bodyPr>
-          <a:lstStyle/>
-          <a:p>
-            <a:pPr>
-              <a:lnSpc>
-                <a:spcPct val="125000"/>
-              </a:lnSpc>
-              <a:spcAft>
-                <a:spcPts val="1400"/>
-              </a:spcAft>
-              <a:defRPr sz="1500">
-                <a:solidFill>
-                  <a:srgbClr val="1E293B"/>
-                </a:solidFill>
-                <a:latin typeface="Calibri"/>
-              </a:defRPr>
-            </a:pPr>
-            <a:r>
-              <a:t>•  SOC-2 Type II report completed with zero material exceptions</a:t>
-            </a:r>
-          </a:p>
-          <a:p>
-            <a:pPr>
-              <a:lnSpc>
-                <a:spcPct val="125000"/>
-              </a:lnSpc>
-              <a:spcAft>
-                <a:spcPts val="1400"/>
-              </a:spcAft>
-              <a:defRPr sz="1500">
-                <a:solidFill>
-                  <a:srgbClr val="1E293B"/>
-                </a:solidFill>
-                <a:latin typeface="Calibri"/>
-              </a:defRPr>
-            </a:pPr>
-            <a:r>
-              <a:t>•  End-to-end 256-bit AES data encryption in transit and at rest</a:t>
-            </a:r>
-          </a:p>
-          <a:p>
-            <a:pPr>
-              <a:lnSpc>
-                <a:spcPct val="125000"/>
-              </a:lnSpc>
-              <a:spcAft>
-                <a:spcPts val="1400"/>
-              </a:spcAft>
-              <a:defRPr sz="1500">
-                <a:solidFill>
-                  <a:srgbClr val="1E293B"/>
-                </a:solidFill>
-                <a:latin typeface="Calibri"/>
-              </a:defRPr>
-            </a:pPr>
-            <a:r>
-              <a:t>•  Quarterly penetration tests executed by independent third-party auditor</a:t>
-            </a:r>
-          </a:p>
-          <a:p>
-            <a:pPr>
-              <a:lnSpc>
-                <a:spcPct val="125000"/>
-              </a:lnSpc>
-              <a:spcAft>
-                <a:spcPts val="1400"/>
-              </a:spcAft>
-              <a:defRPr sz="1500">
-                <a:solidFill>
-                  <a:srgbClr val="1E293B"/>
-                </a:solidFill>
-                <a:latin typeface="Calibri"/>
-              </a:defRPr>
-            </a:pPr>
-            <a:r>
-              <a:t>•  Automated role-based access control (RBAC) with granular audit logs</a:t>
-            </a:r>
-          </a:p>
-        </p:txBody>
-      </p:sp>
-      <p:sp>
-        <p:nvSpPr>
-          <p:cNvPr id="6" name="TextBox 5"/>
-          <p:cNvSpPr txBox="1"/>
-          <p:nvPr/>
-        </p:nvSpPr>
-        <p:spPr>
-          <a:xfrm>
-            <a:off x="731520" y="6309360"/>
-            <a:ext cx="10698480" cy="365760"/>
-          </a:xfrm>
-          <a:prstGeom prst="rect">
-            <a:avLst/>
-          </a:prstGeom>
-          <a:noFill/>
-        </p:spPr>
-        <p:txBody>
-          <a:bodyPr wrap="none">
-            <a:spAutoFit/>
-          </a:bodyPr>
-          <a:lstStyle/>
-          <a:p>
-            <a:pPr>
-              <a:defRPr sz="900">
-                <a:solidFill>
-                  <a:srgbClr val="94A3B8"/>
-                </a:solidFill>
-                <a:latin typeface="Calibri"/>
-              </a:defRPr>
-            </a:pPr>
-            <a:r>
-              <a:t>Q4 2026 Executive Investor Update — Estella Williams · Slide 10 of 16</a:t>
-            </a:r>
-          </a:p>
-        </p:txBody>
-      </p:sp>
-    </p:spTree>
-  </p:cSld>
-  <p:clrMapOvr>
-    <a:masterClrMapping/>
-  </p:clrMapOvr>
-</p:sld>
-</file>
-
-<file path=ppt/slides/slide11.xml><?xml version="1.0" encoding="utf-8"?>
-<p:sld xmlns:a="http://schemas.openxmlformats.org/drawingml/2006/main" xmlns:p="http://schemas.openxmlformats.org/presentationml/2006/main" xmlns:r="http://schemas.openxmlformats.org/officeDocument/2006/relationships">
-  <p:cSld>
-    <p:spTree>
-      <p:nvGrpSpPr>
-        <p:cNvPr id="1" name=""/>
-        <p:cNvGrpSpPr/>
-        <p:nvPr/>
-      </p:nvGrpSpPr>
-      <p:grpSpPr/>
-      <p:sp>
-        <p:nvSpPr>
-          <p:cNvPr id="2" name="Rectangle 1"/>
-          <p:cNvSpPr/>
-          <p:nvPr/>
-        </p:nvSpPr>
-        <p:spPr>
-          <a:xfrm>
-            <a:off x="0" y="0"/>
-            <a:ext cx="12191695" cy="6858000"/>
-          </a:xfrm>
-          <a:prstGeom prst="rect">
-            <a:avLst/>
-          </a:prstGeom>
-          <a:solidFill>
-            <a:srgbClr val="FFFFFF"/>
-          </a:solidFill>
-          <a:ln>
-            <a:noFill/>
-          </a:ln>
-        </p:spPr>
-        <p:style>
-          <a:lnRef idx="1">
-            <a:schemeClr val="accent1"/>
-          </a:lnRef>
-          <a:fillRef idx="3">
-            <a:schemeClr val="accent1"/>
-          </a:fillRef>
-          <a:effectRef idx="2">
-            <a:schemeClr val="accent1"/>
-          </a:effectRef>
-          <a:fontRef idx="minor">
-            <a:schemeClr val="lt1"/>
-          </a:fontRef>
-        </p:style>
-        <p:txBody>
-          <a:bodyPr rtlCol="0" anchor="ctr"/>
-          <a:lstStyle/>
-          <a:p>
-            <a:pPr algn="ctr"/>
-          </a:p>
-        </p:txBody>
-      </p:sp>
-      <p:sp>
-        <p:nvSpPr>
-          <p:cNvPr id="3" name="TextBox 2"/>
-          <p:cNvSpPr txBox="1"/>
-          <p:nvPr/>
-        </p:nvSpPr>
-        <p:spPr>
-          <a:xfrm>
-            <a:off x="731520" y="548640"/>
-            <a:ext cx="10698480" cy="1188720"/>
-          </a:xfrm>
-          <a:prstGeom prst="rect">
-            <a:avLst/>
-          </a:prstGeom>
-          <a:noFill/>
-        </p:spPr>
-        <p:txBody>
-          <a:bodyPr wrap="square">
-            <a:spAutoFit/>
-          </a:bodyPr>
-          <a:lstStyle/>
-          <a:p>
-            <a:pPr>
-              <a:spcAft>
-                <a:spcPts val="400"/>
-              </a:spcAft>
-              <a:defRPr sz="1000" b="1">
-                <a:solidFill>
-                  <a:srgbClr val="2563EB"/>
-                </a:solidFill>
-                <a:latin typeface="Calibri"/>
-              </a:defRPr>
-            </a:pPr>
-            <a:r>
-              <a:t>Q4 2026 EXECUTIVE INVESTOR UPDATE — ESTELLA WILLIA</a:t>
-            </a:r>
-          </a:p>
-          <a:p>
-            <a:pPr>
-              <a:defRPr sz="2200" b="1">
-                <a:solidFill>
-                  <a:srgbClr val="0F172A"/>
-                </a:solidFill>
-                <a:latin typeface="Calibri"/>
-              </a:defRPr>
-            </a:pPr>
-            <a:r>
-              <a:t>Carrier Fleet Tier Economics</a:t>
-            </a:r>
-          </a:p>
-          <a:p>
-            <a:pPr>
-              <a:spcBef>
-                <a:spcPts val="200"/>
-              </a:spcBef>
-              <a:defRPr sz="1200">
-                <a:solidFill>
-                  <a:srgbClr val="64748B"/>
-                </a:solidFill>
-                <a:latin typeface="Calibri"/>
-              </a:defRPr>
-            </a:pPr>
-            <a:r>
-              <a:t>Performance by Fleet Size Category</a:t>
-            </a:r>
-          </a:p>
-        </p:txBody>
-      </p:sp>
-      <p:sp>
-        <p:nvSpPr>
-          <p:cNvPr id="4" name="Rectangle 3"/>
-          <p:cNvSpPr/>
-          <p:nvPr/>
-        </p:nvSpPr>
-        <p:spPr>
-          <a:xfrm>
-            <a:off x="731520" y="1737360"/>
-            <a:ext cx="10698480" cy="13716"/>
-          </a:xfrm>
-          <a:prstGeom prst="rect">
-            <a:avLst/>
-          </a:prstGeom>
-          <a:solidFill>
-            <a:srgbClr val="E2E8F0"/>
-          </a:solidFill>
-          <a:ln>
-            <a:noFill/>
-          </a:ln>
-        </p:spPr>
-        <p:style>
-          <a:lnRef idx="1">
-            <a:schemeClr val="accent1"/>
-          </a:lnRef>
-          <a:fillRef idx="3">
-            <a:schemeClr val="accent1"/>
-          </a:fillRef>
-          <a:effectRef idx="2">
-            <a:schemeClr val="accent1"/>
-          </a:effectRef>
-          <a:fontRef idx="minor">
-            <a:schemeClr val="lt1"/>
-          </a:fontRef>
-        </p:style>
-        <p:txBody>
-          <a:bodyPr rtlCol="0" anchor="ctr"/>
-          <a:lstStyle/>
-          <a:p>
-            <a:pPr algn="ctr"/>
-          </a:p>
-        </p:txBody>
-      </p:sp>
-      <p:sp>
-        <p:nvSpPr>
-          <p:cNvPr id="5" name="TextBox 4"/>
-          <p:cNvSpPr txBox="1"/>
-          <p:nvPr/>
-        </p:nvSpPr>
-        <p:spPr>
-          <a:xfrm>
-            <a:off x="731520" y="2011680"/>
-            <a:ext cx="10698480" cy="4114800"/>
-          </a:xfrm>
-          <a:prstGeom prst="rect">
-            <a:avLst/>
-          </a:prstGeom>
-          <a:noFill/>
-        </p:spPr>
-        <p:txBody>
-          <a:bodyPr wrap="square">
-            <a:spAutoFit/>
-          </a:bodyPr>
-          <a:lstStyle/>
-          <a:p>
-            <a:pPr>
-              <a:lnSpc>
-                <a:spcPct val="125000"/>
-              </a:lnSpc>
-              <a:spcAft>
-                <a:spcPts val="1400"/>
-              </a:spcAft>
-              <a:defRPr sz="1500">
-                <a:solidFill>
-                  <a:srgbClr val="1E293B"/>
-                </a:solidFill>
-                <a:latin typeface="Calibri"/>
-              </a:defRPr>
-            </a:pPr>
-            <a:r>
-              <a:t>•  Tier 1 (5–20 Trucks): 38 fleets · $750/mo avg · 98% retention</a:t>
-            </a:r>
-          </a:p>
-          <a:p>
-            <a:pPr>
-              <a:lnSpc>
-                <a:spcPct val="125000"/>
-              </a:lnSpc>
-              <a:spcAft>
-                <a:spcPts val="1400"/>
-              </a:spcAft>
-              <a:defRPr sz="1500">
-                <a:solidFill>
-                  <a:srgbClr val="1E293B"/>
-                </a:solidFill>
-                <a:latin typeface="Calibri"/>
-              </a:defRPr>
-            </a:pPr>
-            <a:r>
-              <a:t>•  Tier 2 (21–50 Trucks): 21 fleets · $1,650/mo avg · 118% net expansion</a:t>
-            </a:r>
-          </a:p>
-          <a:p>
-            <a:pPr>
-              <a:lnSpc>
-                <a:spcPct val="125000"/>
-              </a:lnSpc>
-              <a:spcAft>
-                <a:spcPts val="1400"/>
-              </a:spcAft>
-              <a:defRPr sz="1500">
-                <a:solidFill>
-                  <a:srgbClr val="1E293B"/>
-                </a:solidFill>
-                <a:latin typeface="Calibri"/>
-              </a:defRPr>
-            </a:pPr>
-            <a:r>
-              <a:t>•  Tier 3 (50+ Trucks): 6 fleets · $3,200/mo avg · 140% net expansion</a:t>
-            </a:r>
-          </a:p>
-          <a:p>
-            <a:pPr>
-              <a:lnSpc>
-                <a:spcPct val="125000"/>
-              </a:lnSpc>
-              <a:spcAft>
-                <a:spcPts val="1400"/>
-              </a:spcAft>
-              <a:defRPr sz="1500">
-                <a:solidFill>
-                  <a:srgbClr val="1E293B"/>
-                </a:solidFill>
-                <a:latin typeface="Calibri"/>
-              </a:defRPr>
-            </a:pPr>
-            <a:r>
-              <a:t>•  Focus on Tier 2 expansion generates highest net contribution margin</a:t>
-            </a:r>
-          </a:p>
-        </p:txBody>
-      </p:sp>
-      <p:sp>
-        <p:nvSpPr>
-          <p:cNvPr id="6" name="TextBox 5"/>
-          <p:cNvSpPr txBox="1"/>
-          <p:nvPr/>
-        </p:nvSpPr>
-        <p:spPr>
-          <a:xfrm>
-            <a:off x="731520" y="6309360"/>
-            <a:ext cx="10698480" cy="365760"/>
-          </a:xfrm>
-          <a:prstGeom prst="rect">
-            <a:avLst/>
-          </a:prstGeom>
-          <a:noFill/>
-        </p:spPr>
-        <p:txBody>
-          <a:bodyPr wrap="none">
-            <a:spAutoFit/>
-          </a:bodyPr>
-          <a:lstStyle/>
-          <a:p>
-            <a:pPr>
-              <a:defRPr sz="900">
-                <a:solidFill>
-                  <a:srgbClr val="94A3B8"/>
-                </a:solidFill>
-                <a:latin typeface="Calibri"/>
-              </a:defRPr>
-            </a:pPr>
-            <a:r>
-              <a:t>Q4 2026 Executive Investor Update — Estella Williams · Slide 11 of 16</a:t>
-            </a:r>
-          </a:p>
-        </p:txBody>
-      </p:sp>
-    </p:spTree>
-  </p:cSld>
-  <p:clrMapOvr>
-    <a:masterClrMapping/>
-  </p:clrMapOvr>
-</p:sld>
-</file>
-
-<file path=ppt/slides/slide12.xml><?xml version="1.0" encoding="utf-8"?>
-<p:sld xmlns:a="http://schemas.openxmlformats.org/drawingml/2006/main" xmlns:p="http://schemas.openxmlformats.org/presentationml/2006/main" xmlns:r="http://schemas.openxmlformats.org/officeDocument/2006/relationships">
-  <p:cSld>
-    <p:spTree>
-      <p:nvGrpSpPr>
-        <p:cNvPr id="1" name=""/>
-        <p:cNvGrpSpPr/>
-        <p:nvPr/>
-      </p:nvGrpSpPr>
-      <p:grpSpPr/>
-      <p:sp>
-        <p:nvSpPr>
-          <p:cNvPr id="2" name="Rectangle 1"/>
-          <p:cNvSpPr/>
-          <p:nvPr/>
-        </p:nvSpPr>
-        <p:spPr>
-          <a:xfrm>
-            <a:off x="0" y="0"/>
-            <a:ext cx="12191695" cy="6858000"/>
-          </a:xfrm>
-          <a:prstGeom prst="rect">
-            <a:avLst/>
-          </a:prstGeom>
-          <a:solidFill>
-            <a:srgbClr val="FFFFFF"/>
-          </a:solidFill>
-          <a:ln>
-            <a:noFill/>
-          </a:ln>
-        </p:spPr>
-        <p:style>
-          <a:lnRef idx="1">
-            <a:schemeClr val="accent1"/>
-          </a:lnRef>
-          <a:fillRef idx="3">
-            <a:schemeClr val="accent1"/>
-          </a:fillRef>
-          <a:effectRef idx="2">
-            <a:schemeClr val="accent1"/>
-          </a:effectRef>
-          <a:fontRef idx="minor">
-            <a:schemeClr val="lt1"/>
-          </a:fontRef>
-        </p:style>
-        <p:txBody>
-          <a:bodyPr rtlCol="0" anchor="ctr"/>
-          <a:lstStyle/>
-          <a:p>
-            <a:pPr algn="ctr"/>
-          </a:p>
-        </p:txBody>
-      </p:sp>
-      <p:sp>
-        <p:nvSpPr>
-          <p:cNvPr id="3" name="TextBox 2"/>
-          <p:cNvSpPr txBox="1"/>
-          <p:nvPr/>
-        </p:nvSpPr>
-        <p:spPr>
-          <a:xfrm>
-            <a:off x="731520" y="548640"/>
-            <a:ext cx="10698480" cy="1188720"/>
-          </a:xfrm>
-          <a:prstGeom prst="rect">
-            <a:avLst/>
-          </a:prstGeom>
-          <a:noFill/>
-        </p:spPr>
-        <p:txBody>
-          <a:bodyPr wrap="square">
-            <a:spAutoFit/>
-          </a:bodyPr>
-          <a:lstStyle/>
-          <a:p>
-            <a:pPr>
-              <a:spcAft>
-                <a:spcPts val="400"/>
-              </a:spcAft>
-              <a:defRPr sz="1000" b="1">
-                <a:solidFill>
-                  <a:srgbClr val="2563EB"/>
-                </a:solidFill>
-                <a:latin typeface="Calibri"/>
-              </a:defRPr>
-            </a:pPr>
-            <a:r>
-              <a:t>Q4 2026 EXECUTIVE INVESTOR UPDATE — ESTELLA WILLIA</a:t>
-            </a:r>
-          </a:p>
-          <a:p>
-            <a:pPr>
-              <a:defRPr sz="2200" b="1">
-                <a:solidFill>
-                  <a:srgbClr val="0F172A"/>
-                </a:solidFill>
-                <a:latin typeface="Calibri"/>
-              </a:defRPr>
-            </a:pPr>
-            <a:r>
-              <a:t>2027 Headcount &amp; Organization Plan</a:t>
-            </a:r>
-          </a:p>
-          <a:p>
-            <a:pPr>
-              <a:spcBef>
-                <a:spcPts val="200"/>
-              </a:spcBef>
-              <a:defRPr sz="1200">
-                <a:solidFill>
-                  <a:srgbClr val="64748B"/>
-                </a:solidFill>
-                <a:latin typeface="Calibri"/>
-              </a:defRPr>
-            </a:pPr>
-            <a:r>
-              <a:t>Targeted Operational Scaling</a:t>
-            </a:r>
-          </a:p>
-        </p:txBody>
-      </p:sp>
-      <p:sp>
-        <p:nvSpPr>
-          <p:cNvPr id="4" name="Rectangle 3"/>
-          <p:cNvSpPr/>
-          <p:nvPr/>
-        </p:nvSpPr>
-        <p:spPr>
-          <a:xfrm>
-            <a:off x="731520" y="1737360"/>
-            <a:ext cx="10698480" cy="13716"/>
-          </a:xfrm>
-          <a:prstGeom prst="rect">
-            <a:avLst/>
-          </a:prstGeom>
-          <a:solidFill>
-            <a:srgbClr val="E2E8F0"/>
-          </a:solidFill>
-          <a:ln>
-            <a:noFill/>
-          </a:ln>
-        </p:spPr>
-        <p:style>
-          <a:lnRef idx="1">
-            <a:schemeClr val="accent1"/>
-          </a:lnRef>
-          <a:fillRef idx="3">
-            <a:schemeClr val="accent1"/>
-          </a:fillRef>
-          <a:effectRef idx="2">
-            <a:schemeClr val="accent1"/>
-          </a:effectRef>
-          <a:fontRef idx="minor">
-            <a:schemeClr val="lt1"/>
-          </a:fontRef>
-        </p:style>
-        <p:txBody>
-          <a:bodyPr rtlCol="0" anchor="ctr"/>
-          <a:lstStyle/>
-          <a:p>
-            <a:pPr algn="ctr"/>
-          </a:p>
-        </p:txBody>
-      </p:sp>
-      <p:sp>
-        <p:nvSpPr>
-          <p:cNvPr id="5" name="TextBox 4"/>
-          <p:cNvSpPr txBox="1"/>
-          <p:nvPr/>
-        </p:nvSpPr>
-        <p:spPr>
-          <a:xfrm>
-            <a:off x="731520" y="2011680"/>
-            <a:ext cx="10698480" cy="4114800"/>
-          </a:xfrm>
-          <a:prstGeom prst="rect">
-            <a:avLst/>
-          </a:prstGeom>
-          <a:noFill/>
-        </p:spPr>
-        <p:txBody>
-          <a:bodyPr wrap="square">
-            <a:spAutoFit/>
-          </a:bodyPr>
-          <a:lstStyle/>
-          <a:p>
-            <a:pPr>
-              <a:lnSpc>
-                <a:spcPct val="125000"/>
-              </a:lnSpc>
-              <a:spcAft>
-                <a:spcPts val="1400"/>
-              </a:spcAft>
-              <a:defRPr sz="1500">
-                <a:solidFill>
-                  <a:srgbClr val="1E293B"/>
-                </a:solidFill>
-                <a:latin typeface="Calibri"/>
-              </a:defRPr>
-            </a:pPr>
-            <a:r>
-              <a:t>•  Current Headcount: 14 FTEs (Engineering 7, Sales/CS 5, G&amp;A 2)</a:t>
-            </a:r>
-          </a:p>
-          <a:p>
-            <a:pPr>
-              <a:lnSpc>
-                <a:spcPct val="125000"/>
-              </a:lnSpc>
-              <a:spcAft>
-                <a:spcPts val="1400"/>
-              </a:spcAft>
-              <a:defRPr sz="1500">
-                <a:solidFill>
-                  <a:srgbClr val="1E293B"/>
-                </a:solidFill>
-                <a:latin typeface="Calibri"/>
-              </a:defRPr>
-            </a:pPr>
-            <a:r>
-              <a:t>•  Key Q1 Hires: VP of Enterprise Sales, Staff Distributed Systems Engineer</a:t>
-            </a:r>
-          </a:p>
-          <a:p>
-            <a:pPr>
-              <a:lnSpc>
-                <a:spcPct val="125000"/>
-              </a:lnSpc>
-              <a:spcAft>
-                <a:spcPts val="1400"/>
-              </a:spcAft>
-              <a:defRPr sz="1500">
-                <a:solidFill>
-                  <a:srgbClr val="1E293B"/>
-                </a:solidFill>
-                <a:latin typeface="Calibri"/>
-              </a:defRPr>
-            </a:pPr>
-            <a:r>
-              <a:t>•  Operational SOPs finalized for 4 core support &amp; dispatch roles</a:t>
-            </a:r>
-          </a:p>
-          <a:p>
-            <a:pPr>
-              <a:lnSpc>
-                <a:spcPct val="125000"/>
-              </a:lnSpc>
-              <a:spcAft>
-                <a:spcPts val="1400"/>
-              </a:spcAft>
-              <a:defRPr sz="1500">
-                <a:solidFill>
-                  <a:srgbClr val="1E293B"/>
-                </a:solidFill>
-                <a:latin typeface="Calibri"/>
-              </a:defRPr>
-            </a:pPr>
-            <a:r>
-              <a:t>•  Hiring plan gated strictly on achieving $4.8M ARR milestone</a:t>
-            </a:r>
-          </a:p>
-        </p:txBody>
-      </p:sp>
-      <p:sp>
-        <p:nvSpPr>
-          <p:cNvPr id="6" name="TextBox 5"/>
-          <p:cNvSpPr txBox="1"/>
-          <p:nvPr/>
-        </p:nvSpPr>
-        <p:spPr>
-          <a:xfrm>
-            <a:off x="731520" y="6309360"/>
-            <a:ext cx="10698480" cy="365760"/>
-          </a:xfrm>
-          <a:prstGeom prst="rect">
-            <a:avLst/>
-          </a:prstGeom>
-          <a:noFill/>
-        </p:spPr>
-        <p:txBody>
-          <a:bodyPr wrap="none">
-            <a:spAutoFit/>
-          </a:bodyPr>
-          <a:lstStyle/>
-          <a:p>
-            <a:pPr>
-              <a:defRPr sz="900">
-                <a:solidFill>
-                  <a:srgbClr val="94A3B8"/>
-                </a:solidFill>
-                <a:latin typeface="Calibri"/>
-              </a:defRPr>
-            </a:pPr>
-            <a:r>
-              <a:t>Q4 2026 Executive Investor Update — Estella Williams · Slide 12 of 16</a:t>
-            </a:r>
-          </a:p>
-        </p:txBody>
-      </p:sp>
-    </p:spTree>
-  </p:cSld>
-  <p:clrMapOvr>
-    <a:masterClrMapping/>
-  </p:clrMapOvr>
-</p:sld>
-</file>
-
-<file path=ppt/slides/slide13.xml><?xml version="1.0" encoding="utf-8"?>
-<p:sld xmlns:a="http://schemas.openxmlformats.org/drawingml/2006/main" xmlns:p="http://schemas.openxmlformats.org/presentationml/2006/main" xmlns:r="http://schemas.openxmlformats.org/officeDocument/2006/relationships">
-  <p:cSld>
-    <p:spTree>
-      <p:nvGrpSpPr>
-        <p:cNvPr id="1" name=""/>
-        <p:cNvGrpSpPr/>
-        <p:nvPr/>
-      </p:nvGrpSpPr>
-      <p:grpSpPr/>
-      <p:sp>
-        <p:nvSpPr>
-          <p:cNvPr id="2" name="Rectangle 1"/>
-          <p:cNvSpPr/>
-          <p:nvPr/>
-        </p:nvSpPr>
-        <p:spPr>
-          <a:xfrm>
-            <a:off x="0" y="0"/>
-            <a:ext cx="12191695" cy="6858000"/>
-          </a:xfrm>
-          <a:prstGeom prst="rect">
-            <a:avLst/>
-          </a:prstGeom>
-          <a:solidFill>
-            <a:srgbClr val="FFFFFF"/>
-          </a:solidFill>
-          <a:ln>
-            <a:noFill/>
-          </a:ln>
-        </p:spPr>
-        <p:style>
-          <a:lnRef idx="1">
-            <a:schemeClr val="accent1"/>
-          </a:lnRef>
-          <a:fillRef idx="3">
-            <a:schemeClr val="accent1"/>
-          </a:fillRef>
-          <a:effectRef idx="2">
-            <a:schemeClr val="accent1"/>
-          </a:effectRef>
-          <a:fontRef idx="minor">
-            <a:schemeClr val="lt1"/>
-          </a:fontRef>
-        </p:style>
-        <p:txBody>
-          <a:bodyPr rtlCol="0" anchor="ctr"/>
-          <a:lstStyle/>
-          <a:p>
-            <a:pPr algn="ctr"/>
-          </a:p>
-        </p:txBody>
-      </p:sp>
-      <p:sp>
-        <p:nvSpPr>
-          <p:cNvPr id="3" name="TextBox 2"/>
-          <p:cNvSpPr txBox="1"/>
-          <p:nvPr/>
-        </p:nvSpPr>
-        <p:spPr>
-          <a:xfrm>
-            <a:off x="731520" y="548640"/>
-            <a:ext cx="10698480" cy="1188720"/>
-          </a:xfrm>
-          <a:prstGeom prst="rect">
-            <a:avLst/>
-          </a:prstGeom>
-          <a:noFill/>
-        </p:spPr>
-        <p:txBody>
-          <a:bodyPr wrap="square">
-            <a:spAutoFit/>
-          </a:bodyPr>
-          <a:lstStyle/>
-          <a:p>
-            <a:pPr>
-              <a:spcAft>
-                <a:spcPts val="400"/>
-              </a:spcAft>
-              <a:defRPr sz="1000" b="1">
-                <a:solidFill>
-                  <a:srgbClr val="2563EB"/>
-                </a:solidFill>
-                <a:latin typeface="Calibri"/>
-              </a:defRPr>
-            </a:pPr>
-            <a:r>
-              <a:t>Q4 2026 EXECUTIVE INVESTOR UPDATE — ESTELLA WILLIA</a:t>
-            </a:r>
-          </a:p>
-          <a:p>
-            <a:pPr>
-              <a:defRPr sz="2200" b="1">
-                <a:solidFill>
-                  <a:srgbClr val="0F172A"/>
-                </a:solidFill>
-                <a:latin typeface="Calibri"/>
-              </a:defRPr>
-            </a:pPr>
-            <a:r>
-              <a:t>Cash Flow &amp; Runway Analysis</a:t>
-            </a:r>
-          </a:p>
-          <a:p>
-            <a:pPr>
-              <a:spcBef>
-                <a:spcPts val="200"/>
-              </a:spcBef>
-              <a:defRPr sz="1200">
-                <a:solidFill>
-                  <a:srgbClr val="64748B"/>
-                </a:solidFill>
-                <a:latin typeface="Calibri"/>
-              </a:defRPr>
-            </a:pPr>
-            <a:r>
-              <a:t>18.2 Months of Cash Runway</a:t>
-            </a:r>
-          </a:p>
-        </p:txBody>
-      </p:sp>
-      <p:sp>
-        <p:nvSpPr>
-          <p:cNvPr id="4" name="Rectangle 3"/>
-          <p:cNvSpPr/>
-          <p:nvPr/>
-        </p:nvSpPr>
-        <p:spPr>
-          <a:xfrm>
-            <a:off x="731520" y="1737360"/>
-            <a:ext cx="10698480" cy="13716"/>
-          </a:xfrm>
-          <a:prstGeom prst="rect">
-            <a:avLst/>
-          </a:prstGeom>
-          <a:solidFill>
-            <a:srgbClr val="E2E8F0"/>
-          </a:solidFill>
-          <a:ln>
-            <a:noFill/>
-          </a:ln>
-        </p:spPr>
-        <p:style>
-          <a:lnRef idx="1">
-            <a:schemeClr val="accent1"/>
-          </a:lnRef>
-          <a:fillRef idx="3">
-            <a:schemeClr val="accent1"/>
-          </a:fillRef>
-          <a:effectRef idx="2">
-            <a:schemeClr val="accent1"/>
-          </a:effectRef>
-          <a:fontRef idx="minor">
-            <a:schemeClr val="lt1"/>
-          </a:fontRef>
-        </p:style>
-        <p:txBody>
-          <a:bodyPr rtlCol="0" anchor="ctr"/>
-          <a:lstStyle/>
-          <a:p>
-            <a:pPr algn="ctr"/>
-          </a:p>
-        </p:txBody>
-      </p:sp>
-      <p:sp>
-        <p:nvSpPr>
-          <p:cNvPr id="5" name="TextBox 4"/>
-          <p:cNvSpPr txBox="1"/>
-          <p:nvPr/>
-        </p:nvSpPr>
-        <p:spPr>
-          <a:xfrm>
-            <a:off x="731520" y="2011680"/>
-            <a:ext cx="10698480" cy="4114800"/>
-          </a:xfrm>
-          <a:prstGeom prst="rect">
-            <a:avLst/>
-          </a:prstGeom>
-          <a:noFill/>
-        </p:spPr>
-        <p:txBody>
-          <a:bodyPr wrap="square">
-            <a:spAutoFit/>
-          </a:bodyPr>
-          <a:lstStyle/>
-          <a:p>
-            <a:pPr>
-              <a:lnSpc>
-                <a:spcPct val="125000"/>
-              </a:lnSpc>
-              <a:spcAft>
-                <a:spcPts val="1400"/>
-              </a:spcAft>
-              <a:defRPr sz="1500">
-                <a:solidFill>
-                  <a:srgbClr val="1E293B"/>
-                </a:solidFill>
-                <a:latin typeface="Calibri"/>
-              </a:defRPr>
-            </a:pPr>
-            <a:r>
-              <a:t>•  Ending Cash Balance as of Sept 30, 2026: $4.42M</a:t>
-            </a:r>
-          </a:p>
-          <a:p>
-            <a:pPr>
-              <a:lnSpc>
-                <a:spcPct val="125000"/>
-              </a:lnSpc>
-              <a:spcAft>
-                <a:spcPts val="1400"/>
-              </a:spcAft>
-              <a:defRPr sz="1500">
-                <a:solidFill>
-                  <a:srgbClr val="1E293B"/>
-                </a:solidFill>
-                <a:latin typeface="Calibri"/>
-              </a:defRPr>
-            </a:pPr>
-            <a:r>
-              <a:t>•  Average Net Monthly Burn: $94,000 (down from $138,000 in Q1)</a:t>
-            </a:r>
-          </a:p>
-          <a:p>
-            <a:pPr>
-              <a:lnSpc>
-                <a:spcPct val="125000"/>
-              </a:lnSpc>
-              <a:spcAft>
-                <a:spcPts val="1400"/>
-              </a:spcAft>
-              <a:defRPr sz="1500">
-                <a:solidFill>
-                  <a:srgbClr val="1E293B"/>
-                </a:solidFill>
-                <a:latin typeface="Calibri"/>
-              </a:defRPr>
-            </a:pPr>
-            <a:r>
-              <a:t>•  Current runway extends through April 2028 without additional capital</a:t>
-            </a:r>
-          </a:p>
-          <a:p>
-            <a:pPr>
-              <a:lnSpc>
-                <a:spcPct val="125000"/>
-              </a:lnSpc>
-              <a:spcAft>
-                <a:spcPts val="1400"/>
-              </a:spcAft>
-              <a:defRPr sz="1500">
-                <a:solidFill>
-                  <a:srgbClr val="1E293B"/>
-                </a:solidFill>
-                <a:latin typeface="Calibri"/>
-              </a:defRPr>
-            </a:pPr>
-            <a:r>
-              <a:t>•  Optionality to reach cash flow breakeven with 15% ARR growth</a:t>
-            </a:r>
-          </a:p>
-        </p:txBody>
-      </p:sp>
-      <p:sp>
-        <p:nvSpPr>
-          <p:cNvPr id="6" name="TextBox 5"/>
-          <p:cNvSpPr txBox="1"/>
-          <p:nvPr/>
-        </p:nvSpPr>
-        <p:spPr>
-          <a:xfrm>
-            <a:off x="731520" y="6309360"/>
-            <a:ext cx="10698480" cy="365760"/>
-          </a:xfrm>
-          <a:prstGeom prst="rect">
-            <a:avLst/>
-          </a:prstGeom>
-          <a:noFill/>
-        </p:spPr>
-        <p:txBody>
-          <a:bodyPr wrap="none">
-            <a:spAutoFit/>
-          </a:bodyPr>
-          <a:lstStyle/>
-          <a:p>
-            <a:pPr>
-              <a:defRPr sz="900">
-                <a:solidFill>
-                  <a:srgbClr val="94A3B8"/>
-                </a:solidFill>
-                <a:latin typeface="Calibri"/>
-              </a:defRPr>
-            </a:pPr>
-            <a:r>
-              <a:t>Q4 2026 Executive Investor Update — Estella Williams · Slide 13 of 16</a:t>
-            </a:r>
-          </a:p>
-        </p:txBody>
-      </p:sp>
-    </p:spTree>
-  </p:cSld>
-  <p:clrMapOvr>
-    <a:masterClrMapping/>
-  </p:clrMapOvr>
-</p:sld>
-</file>
-
-<file path=ppt/slides/slide14.xml><?xml version="1.0" encoding="utf-8"?>
-<p:sld xmlns:a="http://schemas.openxmlformats.org/drawingml/2006/main" xmlns:p="http://schemas.openxmlformats.org/presentationml/2006/main" xmlns:r="http://schemas.openxmlformats.org/officeDocument/2006/relationships">
-  <p:cSld>
-    <p:spTree>
-      <p:nvGrpSpPr>
-        <p:cNvPr id="1" name=""/>
-        <p:cNvGrpSpPr/>
-        <p:nvPr/>
-      </p:nvGrpSpPr>
-      <p:grpSpPr/>
-      <p:sp>
-        <p:nvSpPr>
-          <p:cNvPr id="2" name="Rectangle 1"/>
-          <p:cNvSpPr/>
-          <p:nvPr/>
-        </p:nvSpPr>
-        <p:spPr>
-          <a:xfrm>
-            <a:off x="0" y="0"/>
-            <a:ext cx="12191695" cy="6858000"/>
-          </a:xfrm>
-          <a:prstGeom prst="rect">
-            <a:avLst/>
-          </a:prstGeom>
-          <a:solidFill>
-            <a:srgbClr val="FFFFFF"/>
-          </a:solidFill>
-          <a:ln>
-            <a:noFill/>
-          </a:ln>
-        </p:spPr>
-        <p:style>
-          <a:lnRef idx="1">
-            <a:schemeClr val="accent1"/>
-          </a:lnRef>
-          <a:fillRef idx="3">
-            <a:schemeClr val="accent1"/>
-          </a:fillRef>
-          <a:effectRef idx="2">
-            <a:schemeClr val="accent1"/>
-          </a:effectRef>
-          <a:fontRef idx="minor">
-            <a:schemeClr val="lt1"/>
-          </a:fontRef>
-        </p:style>
-        <p:txBody>
-          <a:bodyPr rtlCol="0" anchor="ctr"/>
-          <a:lstStyle/>
-          <a:p>
-            <a:pPr algn="ctr"/>
-          </a:p>
-        </p:txBody>
-      </p:sp>
-      <p:sp>
-        <p:nvSpPr>
-          <p:cNvPr id="3" name="TextBox 2"/>
-          <p:cNvSpPr txBox="1"/>
-          <p:nvPr/>
-        </p:nvSpPr>
-        <p:spPr>
-          <a:xfrm>
-            <a:off x="731520" y="548640"/>
-            <a:ext cx="10698480" cy="1188720"/>
-          </a:xfrm>
-          <a:prstGeom prst="rect">
-            <a:avLst/>
-          </a:prstGeom>
-          <a:noFill/>
-        </p:spPr>
-        <p:txBody>
-          <a:bodyPr wrap="square">
-            <a:spAutoFit/>
-          </a:bodyPr>
-          <a:lstStyle/>
-          <a:p>
-            <a:pPr>
-              <a:spcAft>
-                <a:spcPts val="400"/>
-              </a:spcAft>
-              <a:defRPr sz="1000" b="1">
-                <a:solidFill>
-                  <a:srgbClr val="2563EB"/>
-                </a:solidFill>
-                <a:latin typeface="Calibri"/>
-              </a:defRPr>
-            </a:pPr>
-            <a:r>
-              <a:t>Q4 2026 EXECUTIVE INVESTOR UPDATE — ESTELLA WILLIA</a:t>
-            </a:r>
-          </a:p>
-          <a:p>
-            <a:pPr>
-              <a:defRPr sz="2200" b="1">
-                <a:solidFill>
-                  <a:srgbClr val="0F172A"/>
-                </a:solidFill>
-                <a:latin typeface="Calibri"/>
-              </a:defRPr>
-            </a:pPr>
-            <a:r>
-              <a:t>Cap Table &amp; Bridge Financing</a:t>
-            </a:r>
-          </a:p>
-          <a:p>
-            <a:pPr>
-              <a:spcBef>
-                <a:spcPts val="200"/>
-              </a:spcBef>
-              <a:defRPr sz="1200">
-                <a:solidFill>
-                  <a:srgbClr val="64748B"/>
-                </a:solidFill>
-                <a:latin typeface="Calibri"/>
-              </a:defRPr>
-            </a:pPr>
-            <a:r>
-              <a:t>Capital Structure Summary</a:t>
-            </a:r>
-          </a:p>
-        </p:txBody>
-      </p:sp>
-      <p:sp>
-        <p:nvSpPr>
-          <p:cNvPr id="4" name="Rectangle 3"/>
-          <p:cNvSpPr/>
-          <p:nvPr/>
-        </p:nvSpPr>
-        <p:spPr>
-          <a:xfrm>
-            <a:off x="731520" y="1737360"/>
-            <a:ext cx="10698480" cy="13716"/>
-          </a:xfrm>
-          <a:prstGeom prst="rect">
-            <a:avLst/>
-          </a:prstGeom>
-          <a:solidFill>
-            <a:srgbClr val="E2E8F0"/>
-          </a:solidFill>
-          <a:ln>
-            <a:noFill/>
-          </a:ln>
-        </p:spPr>
-        <p:style>
-          <a:lnRef idx="1">
-            <a:schemeClr val="accent1"/>
-          </a:lnRef>
-          <a:fillRef idx="3">
-            <a:schemeClr val="accent1"/>
-          </a:fillRef>
-          <a:effectRef idx="2">
-            <a:schemeClr val="accent1"/>
-          </a:effectRef>
-          <a:fontRef idx="minor">
-            <a:schemeClr val="lt1"/>
-          </a:fontRef>
-        </p:style>
-        <p:txBody>
-          <a:bodyPr rtlCol="0" anchor="ctr"/>
-          <a:lstStyle/>
-          <a:p>
-            <a:pPr algn="ctr"/>
-          </a:p>
-        </p:txBody>
-      </p:sp>
-      <p:sp>
-        <p:nvSpPr>
-          <p:cNvPr id="5" name="TextBox 4"/>
-          <p:cNvSpPr txBox="1"/>
-          <p:nvPr/>
-        </p:nvSpPr>
-        <p:spPr>
-          <a:xfrm>
-            <a:off x="731520" y="2011680"/>
-            <a:ext cx="10698480" cy="4114800"/>
-          </a:xfrm>
-          <a:prstGeom prst="rect">
-            <a:avLst/>
-          </a:prstGeom>
-          <a:noFill/>
-        </p:spPr>
-        <p:txBody>
-          <a:bodyPr wrap="square">
-            <a:spAutoFit/>
-          </a:bodyPr>
-          <a:lstStyle/>
-          <a:p>
-            <a:pPr>
-              <a:lnSpc>
-                <a:spcPct val="125000"/>
-              </a:lnSpc>
-              <a:spcAft>
-                <a:spcPts val="1400"/>
-              </a:spcAft>
-              <a:defRPr sz="1500">
-                <a:solidFill>
-                  <a:srgbClr val="1E293B"/>
-                </a:solidFill>
-                <a:latin typeface="Calibri"/>
-              </a:defRPr>
-            </a:pPr>
-            <a:r>
-              <a:t>•  Founders &amp; Common Stock: 68.4% fully diluted</a:t>
-            </a:r>
-          </a:p>
-          <a:p>
-            <a:pPr>
-              <a:lnSpc>
-                <a:spcPct val="125000"/>
-              </a:lnSpc>
-              <a:spcAft>
-                <a:spcPts val="1400"/>
-              </a:spcAft>
-              <a:defRPr sz="1500">
-                <a:solidFill>
-                  <a:srgbClr val="1E293B"/>
-                </a:solidFill>
-                <a:latin typeface="Calibri"/>
-              </a:defRPr>
-            </a:pPr>
-            <a:r>
-              <a:t>•  Series Seed Investors: 18.2% (SAFE notes converted)</a:t>
-            </a:r>
-          </a:p>
-          <a:p>
-            <a:pPr>
-              <a:lnSpc>
-                <a:spcPct val="125000"/>
-              </a:lnSpc>
-              <a:spcAft>
-                <a:spcPts val="1400"/>
-              </a:spcAft>
-              <a:defRPr sz="1500">
-                <a:solidFill>
-                  <a:srgbClr val="1E293B"/>
-                </a:solidFill>
-                <a:latin typeface="Calibri"/>
-              </a:defRPr>
-            </a:pPr>
-            <a:r>
-              <a:t>•  Unallocated Option Pool: 13.4% reserved for key technical hires</a:t>
-            </a:r>
-          </a:p>
-          <a:p>
-            <a:pPr>
-              <a:lnSpc>
-                <a:spcPct val="125000"/>
-              </a:lnSpc>
-              <a:spcAft>
-                <a:spcPts val="1400"/>
-              </a:spcAft>
-              <a:defRPr sz="1500">
-                <a:solidFill>
-                  <a:srgbClr val="1E293B"/>
-                </a:solidFill>
-                <a:latin typeface="Calibri"/>
-              </a:defRPr>
-            </a:pPr>
-            <a:r>
-              <a:t>•  Bridge Financing: $150K strategic working capital tranche settled Oct 2026</a:t>
-            </a:r>
-          </a:p>
-        </p:txBody>
-      </p:sp>
-      <p:sp>
-        <p:nvSpPr>
-          <p:cNvPr id="6" name="TextBox 5"/>
-          <p:cNvSpPr txBox="1"/>
-          <p:nvPr/>
-        </p:nvSpPr>
-        <p:spPr>
-          <a:xfrm>
-            <a:off x="731520" y="6309360"/>
-            <a:ext cx="10698480" cy="365760"/>
-          </a:xfrm>
-          <a:prstGeom prst="rect">
-            <a:avLst/>
-          </a:prstGeom>
-          <a:noFill/>
-        </p:spPr>
-        <p:txBody>
-          <a:bodyPr wrap="none">
-            <a:spAutoFit/>
-          </a:bodyPr>
-          <a:lstStyle/>
-          <a:p>
-            <a:pPr>
-              <a:defRPr sz="900">
-                <a:solidFill>
-                  <a:srgbClr val="94A3B8"/>
-                </a:solidFill>
-                <a:latin typeface="Calibri"/>
-              </a:defRPr>
-            </a:pPr>
-            <a:r>
-              <a:t>Q4 2026 Executive Investor Update — Estella Williams · Slide 14 of 16</a:t>
-            </a:r>
-          </a:p>
-        </p:txBody>
-      </p:sp>
-    </p:spTree>
-  </p:cSld>
-  <p:clrMapOvr>
-    <a:masterClrMapping/>
-  </p:clrMapOvr>
-</p:sld>
-</file>
-
-<file path=ppt/slides/slide15.xml><?xml version="1.0" encoding="utf-8"?>
-<p:sld xmlns:a="http://schemas.openxmlformats.org/drawingml/2006/main" xmlns:p="http://schemas.openxmlformats.org/presentationml/2006/main" xmlns:r="http://schemas.openxmlformats.org/officeDocument/2006/relationships">
-  <p:cSld>
-    <p:spTree>
-      <p:nvGrpSpPr>
-        <p:cNvPr id="1" name=""/>
-        <p:cNvGrpSpPr/>
-        <p:nvPr/>
-      </p:nvGrpSpPr>
-      <p:grpSpPr/>
-      <p:sp>
-        <p:nvSpPr>
-          <p:cNvPr id="2" name="Rectangle 1"/>
-          <p:cNvSpPr/>
-          <p:nvPr/>
-        </p:nvSpPr>
-        <p:spPr>
-          <a:xfrm>
-            <a:off x="0" y="0"/>
-            <a:ext cx="12191695" cy="6858000"/>
-          </a:xfrm>
-          <a:prstGeom prst="rect">
-            <a:avLst/>
-          </a:prstGeom>
-          <a:solidFill>
-            <a:srgbClr val="FFFFFF"/>
-          </a:solidFill>
-          <a:ln>
-            <a:noFill/>
-          </a:ln>
-        </p:spPr>
-        <p:style>
-          <a:lnRef idx="1">
-            <a:schemeClr val="accent1"/>
-          </a:lnRef>
-          <a:fillRef idx="3">
-            <a:schemeClr val="accent1"/>
-          </a:fillRef>
-          <a:effectRef idx="2">
-            <a:schemeClr val="accent1"/>
-          </a:effectRef>
-          <a:fontRef idx="minor">
-            <a:schemeClr val="lt1"/>
-          </a:fontRef>
-        </p:style>
-        <p:txBody>
-          <a:bodyPr rtlCol="0" anchor="ctr"/>
-          <a:lstStyle/>
-          <a:p>
-            <a:pPr algn="ctr"/>
-          </a:p>
-        </p:txBody>
-      </p:sp>
-      <p:sp>
-        <p:nvSpPr>
-          <p:cNvPr id="3" name="TextBox 2"/>
-          <p:cNvSpPr txBox="1"/>
-          <p:nvPr/>
-        </p:nvSpPr>
-        <p:spPr>
-          <a:xfrm>
-            <a:off x="731520" y="548640"/>
-            <a:ext cx="10698480" cy="1188720"/>
-          </a:xfrm>
-          <a:prstGeom prst="rect">
-            <a:avLst/>
-          </a:prstGeom>
-          <a:noFill/>
-        </p:spPr>
-        <p:txBody>
-          <a:bodyPr wrap="square">
-            <a:spAutoFit/>
-          </a:bodyPr>
-          <a:lstStyle/>
-          <a:p>
-            <a:pPr>
-              <a:spcAft>
-                <a:spcPts val="400"/>
-              </a:spcAft>
-              <a:defRPr sz="1000" b="1">
-                <a:solidFill>
-                  <a:srgbClr val="2563EB"/>
-                </a:solidFill>
-                <a:latin typeface="Calibri"/>
-              </a:defRPr>
-            </a:pPr>
-            <a:r>
-              <a:t>Q4 2026 EXECUTIVE INVESTOR UPDATE — ESTELLA WILLIA</a:t>
-            </a:r>
-          </a:p>
-          <a:p>
-            <a:pPr>
-              <a:defRPr sz="2200" b="1">
-                <a:solidFill>
-                  <a:srgbClr val="0F172A"/>
-                </a:solidFill>
-                <a:latin typeface="Calibri"/>
-              </a:defRPr>
-            </a:pPr>
-            <a:r>
-              <a:t>Strategic Priorities for Q1 2027</a:t>
-            </a:r>
-          </a:p>
-          <a:p>
-            <a:pPr>
-              <a:spcBef>
-                <a:spcPts val="200"/>
-              </a:spcBef>
-              <a:defRPr sz="1200">
-                <a:solidFill>
-                  <a:srgbClr val="64748B"/>
-                </a:solidFill>
-                <a:latin typeface="Calibri"/>
-              </a:defRPr>
-            </a:pPr>
-            <a:r>
-              <a:t>Execution Milestones</a:t>
-            </a:r>
-          </a:p>
-        </p:txBody>
-      </p:sp>
-      <p:sp>
-        <p:nvSpPr>
-          <p:cNvPr id="4" name="Rectangle 3"/>
-          <p:cNvSpPr/>
-          <p:nvPr/>
-        </p:nvSpPr>
-        <p:spPr>
-          <a:xfrm>
-            <a:off x="731520" y="1737360"/>
-            <a:ext cx="10698480" cy="13716"/>
-          </a:xfrm>
-          <a:prstGeom prst="rect">
-            <a:avLst/>
-          </a:prstGeom>
-          <a:solidFill>
-            <a:srgbClr val="E2E8F0"/>
-          </a:solidFill>
-          <a:ln>
-            <a:noFill/>
-          </a:ln>
-        </p:spPr>
-        <p:style>
-          <a:lnRef idx="1">
-            <a:schemeClr val="accent1"/>
-          </a:lnRef>
-          <a:fillRef idx="3">
-            <a:schemeClr val="accent1"/>
-          </a:fillRef>
-          <a:effectRef idx="2">
-            <a:schemeClr val="accent1"/>
-          </a:effectRef>
-          <a:fontRef idx="minor">
-            <a:schemeClr val="lt1"/>
-          </a:fontRef>
-        </p:style>
-        <p:txBody>
-          <a:bodyPr rtlCol="0" anchor="ctr"/>
-          <a:lstStyle/>
-          <a:p>
-            <a:pPr algn="ctr"/>
-          </a:p>
-        </p:txBody>
-      </p:sp>
-      <p:sp>
-        <p:nvSpPr>
-          <p:cNvPr id="5" name="TextBox 4"/>
-          <p:cNvSpPr txBox="1"/>
-          <p:nvPr/>
-        </p:nvSpPr>
-        <p:spPr>
-          <a:xfrm>
-            <a:off x="731520" y="2011680"/>
-            <a:ext cx="10698480" cy="4114800"/>
-          </a:xfrm>
-          <a:prstGeom prst="rect">
-            <a:avLst/>
-          </a:prstGeom>
-          <a:noFill/>
-        </p:spPr>
-        <p:txBody>
-          <a:bodyPr wrap="square">
-            <a:spAutoFit/>
-          </a:bodyPr>
-          <a:lstStyle/>
-          <a:p>
-            <a:pPr>
-              <a:lnSpc>
-                <a:spcPct val="125000"/>
-              </a:lnSpc>
-              <a:spcAft>
-                <a:spcPts val="1400"/>
-              </a:spcAft>
-              <a:defRPr sz="1500">
-                <a:solidFill>
-                  <a:srgbClr val="1E293B"/>
-                </a:solidFill>
-                <a:latin typeface="Calibri"/>
-              </a:defRPr>
-            </a:pPr>
-            <a:r>
-              <a:t>•  Scale enterprise terminal count from 65 to 110 facilities</a:t>
-            </a:r>
-          </a:p>
-          <a:p>
-            <a:pPr>
-              <a:lnSpc>
-                <a:spcPct val="125000"/>
-              </a:lnSpc>
-              <a:spcAft>
-                <a:spcPts val="1400"/>
-              </a:spcAft>
-              <a:defRPr sz="1500">
-                <a:solidFill>
-                  <a:srgbClr val="1E293B"/>
-                </a:solidFill>
-                <a:latin typeface="Calibri"/>
-              </a:defRPr>
-            </a:pPr>
-            <a:r>
-              <a:t>•  Complete SAP PartnerEdge certification for direct marketplace listing</a:t>
-            </a:r>
-          </a:p>
-          <a:p>
-            <a:pPr>
-              <a:lnSpc>
-                <a:spcPct val="125000"/>
-              </a:lnSpc>
-              <a:spcAft>
-                <a:spcPts val="1400"/>
-              </a:spcAft>
-              <a:defRPr sz="1500">
-                <a:solidFill>
-                  <a:srgbClr val="1E293B"/>
-                </a:solidFill>
-                <a:latin typeface="Calibri"/>
-              </a:defRPr>
-            </a:pPr>
-            <a:r>
-              <a:t>•  Launch automated driver detention compensation dispute module</a:t>
-            </a:r>
-          </a:p>
-          <a:p>
-            <a:pPr>
-              <a:lnSpc>
-                <a:spcPct val="125000"/>
-              </a:lnSpc>
-              <a:spcAft>
-                <a:spcPts val="1400"/>
-              </a:spcAft>
-              <a:defRPr sz="1500">
-                <a:solidFill>
-                  <a:srgbClr val="1E293B"/>
-                </a:solidFill>
-                <a:latin typeface="Calibri"/>
-              </a:defRPr>
-            </a:pPr>
-            <a:r>
-              <a:t>•  Target ARR: $5.6M with gross margin surpassing 79%</a:t>
-            </a:r>
-          </a:p>
-        </p:txBody>
-      </p:sp>
-      <p:sp>
-        <p:nvSpPr>
-          <p:cNvPr id="6" name="TextBox 5"/>
-          <p:cNvSpPr txBox="1"/>
-          <p:nvPr/>
-        </p:nvSpPr>
-        <p:spPr>
-          <a:xfrm>
-            <a:off x="731520" y="6309360"/>
-            <a:ext cx="10698480" cy="365760"/>
-          </a:xfrm>
-          <a:prstGeom prst="rect">
-            <a:avLst/>
-          </a:prstGeom>
-          <a:noFill/>
-        </p:spPr>
-        <p:txBody>
-          <a:bodyPr wrap="none">
-            <a:spAutoFit/>
-          </a:bodyPr>
-          <a:lstStyle/>
-          <a:p>
-            <a:pPr>
-              <a:defRPr sz="900">
-                <a:solidFill>
-                  <a:srgbClr val="94A3B8"/>
-                </a:solidFill>
-                <a:latin typeface="Calibri"/>
-              </a:defRPr>
-            </a:pPr>
-            <a:r>
-              <a:t>Q4 2026 Executive Investor Update — Estella Williams · Slide 15 of 16</a:t>
-            </a:r>
-          </a:p>
-        </p:txBody>
-      </p:sp>
-    </p:spTree>
-  </p:cSld>
-  <p:clrMapOvr>
-    <a:masterClrMapping/>
-  </p:clrMapOvr>
-</p:sld>
-</file>
-
-<file path=ppt/slides/slide16.xml><?xml version="1.0" encoding="utf-8"?>
-<p:sld xmlns:a="http://schemas.openxmlformats.org/drawingml/2006/main" xmlns:p="http://schemas.openxmlformats.org/presentationml/2006/main" xmlns:r="http://schemas.openxmlformats.org/officeDocument/2006/relationships">
-  <p:cSld>
-    <p:spTree>
-      <p:nvGrpSpPr>
-        <p:cNvPr id="1" name=""/>
-        <p:cNvGrpSpPr/>
-        <p:nvPr/>
-      </p:nvGrpSpPr>
-      <p:grpSpPr/>
-      <p:sp>
-        <p:nvSpPr>
-          <p:cNvPr id="2" name="Rectangle 1"/>
-          <p:cNvSpPr/>
-          <p:nvPr/>
-        </p:nvSpPr>
-        <p:spPr>
-          <a:xfrm>
-            <a:off x="0" y="0"/>
-            <a:ext cx="12191695" cy="6858000"/>
-          </a:xfrm>
-          <a:prstGeom prst="rect">
-            <a:avLst/>
-          </a:prstGeom>
-          <a:solidFill>
-            <a:srgbClr val="FFFFFF"/>
-          </a:solidFill>
-          <a:ln>
-            <a:noFill/>
-          </a:ln>
-        </p:spPr>
-        <p:style>
-          <a:lnRef idx="1">
-            <a:schemeClr val="accent1"/>
-          </a:lnRef>
-          <a:fillRef idx="3">
-            <a:schemeClr val="accent1"/>
-          </a:fillRef>
-          <a:effectRef idx="2">
-            <a:schemeClr val="accent1"/>
-          </a:effectRef>
-          <a:fontRef idx="minor">
-            <a:schemeClr val="lt1"/>
-          </a:fontRef>
-        </p:style>
-        <p:txBody>
-          <a:bodyPr rtlCol="0" anchor="ctr"/>
-          <a:lstStyle/>
-          <a:p>
-            <a:pPr algn="ctr"/>
-          </a:p>
-        </p:txBody>
-      </p:sp>
-      <p:sp>
-        <p:nvSpPr>
-          <p:cNvPr id="3" name="TextBox 2"/>
-          <p:cNvSpPr txBox="1"/>
-          <p:nvPr/>
-        </p:nvSpPr>
-        <p:spPr>
-          <a:xfrm>
-            <a:off x="731520" y="548640"/>
-            <a:ext cx="10698480" cy="1188720"/>
-          </a:xfrm>
-          <a:prstGeom prst="rect">
-            <a:avLst/>
-          </a:prstGeom>
-          <a:noFill/>
-        </p:spPr>
-        <p:txBody>
-          <a:bodyPr wrap="square">
-            <a:spAutoFit/>
-          </a:bodyPr>
-          <a:lstStyle/>
-          <a:p>
-            <a:pPr>
-              <a:spcAft>
-                <a:spcPts val="400"/>
-              </a:spcAft>
-              <a:defRPr sz="1000" b="1">
-                <a:solidFill>
-                  <a:srgbClr val="2563EB"/>
-                </a:solidFill>
-                <a:latin typeface="Calibri"/>
-              </a:defRPr>
-            </a:pPr>
-            <a:r>
-              <a:t>Q4 2026 EXECUTIVE INVESTOR UPDATE — ESTELLA WILLIA</a:t>
-            </a:r>
-          </a:p>
-          <a:p>
-            <a:pPr>
-              <a:defRPr sz="2200" b="1">
-                <a:solidFill>
-                  <a:srgbClr val="0F172A"/>
-                </a:solidFill>
-                <a:latin typeface="Calibri"/>
-              </a:defRPr>
-            </a:pPr>
-            <a:r>
-              <a:t>Board Resolution &amp; Next Steps</a:t>
-            </a:r>
-          </a:p>
-          <a:p>
-            <a:pPr>
-              <a:spcBef>
-                <a:spcPts val="200"/>
-              </a:spcBef>
-              <a:defRPr sz="1200">
-                <a:solidFill>
-                  <a:srgbClr val="64748B"/>
-                </a:solidFill>
-                <a:latin typeface="Calibri"/>
-              </a:defRPr>
-            </a:pPr>
-            <a:r>
-              <a:t>Items for Board Vote</a:t>
-            </a:r>
-          </a:p>
-        </p:txBody>
-      </p:sp>
-      <p:sp>
-        <p:nvSpPr>
-          <p:cNvPr id="4" name="Rectangle 3"/>
-          <p:cNvSpPr/>
-          <p:nvPr/>
-        </p:nvSpPr>
-        <p:spPr>
-          <a:xfrm>
-            <a:off x="731520" y="1737360"/>
-            <a:ext cx="10698480" cy="13716"/>
-          </a:xfrm>
-          <a:prstGeom prst="rect">
-            <a:avLst/>
-          </a:prstGeom>
-          <a:solidFill>
-            <a:srgbClr val="E2E8F0"/>
-          </a:solidFill>
-          <a:ln>
-            <a:noFill/>
-          </a:ln>
-        </p:spPr>
-        <p:style>
-          <a:lnRef idx="1">
-            <a:schemeClr val="accent1"/>
-          </a:lnRef>
-          <a:fillRef idx="3">
-            <a:schemeClr val="accent1"/>
-          </a:fillRef>
-          <a:effectRef idx="2">
-            <a:schemeClr val="accent1"/>
-          </a:effectRef>
-          <a:fontRef idx="minor">
-            <a:schemeClr val="lt1"/>
-          </a:fontRef>
-        </p:style>
-        <p:txBody>
-          <a:bodyPr rtlCol="0" anchor="ctr"/>
-          <a:lstStyle/>
-          <a:p>
-            <a:pPr algn="ctr"/>
-          </a:p>
-        </p:txBody>
-      </p:sp>
-      <p:sp>
-        <p:nvSpPr>
-          <p:cNvPr id="5" name="TextBox 4"/>
-          <p:cNvSpPr txBox="1"/>
-          <p:nvPr/>
-        </p:nvSpPr>
-        <p:spPr>
-          <a:xfrm>
-            <a:off x="731520" y="2011680"/>
-            <a:ext cx="10698480" cy="4114800"/>
-          </a:xfrm>
-          <a:prstGeom prst="rect">
-            <a:avLst/>
-          </a:prstGeom>
-          <a:noFill/>
-        </p:spPr>
-        <p:txBody>
-          <a:bodyPr wrap="square">
-            <a:spAutoFit/>
-          </a:bodyPr>
-          <a:lstStyle/>
-          <a:p>
-            <a:pPr>
-              <a:lnSpc>
-                <a:spcPct val="125000"/>
-              </a:lnSpc>
-              <a:spcAft>
-                <a:spcPts val="1400"/>
-              </a:spcAft>
-              <a:defRPr sz="1500">
-                <a:solidFill>
-                  <a:srgbClr val="1E293B"/>
-                </a:solidFill>
-                <a:latin typeface="Calibri"/>
-              </a:defRPr>
-            </a:pPr>
-            <a:r>
-              <a:t>•  Approval of 2027 Annual Operating Plan and Gated Headcount Budget</a:t>
-            </a:r>
-          </a:p>
-          <a:p>
-            <a:pPr>
-              <a:lnSpc>
-                <a:spcPct val="125000"/>
-              </a:lnSpc>
-              <a:spcAft>
-                <a:spcPts val="1400"/>
-              </a:spcAft>
-              <a:defRPr sz="1500">
-                <a:solidFill>
-                  <a:srgbClr val="1E293B"/>
-                </a:solidFill>
-                <a:latin typeface="Calibri"/>
-              </a:defRPr>
-            </a:pPr>
-            <a:r>
-              <a:t>•  Authorization of expanded 15% equity incentive pool for engineering leads</a:t>
-            </a:r>
-          </a:p>
-          <a:p>
-            <a:pPr>
-              <a:lnSpc>
-                <a:spcPct val="125000"/>
-              </a:lnSpc>
-              <a:spcAft>
-                <a:spcPts val="1400"/>
-              </a:spcAft>
-              <a:defRPr sz="1500">
-                <a:solidFill>
-                  <a:srgbClr val="1E293B"/>
-                </a:solidFill>
-                <a:latin typeface="Calibri"/>
-              </a:defRPr>
-            </a:pPr>
-            <a:r>
-              <a:t>•  Scheduling of Q1 Board Meeting for Thursday, February 18, 2027</a:t>
-            </a:r>
-          </a:p>
-          <a:p>
-            <a:pPr>
-              <a:lnSpc>
-                <a:spcPct val="125000"/>
-              </a:lnSpc>
-              <a:spcAft>
-                <a:spcPts val="1400"/>
-              </a:spcAft>
-              <a:defRPr sz="1500">
-                <a:solidFill>
-                  <a:srgbClr val="1E293B"/>
-                </a:solidFill>
-                <a:latin typeface="Calibri"/>
-              </a:defRPr>
-            </a:pPr>
-            <a:r>
-              <a:t>•  Direct Contact: Estella Williams (estella@infiniai.online)</a:t>
-            </a:r>
-          </a:p>
-        </p:txBody>
-      </p:sp>
-      <p:sp>
-        <p:nvSpPr>
-          <p:cNvPr id="6" name="TextBox 5"/>
-          <p:cNvSpPr txBox="1"/>
-          <p:nvPr/>
-        </p:nvSpPr>
-        <p:spPr>
-          <a:xfrm>
-            <a:off x="731520" y="6309360"/>
-            <a:ext cx="10698480" cy="365760"/>
-          </a:xfrm>
-          <a:prstGeom prst="rect">
-            <a:avLst/>
-          </a:prstGeom>
-          <a:noFill/>
-        </p:spPr>
-        <p:txBody>
-          <a:bodyPr wrap="none">
-            <a:spAutoFit/>
-          </a:bodyPr>
-          <a:lstStyle/>
-          <a:p>
-            <a:pPr>
-              <a:defRPr sz="900">
-                <a:solidFill>
-                  <a:srgbClr val="94A3B8"/>
-                </a:solidFill>
-                <a:latin typeface="Calibri"/>
-              </a:defRPr>
-            </a:pPr>
-            <a:r>
-              <a:t>Q4 2026 Executive Investor Update — Estella Williams · Slide 16 of 16</a:t>
+              <a:t>Operating Across 180 Active Terminals in Texas, Midwest &amp; Gulf Corridors</a:t>
             </a:r>
           </a:p>
         </p:txBody>
@@ -5493,7 +3335,7 @@
               </a:defRPr>
             </a:pPr>
             <a:r>
-              <a:t>Q4 2026 EXECUTIVE INVESTOR UPDATE — ESTELLA WILLIA</a:t>
+              <a:t>OPERATING HIGHLIGHTS</a:t>
             </a:r>
           </a:p>
           <a:p>
@@ -5506,7 +3348,7 @@
               </a:defRPr>
             </a:pPr>
             <a:r>
-              <a:t>Executive Summary &amp; Q3 Highlights</a:t>
+              <a:t>Q3 2026 Executive Performance Dashboard</a:t>
             </a:r>
           </a:p>
           <a:p>
@@ -5522,7 +3364,7 @@
               </a:defRPr>
             </a:pPr>
             <a:r>
-              <a:t>Accelerating Enterprise Terminal Adoption</a:t>
+              <a:t>Accelerating enterprise adoption, expanding terminal velocity, and zero logo attrition</a:t>
             </a:r>
           </a:p>
         </p:txBody>
@@ -5572,14 +3414,59 @@
       </p:sp>
       <p:sp>
         <p:nvSpPr>
-          <p:cNvPr id="5" name="TextBox 4"/>
+          <p:cNvPr id="5" name="Rounded Rectangle 4"/>
+          <p:cNvSpPr/>
+          <p:nvPr/>
+        </p:nvSpPr>
+        <p:spPr>
+          <a:xfrm>
+            <a:off x="731520" y="1920240"/>
+            <a:ext cx="2468880" cy="4114800"/>
+          </a:xfrm>
+          <a:prstGeom prst="roundRect">
+            <a:avLst/>
+          </a:prstGeom>
+          <a:solidFill>
+            <a:srgbClr val="F8FAFC"/>
+          </a:solidFill>
+          <a:ln w="12700">
+            <a:solidFill>
+              <a:srgbClr val="CBD5E1"/>
+            </a:solidFill>
+          </a:ln>
+        </p:spPr>
+        <p:style>
+          <a:lnRef idx="1">
+            <a:schemeClr val="accent1"/>
+          </a:lnRef>
+          <a:fillRef idx="3">
+            <a:schemeClr val="accent1"/>
+          </a:fillRef>
+          <a:effectRef idx="2">
+            <a:schemeClr val="accent1"/>
+          </a:effectRef>
+          <a:fontRef idx="minor">
+            <a:schemeClr val="lt1"/>
+          </a:fontRef>
+        </p:style>
+        <p:txBody>
+          <a:bodyPr rtlCol="0" anchor="ctr"/>
+          <a:lstStyle/>
+          <a:p>
+            <a:pPr algn="ctr"/>
+          </a:p>
+        </p:txBody>
+      </p:sp>
+      <p:sp>
+        <p:nvSpPr>
+          <p:cNvPr id="6" name="TextBox 5"/>
           <p:cNvSpPr txBox="1"/>
           <p:nvPr/>
         </p:nvSpPr>
         <p:spPr>
           <a:xfrm>
-            <a:off x="731520" y="2011680"/>
-            <a:ext cx="10698480" cy="4114800"/>
+            <a:off x="1005840" y="2286000"/>
+            <a:ext cx="1920240" cy="3383280"/>
           </a:xfrm>
           <a:prstGeom prst="rect">
             <a:avLst/>
@@ -5593,92 +3480,106 @@
           <a:lstStyle/>
           <a:p>
             <a:pPr>
-              <a:lnSpc>
-                <a:spcPct val="125000"/>
-              </a:lnSpc>
               <a:spcAft>
-                <a:spcPts val="1400"/>
+                <a:spcPts val="1000"/>
               </a:spcAft>
-              <a:defRPr sz="1500">
-                <a:solidFill>
-                  <a:srgbClr val="1E293B"/>
-                </a:solidFill>
-                <a:latin typeface="Calibri"/>
-              </a:defRPr>
-            </a:pPr>
-            <a:r>
-              <a:t>•  $4.2M Current Annual Recurring Revenue (+18% QoQ expansion)</a:t>
-            </a:r>
-          </a:p>
-          <a:p>
-            <a:pPr>
-              <a:lnSpc>
-                <a:spcPct val="125000"/>
-              </a:lnSpc>
+              <a:defRPr sz="3600" b="1">
+                <a:solidFill>
+                  <a:srgbClr val="2563EB"/>
+                </a:solidFill>
+                <a:latin typeface="Calibri"/>
+              </a:defRPr>
+            </a:pPr>
+            <a:r>
+              <a:t>$4.2M</a:t>
+            </a:r>
+          </a:p>
+          <a:p>
+            <a:pPr>
               <a:spcAft>
-                <a:spcPts val="1400"/>
+                <a:spcPts val="800"/>
               </a:spcAft>
-              <a:defRPr sz="1500">
-                <a:solidFill>
-                  <a:srgbClr val="1E293B"/>
-                </a:solidFill>
-                <a:latin typeface="Calibri"/>
-              </a:defRPr>
-            </a:pPr>
-            <a:r>
-              <a:t>•  114% Net Revenue Retention across mid-market enterprise carrier tier</a:t>
-            </a:r>
-          </a:p>
-          <a:p>
-            <a:pPr>
-              <a:lnSpc>
-                <a:spcPct val="125000"/>
-              </a:lnSpc>
-              <a:spcAft>
-                <a:spcPts val="1400"/>
-              </a:spcAft>
-              <a:defRPr sz="1500">
-                <a:solidFill>
-                  <a:srgbClr val="1E293B"/>
-                </a:solidFill>
-                <a:latin typeface="Calibri"/>
-              </a:defRPr>
-            </a:pPr>
-            <a:r>
-              <a:t>•  Gross margin expanded to 77.2% through automated infrastructure scaling</a:t>
-            </a:r>
-          </a:p>
-          <a:p>
-            <a:pPr>
-              <a:lnSpc>
-                <a:spcPct val="125000"/>
-              </a:lnSpc>
-              <a:spcAft>
-                <a:spcPts val="1400"/>
-              </a:spcAft>
-              <a:defRPr sz="1500">
-                <a:solidFill>
-                  <a:srgbClr val="1E293B"/>
-                </a:solidFill>
-                <a:latin typeface="Calibri"/>
-              </a:defRPr>
-            </a:pPr>
-            <a:r>
-              <a:t>•  Net monthly burn reduced to $94K with 18.2-month cash runway</a:t>
-            </a:r>
-          </a:p>
-        </p:txBody>
-      </p:sp>
-      <p:sp>
-        <p:nvSpPr>
-          <p:cNvPr id="6" name="TextBox 5"/>
+              <a:defRPr sz="1400" b="1">
+                <a:solidFill>
+                  <a:srgbClr val="0F172A"/>
+                </a:solidFill>
+                <a:latin typeface="Calibri"/>
+              </a:defRPr>
+            </a:pPr>
+            <a:r>
+              <a:t>Current ARR</a:t>
+            </a:r>
+          </a:p>
+          <a:p>
+            <a:pPr>
+              <a:defRPr sz="1100">
+                <a:solidFill>
+                  <a:srgbClr val="64748B"/>
+                </a:solidFill>
+                <a:latin typeface="Calibri"/>
+              </a:defRPr>
+            </a:pPr>
+            <a:r>
+              <a:t>+18% QoQ expansion across 180 active terminals</a:t>
+            </a:r>
+          </a:p>
+        </p:txBody>
+      </p:sp>
+      <p:sp>
+        <p:nvSpPr>
+          <p:cNvPr id="7" name="Rounded Rectangle 6"/>
+          <p:cNvSpPr/>
+          <p:nvPr/>
+        </p:nvSpPr>
+        <p:spPr>
+          <a:xfrm>
+            <a:off x="3474720" y="1920240"/>
+            <a:ext cx="2468880" cy="4114800"/>
+          </a:xfrm>
+          <a:prstGeom prst="roundRect">
+            <a:avLst/>
+          </a:prstGeom>
+          <a:solidFill>
+            <a:srgbClr val="F8FAFC"/>
+          </a:solidFill>
+          <a:ln w="12700">
+            <a:solidFill>
+              <a:srgbClr val="CBD5E1"/>
+            </a:solidFill>
+          </a:ln>
+        </p:spPr>
+        <p:style>
+          <a:lnRef idx="1">
+            <a:schemeClr val="accent1"/>
+          </a:lnRef>
+          <a:fillRef idx="3">
+            <a:schemeClr val="accent1"/>
+          </a:fillRef>
+          <a:effectRef idx="2">
+            <a:schemeClr val="accent1"/>
+          </a:effectRef>
+          <a:fontRef idx="minor">
+            <a:schemeClr val="lt1"/>
+          </a:fontRef>
+        </p:style>
+        <p:txBody>
+          <a:bodyPr rtlCol="0" anchor="ctr"/>
+          <a:lstStyle/>
+          <a:p>
+            <a:pPr algn="ctr"/>
+          </a:p>
+        </p:txBody>
+      </p:sp>
+      <p:sp>
+        <p:nvSpPr>
+          <p:cNvPr id="8" name="TextBox 7"/>
           <p:cNvSpPr txBox="1"/>
           <p:nvPr/>
         </p:nvSpPr>
         <p:spPr>
           <a:xfrm>
-            <a:off x="731520" y="6309360"/>
-            <a:ext cx="10698480" cy="365760"/>
+            <a:off x="3749040" y="2286000"/>
+            <a:ext cx="1920240" cy="3383280"/>
           </a:xfrm>
           <a:prstGeom prst="rect">
             <a:avLst/>
@@ -5686,6 +3587,300 @@
           <a:noFill/>
         </p:spPr>
         <p:txBody>
+          <a:bodyPr wrap="square">
+            <a:spAutoFit/>
+          </a:bodyPr>
+          <a:lstStyle/>
+          <a:p>
+            <a:pPr>
+              <a:spcAft>
+                <a:spcPts val="1000"/>
+              </a:spcAft>
+              <a:defRPr sz="3600" b="1">
+                <a:solidFill>
+                  <a:srgbClr val="2563EB"/>
+                </a:solidFill>
+                <a:latin typeface="Calibri"/>
+              </a:defRPr>
+            </a:pPr>
+            <a:r>
+              <a:t>114%</a:t>
+            </a:r>
+          </a:p>
+          <a:p>
+            <a:pPr>
+              <a:spcAft>
+                <a:spcPts val="800"/>
+              </a:spcAft>
+              <a:defRPr sz="1400" b="1">
+                <a:solidFill>
+                  <a:srgbClr val="0F172A"/>
+                </a:solidFill>
+                <a:latin typeface="Calibri"/>
+              </a:defRPr>
+            </a:pPr>
+            <a:r>
+              <a:t>Net Revenue Retention</a:t>
+            </a:r>
+          </a:p>
+          <a:p>
+            <a:pPr>
+              <a:defRPr sz="1100">
+                <a:solidFill>
+                  <a:srgbClr val="64748B"/>
+                </a:solidFill>
+                <a:latin typeface="Calibri"/>
+              </a:defRPr>
+            </a:pPr>
+            <a:r>
+              <a:t>Driven by volumetric dockdoor throughput tiers</a:t>
+            </a:r>
+          </a:p>
+        </p:txBody>
+      </p:sp>
+      <p:sp>
+        <p:nvSpPr>
+          <p:cNvPr id="9" name="Rounded Rectangle 8"/>
+          <p:cNvSpPr/>
+          <p:nvPr/>
+        </p:nvSpPr>
+        <p:spPr>
+          <a:xfrm>
+            <a:off x="6217920" y="1920240"/>
+            <a:ext cx="2468880" cy="4114800"/>
+          </a:xfrm>
+          <a:prstGeom prst="roundRect">
+            <a:avLst/>
+          </a:prstGeom>
+          <a:solidFill>
+            <a:srgbClr val="F8FAFC"/>
+          </a:solidFill>
+          <a:ln w="12700">
+            <a:solidFill>
+              <a:srgbClr val="CBD5E1"/>
+            </a:solidFill>
+          </a:ln>
+        </p:spPr>
+        <p:style>
+          <a:lnRef idx="1">
+            <a:schemeClr val="accent1"/>
+          </a:lnRef>
+          <a:fillRef idx="3">
+            <a:schemeClr val="accent1"/>
+          </a:fillRef>
+          <a:effectRef idx="2">
+            <a:schemeClr val="accent1"/>
+          </a:effectRef>
+          <a:fontRef idx="minor">
+            <a:schemeClr val="lt1"/>
+          </a:fontRef>
+        </p:style>
+        <p:txBody>
+          <a:bodyPr rtlCol="0" anchor="ctr"/>
+          <a:lstStyle/>
+          <a:p>
+            <a:pPr algn="ctr"/>
+          </a:p>
+        </p:txBody>
+      </p:sp>
+      <p:sp>
+        <p:nvSpPr>
+          <p:cNvPr id="10" name="TextBox 9"/>
+          <p:cNvSpPr txBox="1"/>
+          <p:nvPr/>
+        </p:nvSpPr>
+        <p:spPr>
+          <a:xfrm>
+            <a:off x="6492240" y="2286000"/>
+            <a:ext cx="1920240" cy="3383280"/>
+          </a:xfrm>
+          <a:prstGeom prst="rect">
+            <a:avLst/>
+          </a:prstGeom>
+          <a:noFill/>
+        </p:spPr>
+        <p:txBody>
+          <a:bodyPr wrap="square">
+            <a:spAutoFit/>
+          </a:bodyPr>
+          <a:lstStyle/>
+          <a:p>
+            <a:pPr>
+              <a:spcAft>
+                <a:spcPts val="1000"/>
+              </a:spcAft>
+              <a:defRPr sz="3600" b="1">
+                <a:solidFill>
+                  <a:srgbClr val="2563EB"/>
+                </a:solidFill>
+                <a:latin typeface="Calibri"/>
+              </a:defRPr>
+            </a:pPr>
+            <a:r>
+              <a:t>0.0%</a:t>
+            </a:r>
+          </a:p>
+          <a:p>
+            <a:pPr>
+              <a:spcAft>
+                <a:spcPts val="800"/>
+              </a:spcAft>
+              <a:defRPr sz="1400" b="1">
+                <a:solidFill>
+                  <a:srgbClr val="0F172A"/>
+                </a:solidFill>
+                <a:latin typeface="Calibri"/>
+              </a:defRPr>
+            </a:pPr>
+            <a:r>
+              <a:t>Enterprise Logo Churn</a:t>
+            </a:r>
+          </a:p>
+          <a:p>
+            <a:pPr>
+              <a:defRPr sz="1100">
+                <a:solidFill>
+                  <a:srgbClr val="64748B"/>
+                </a:solidFill>
+                <a:latin typeface="Calibri"/>
+              </a:defRPr>
+            </a:pPr>
+            <a:r>
+              <a:t>Zero cancellations across 6 consecutive quarters</a:t>
+            </a:r>
+          </a:p>
+        </p:txBody>
+      </p:sp>
+      <p:sp>
+        <p:nvSpPr>
+          <p:cNvPr id="11" name="Rounded Rectangle 10"/>
+          <p:cNvSpPr/>
+          <p:nvPr/>
+        </p:nvSpPr>
+        <p:spPr>
+          <a:xfrm>
+            <a:off x="8961120" y="1920240"/>
+            <a:ext cx="2468880" cy="4114800"/>
+          </a:xfrm>
+          <a:prstGeom prst="roundRect">
+            <a:avLst/>
+          </a:prstGeom>
+          <a:solidFill>
+            <a:srgbClr val="F8FAFC"/>
+          </a:solidFill>
+          <a:ln w="12700">
+            <a:solidFill>
+              <a:srgbClr val="CBD5E1"/>
+            </a:solidFill>
+          </a:ln>
+        </p:spPr>
+        <p:style>
+          <a:lnRef idx="1">
+            <a:schemeClr val="accent1"/>
+          </a:lnRef>
+          <a:fillRef idx="3">
+            <a:schemeClr val="accent1"/>
+          </a:fillRef>
+          <a:effectRef idx="2">
+            <a:schemeClr val="accent1"/>
+          </a:effectRef>
+          <a:fontRef idx="minor">
+            <a:schemeClr val="lt1"/>
+          </a:fontRef>
+        </p:style>
+        <p:txBody>
+          <a:bodyPr rtlCol="0" anchor="ctr"/>
+          <a:lstStyle/>
+          <a:p>
+            <a:pPr algn="ctr"/>
+          </a:p>
+        </p:txBody>
+      </p:sp>
+      <p:sp>
+        <p:nvSpPr>
+          <p:cNvPr id="12" name="TextBox 11"/>
+          <p:cNvSpPr txBox="1"/>
+          <p:nvPr/>
+        </p:nvSpPr>
+        <p:spPr>
+          <a:xfrm>
+            <a:off x="9235440" y="2286000"/>
+            <a:ext cx="1920240" cy="3383280"/>
+          </a:xfrm>
+          <a:prstGeom prst="rect">
+            <a:avLst/>
+          </a:prstGeom>
+          <a:noFill/>
+        </p:spPr>
+        <p:txBody>
+          <a:bodyPr wrap="square">
+            <a:spAutoFit/>
+          </a:bodyPr>
+          <a:lstStyle/>
+          <a:p>
+            <a:pPr>
+              <a:spcAft>
+                <a:spcPts val="1000"/>
+              </a:spcAft>
+              <a:defRPr sz="3600" b="1">
+                <a:solidFill>
+                  <a:srgbClr val="2563EB"/>
+                </a:solidFill>
+                <a:latin typeface="Calibri"/>
+              </a:defRPr>
+            </a:pPr>
+            <a:r>
+              <a:t>78.4%</a:t>
+            </a:r>
+          </a:p>
+          <a:p>
+            <a:pPr>
+              <a:spcAft>
+                <a:spcPts val="800"/>
+              </a:spcAft>
+              <a:defRPr sz="1400" b="1">
+                <a:solidFill>
+                  <a:srgbClr val="0F172A"/>
+                </a:solidFill>
+                <a:latin typeface="Calibri"/>
+              </a:defRPr>
+            </a:pPr>
+            <a:r>
+              <a:t>Gross Margin</a:t>
+            </a:r>
+          </a:p>
+          <a:p>
+            <a:pPr>
+              <a:defRPr sz="1100">
+                <a:solidFill>
+                  <a:srgbClr val="64748B"/>
+                </a:solidFill>
+                <a:latin typeface="Calibri"/>
+              </a:defRPr>
+            </a:pPr>
+            <a:r>
+              <a:t>Pure SaaS economics with hardware-agnostic API</a:t>
+            </a:r>
+          </a:p>
+        </p:txBody>
+      </p:sp>
+      <p:sp>
+        <p:nvSpPr>
+          <p:cNvPr id="13" name="TextBox 12"/>
+          <p:cNvSpPr txBox="1"/>
+          <p:nvPr/>
+        </p:nvSpPr>
+        <p:spPr>
+          <a:xfrm>
+            <a:off x="731520" y="6309360"/>
+            <a:ext cx="10698480" cy="365760"/>
+          </a:xfrm>
+          <a:prstGeom prst="rect">
+            <a:avLst/>
+          </a:prstGeom>
+          <a:noFill/>
+        </p:spPr>
+        <p:txBody>
           <a:bodyPr wrap="none">
             <a:spAutoFit/>
           </a:bodyPr>
@@ -5700,7 +3895,7 @@
               </a:defRPr>
             </a:pPr>
             <a:r>
-              <a:t>Q4 2026 Executive Investor Update — Estella Williams · Slide 2 of 16</a:t>
+              <a:t>Williams Logistics Network · Q4 2026 Executive Investor Update · Slide 2 of 7</a:t>
             </a:r>
           </a:p>
         </p:txBody>
@@ -5800,7 +3995,7 @@
               </a:defRPr>
             </a:pPr>
             <a:r>
-              <a:t>Q4 2026 EXECUTIVE INVESTOR UPDATE — ESTELLA WILLIA</a:t>
+              <a:t>FINANCIAL TRAJECTORY</a:t>
             </a:r>
           </a:p>
           <a:p>
@@ -5813,7 +4008,7 @@
               </a:defRPr>
             </a:pPr>
             <a:r>
-              <a:t>Financial Trajectory &amp; ARR Bridge</a:t>
+              <a:t>Quarterly ARR Bridge &amp; Expansion Velocity</a:t>
             </a:r>
           </a:p>
           <a:p>
@@ -5829,7 +4024,7 @@
               </a:defRPr>
             </a:pPr>
             <a:r>
-              <a:t>Q1 2026 Actuals to FY 2027 Projections</a:t>
+              <a:t>Clear line of sight to $6.8M ARR exit run-rate in FY 2027</a:t>
             </a:r>
           </a:p>
         </p:txBody>
@@ -5879,14 +4074,59 @@
       </p:sp>
       <p:sp>
         <p:nvSpPr>
-          <p:cNvPr id="5" name="TextBox 4"/>
+          <p:cNvPr id="5" name="Rounded Rectangle 4"/>
+          <p:cNvSpPr/>
+          <p:nvPr/>
+        </p:nvSpPr>
+        <p:spPr>
+          <a:xfrm>
+            <a:off x="731520" y="1920240"/>
+            <a:ext cx="3352800" cy="4114800"/>
+          </a:xfrm>
+          <a:prstGeom prst="roundRect">
+            <a:avLst/>
+          </a:prstGeom>
+          <a:solidFill>
+            <a:srgbClr val="F8FAFC"/>
+          </a:solidFill>
+          <a:ln w="12700">
+            <a:solidFill>
+              <a:srgbClr val="CBD5E1"/>
+            </a:solidFill>
+          </a:ln>
+        </p:spPr>
+        <p:style>
+          <a:lnRef idx="1">
+            <a:schemeClr val="accent1"/>
+          </a:lnRef>
+          <a:fillRef idx="3">
+            <a:schemeClr val="accent1"/>
+          </a:fillRef>
+          <a:effectRef idx="2">
+            <a:schemeClr val="accent1"/>
+          </a:effectRef>
+          <a:fontRef idx="minor">
+            <a:schemeClr val="lt1"/>
+          </a:fontRef>
+        </p:style>
+        <p:txBody>
+          <a:bodyPr rtlCol="0" anchor="ctr"/>
+          <a:lstStyle/>
+          <a:p>
+            <a:pPr algn="ctr"/>
+          </a:p>
+        </p:txBody>
+      </p:sp>
+      <p:sp>
+        <p:nvSpPr>
+          <p:cNvPr id="6" name="TextBox 5"/>
           <p:cNvSpPr txBox="1"/>
           <p:nvPr/>
         </p:nvSpPr>
         <p:spPr>
           <a:xfrm>
-            <a:off x="731520" y="2011680"/>
-            <a:ext cx="10698480" cy="4114800"/>
+            <a:off x="1005840" y="2194560"/>
+            <a:ext cx="2804160" cy="3566160"/>
           </a:xfrm>
           <a:prstGeom prst="rect">
             <a:avLst/>
@@ -5900,111 +4140,125 @@
           <a:lstStyle/>
           <a:p>
             <a:pPr>
-              <a:lnSpc>
-                <a:spcPct val="125000"/>
-              </a:lnSpc>
               <a:spcAft>
-                <a:spcPts val="1400"/>
+                <a:spcPts val="1000"/>
               </a:spcAft>
-              <a:defRPr sz="1500">
-                <a:solidFill>
-                  <a:srgbClr val="1E293B"/>
-                </a:solidFill>
-                <a:latin typeface="Calibri"/>
-              </a:defRPr>
-            </a:pPr>
-            <a:r>
-              <a:t>•  Q1 Actuals: $2.8M ARR across 180 active terminals</a:t>
-            </a:r>
-          </a:p>
-          <a:p>
-            <a:pPr>
-              <a:lnSpc>
-                <a:spcPct val="125000"/>
-              </a:lnSpc>
+              <a:defRPr sz="1500" b="1">
+                <a:solidFill>
+                  <a:srgbClr val="0F172A"/>
+                </a:solidFill>
+                <a:latin typeface="Calibri"/>
+              </a:defRPr>
+            </a:pPr>
+            <a:r>
+              <a:t>Q1–Q3 2026 Actual Growth</a:t>
+            </a:r>
+          </a:p>
+          <a:p>
+            <a:pPr>
               <a:spcAft>
-                <a:spcPts val="1400"/>
+                <a:spcPts val="600"/>
               </a:spcAft>
-              <a:defRPr sz="1500">
-                <a:solidFill>
-                  <a:srgbClr val="1E293B"/>
-                </a:solidFill>
-                <a:latin typeface="Calibri"/>
-              </a:defRPr>
-            </a:pPr>
-            <a:r>
-              <a:t>•  Q2 Actuals: $3.4M ARR with 28 new carrier fleet logos</a:t>
-            </a:r>
-          </a:p>
-          <a:p>
-            <a:pPr>
-              <a:lnSpc>
-                <a:spcPct val="125000"/>
-              </a:lnSpc>
+              <a:defRPr sz="1100">
+                <a:solidFill>
+                  <a:srgbClr val="334155"/>
+                </a:solidFill>
+                <a:latin typeface="Calibri"/>
+              </a:defRPr>
+            </a:pPr>
+            <a:r>
+              <a:t>•  Q1 2026: $2.8M ARR across 128 contracted distribution hubs</a:t>
+            </a:r>
+          </a:p>
+          <a:p>
+            <a:pPr>
               <a:spcAft>
-                <a:spcPts val="1400"/>
+                <a:spcPts val="600"/>
               </a:spcAft>
-              <a:defRPr sz="1500">
-                <a:solidFill>
-                  <a:srgbClr val="1E293B"/>
-                </a:solidFill>
-                <a:latin typeface="Calibri"/>
-              </a:defRPr>
-            </a:pPr>
-            <a:r>
-              <a:t>•  Q3 Actuals: $4.2M ARR driven by $420K organic expansion</a:t>
-            </a:r>
-          </a:p>
-          <a:p>
-            <a:pPr>
-              <a:lnSpc>
-                <a:spcPct val="125000"/>
-              </a:lnSpc>
+              <a:defRPr sz="1100">
+                <a:solidFill>
+                  <a:srgbClr val="334155"/>
+                </a:solidFill>
+                <a:latin typeface="Calibri"/>
+              </a:defRPr>
+            </a:pPr>
+            <a:r>
+              <a:t>•  Q2 2026: $3.4M ARR with 28 new carrier fleet enterprise logos</a:t>
+            </a:r>
+          </a:p>
+          <a:p>
+            <a:pPr>
               <a:spcAft>
-                <a:spcPts val="1400"/>
+                <a:spcPts val="600"/>
               </a:spcAft>
-              <a:defRPr sz="1500">
-                <a:solidFill>
-                  <a:srgbClr val="1E293B"/>
-                </a:solidFill>
-                <a:latin typeface="Calibri"/>
-              </a:defRPr>
-            </a:pPr>
-            <a:r>
-              <a:t>•  Q4 2026 Target: $5.1M ARR (92% visibility on pipeline contracts)</a:t>
-            </a:r>
-          </a:p>
-          <a:p>
-            <a:pPr>
-              <a:lnSpc>
-                <a:spcPct val="125000"/>
-              </a:lnSpc>
-              <a:spcAft>
-                <a:spcPts val="1400"/>
-              </a:spcAft>
-              <a:defRPr sz="1500">
-                <a:solidFill>
-                  <a:srgbClr val="1E293B"/>
-                </a:solidFill>
-                <a:latin typeface="Calibri"/>
-              </a:defRPr>
-            </a:pPr>
-            <a:r>
-              <a:t>•  FY 2027 Plan: $7.8M ARR with positive operating cash flow by Q3</a:t>
-            </a:r>
-          </a:p>
-        </p:txBody>
-      </p:sp>
-      <p:sp>
-        <p:nvSpPr>
-          <p:cNvPr id="6" name="TextBox 5"/>
+              <a:defRPr sz="1100">
+                <a:solidFill>
+                  <a:srgbClr val="334155"/>
+                </a:solidFill>
+                <a:latin typeface="Calibri"/>
+              </a:defRPr>
+            </a:pPr>
+            <a:r>
+              <a:t>•  Q3 2026: $4.2M ARR driven by Midwest freight corridor expansion</a:t>
+            </a:r>
+          </a:p>
+        </p:txBody>
+      </p:sp>
+      <p:sp>
+        <p:nvSpPr>
+          <p:cNvPr id="7" name="Rounded Rectangle 6"/>
+          <p:cNvSpPr/>
+          <p:nvPr/>
+        </p:nvSpPr>
+        <p:spPr>
+          <a:xfrm>
+            <a:off x="4404360" y="1920240"/>
+            <a:ext cx="3352800" cy="4114800"/>
+          </a:xfrm>
+          <a:prstGeom prst="roundRect">
+            <a:avLst/>
+          </a:prstGeom>
+          <a:solidFill>
+            <a:srgbClr val="F8FAFC"/>
+          </a:solidFill>
+          <a:ln w="12700">
+            <a:solidFill>
+              <a:srgbClr val="CBD5E1"/>
+            </a:solidFill>
+          </a:ln>
+        </p:spPr>
+        <p:style>
+          <a:lnRef idx="1">
+            <a:schemeClr val="accent1"/>
+          </a:lnRef>
+          <a:fillRef idx="3">
+            <a:schemeClr val="accent1"/>
+          </a:fillRef>
+          <a:effectRef idx="2">
+            <a:schemeClr val="accent1"/>
+          </a:effectRef>
+          <a:fontRef idx="minor">
+            <a:schemeClr val="lt1"/>
+          </a:fontRef>
+        </p:style>
+        <p:txBody>
+          <a:bodyPr rtlCol="0" anchor="ctr"/>
+          <a:lstStyle/>
+          <a:p>
+            <a:pPr algn="ctr"/>
+          </a:p>
+        </p:txBody>
+      </p:sp>
+      <p:sp>
+        <p:nvSpPr>
+          <p:cNvPr id="8" name="TextBox 7"/>
           <p:cNvSpPr txBox="1"/>
           <p:nvPr/>
         </p:nvSpPr>
         <p:spPr>
           <a:xfrm>
-            <a:off x="731520" y="6309360"/>
-            <a:ext cx="10698480" cy="365760"/>
+            <a:off x="4678680" y="2194560"/>
+            <a:ext cx="2804160" cy="3566160"/>
           </a:xfrm>
           <a:prstGeom prst="rect">
             <a:avLst/>
@@ -6012,6 +4266,225 @@
           <a:noFill/>
         </p:spPr>
         <p:txBody>
+          <a:bodyPr wrap="square">
+            <a:spAutoFit/>
+          </a:bodyPr>
+          <a:lstStyle/>
+          <a:p>
+            <a:pPr>
+              <a:spcAft>
+                <a:spcPts val="1000"/>
+              </a:spcAft>
+              <a:defRPr sz="1500" b="1">
+                <a:solidFill>
+                  <a:srgbClr val="0F172A"/>
+                </a:solidFill>
+                <a:latin typeface="Calibri"/>
+              </a:defRPr>
+            </a:pPr>
+            <a:r>
+              <a:t>Q4 Forecast &amp; FY2027 Budget</a:t>
+            </a:r>
+          </a:p>
+          <a:p>
+            <a:pPr>
+              <a:spcAft>
+                <a:spcPts val="600"/>
+              </a:spcAft>
+              <a:defRPr sz="1100">
+                <a:solidFill>
+                  <a:srgbClr val="334155"/>
+                </a:solidFill>
+                <a:latin typeface="Calibri"/>
+              </a:defRPr>
+            </a:pPr>
+            <a:r>
+              <a:t>•  Q4 2026 Target: $5.1M ARR (94% contracted pipeline coverage)</a:t>
+            </a:r>
+          </a:p>
+          <a:p>
+            <a:pPr>
+              <a:spcAft>
+                <a:spcPts val="600"/>
+              </a:spcAft>
+              <a:defRPr sz="1100">
+                <a:solidFill>
+                  <a:srgbClr val="334155"/>
+                </a:solidFill>
+                <a:latin typeface="Calibri"/>
+              </a:defRPr>
+            </a:pPr>
+            <a:r>
+              <a:t>•  FY 2027 Projected: $6.8M ARR with 310 terminal deployments</a:t>
+            </a:r>
+          </a:p>
+          <a:p>
+            <a:pPr>
+              <a:spcAft>
+                <a:spcPts val="600"/>
+              </a:spcAft>
+              <a:defRPr sz="1100">
+                <a:solidFill>
+                  <a:srgbClr val="334155"/>
+                </a:solidFill>
+                <a:latin typeface="Calibri"/>
+              </a:defRPr>
+            </a:pPr>
+            <a:r>
+              <a:t>•  Cash flow breakeven anticipated in Q2 2027 without secondary financing</a:t>
+            </a:r>
+          </a:p>
+        </p:txBody>
+      </p:sp>
+      <p:sp>
+        <p:nvSpPr>
+          <p:cNvPr id="9" name="Rounded Rectangle 8"/>
+          <p:cNvSpPr/>
+          <p:nvPr/>
+        </p:nvSpPr>
+        <p:spPr>
+          <a:xfrm>
+            <a:off x="8077200" y="1920240"/>
+            <a:ext cx="3352800" cy="4114800"/>
+          </a:xfrm>
+          <a:prstGeom prst="roundRect">
+            <a:avLst/>
+          </a:prstGeom>
+          <a:solidFill>
+            <a:srgbClr val="F8FAFC"/>
+          </a:solidFill>
+          <a:ln w="12700">
+            <a:solidFill>
+              <a:srgbClr val="CBD5E1"/>
+            </a:solidFill>
+          </a:ln>
+        </p:spPr>
+        <p:style>
+          <a:lnRef idx="1">
+            <a:schemeClr val="accent1"/>
+          </a:lnRef>
+          <a:fillRef idx="3">
+            <a:schemeClr val="accent1"/>
+          </a:fillRef>
+          <a:effectRef idx="2">
+            <a:schemeClr val="accent1"/>
+          </a:effectRef>
+          <a:fontRef idx="minor">
+            <a:schemeClr val="lt1"/>
+          </a:fontRef>
+        </p:style>
+        <p:txBody>
+          <a:bodyPr rtlCol="0" anchor="ctr"/>
+          <a:lstStyle/>
+          <a:p>
+            <a:pPr algn="ctr"/>
+          </a:p>
+        </p:txBody>
+      </p:sp>
+      <p:sp>
+        <p:nvSpPr>
+          <p:cNvPr id="10" name="TextBox 9"/>
+          <p:cNvSpPr txBox="1"/>
+          <p:nvPr/>
+        </p:nvSpPr>
+        <p:spPr>
+          <a:xfrm>
+            <a:off x="8351520" y="2194560"/>
+            <a:ext cx="2804160" cy="3566160"/>
+          </a:xfrm>
+          <a:prstGeom prst="rect">
+            <a:avLst/>
+          </a:prstGeom>
+          <a:noFill/>
+        </p:spPr>
+        <p:txBody>
+          <a:bodyPr wrap="square">
+            <a:spAutoFit/>
+          </a:bodyPr>
+          <a:lstStyle/>
+          <a:p>
+            <a:pPr>
+              <a:spcAft>
+                <a:spcPts val="1000"/>
+              </a:spcAft>
+              <a:defRPr sz="1500" b="1">
+                <a:solidFill>
+                  <a:srgbClr val="0F172A"/>
+                </a:solidFill>
+                <a:latin typeface="Calibri"/>
+              </a:defRPr>
+            </a:pPr>
+            <a:r>
+              <a:t>Unit Economics &amp; Payback</a:t>
+            </a:r>
+          </a:p>
+          <a:p>
+            <a:pPr>
+              <a:spcAft>
+                <a:spcPts val="600"/>
+              </a:spcAft>
+              <a:defRPr sz="1100">
+                <a:solidFill>
+                  <a:srgbClr val="334155"/>
+                </a:solidFill>
+                <a:latin typeface="Calibri"/>
+              </a:defRPr>
+            </a:pPr>
+            <a:r>
+              <a:t>•  Average Contract Value (ACV): $28,500/year per terminal hub</a:t>
+            </a:r>
+          </a:p>
+          <a:p>
+            <a:pPr>
+              <a:spcAft>
+                <a:spcPts val="600"/>
+              </a:spcAft>
+              <a:defRPr sz="1100">
+                <a:solidFill>
+                  <a:srgbClr val="334155"/>
+                </a:solidFill>
+                <a:latin typeface="Calibri"/>
+              </a:defRPr>
+            </a:pPr>
+            <a:r>
+              <a:t>•  Customer Acquisition Cost (CAC): $5,900 per enterprise logo</a:t>
+            </a:r>
+          </a:p>
+          <a:p>
+            <a:pPr>
+              <a:spcAft>
+                <a:spcPts val="600"/>
+              </a:spcAft>
+              <a:defRPr sz="1100">
+                <a:solidFill>
+                  <a:srgbClr val="334155"/>
+                </a:solidFill>
+                <a:latin typeface="Calibri"/>
+              </a:defRPr>
+            </a:pPr>
+            <a:r>
+              <a:t>•  LTV to CAC Ratio: 5.4x with 6.2 month cash payback window</a:t>
+            </a:r>
+          </a:p>
+        </p:txBody>
+      </p:sp>
+      <p:sp>
+        <p:nvSpPr>
+          <p:cNvPr id="11" name="TextBox 10"/>
+          <p:cNvSpPr txBox="1"/>
+          <p:nvPr/>
+        </p:nvSpPr>
+        <p:spPr>
+          <a:xfrm>
+            <a:off x="731520" y="6309360"/>
+            <a:ext cx="10698480" cy="365760"/>
+          </a:xfrm>
+          <a:prstGeom prst="rect">
+            <a:avLst/>
+          </a:prstGeom>
+          <a:noFill/>
+        </p:spPr>
+        <p:txBody>
           <a:bodyPr wrap="none">
             <a:spAutoFit/>
           </a:bodyPr>
@@ -6026,7 +4499,7 @@
               </a:defRPr>
             </a:pPr>
             <a:r>
-              <a:t>Q4 2026 Executive Investor Update — Estella Williams · Slide 3 of 16</a:t>
+              <a:t>Williams Logistics Network · Q4 2026 Executive Investor Update · Slide 3 of 7</a:t>
             </a:r>
           </a:p>
         </p:txBody>
@@ -6126,7 +4599,7 @@
               </a:defRPr>
             </a:pPr>
             <a:r>
-              <a:t>Q4 2026 EXECUTIVE INVESTOR UPDATE — ESTELLA WILLIA</a:t>
+              <a:t>CORE PRODUCT INNOVATION</a:t>
             </a:r>
           </a:p>
           <a:p>
@@ -6139,7 +4612,7 @@
               </a:defRPr>
             </a:pPr>
             <a:r>
-              <a:t>Net Revenue Retention &amp; Cohort Health</a:t>
+              <a:t>DockDoor 2.0: Automated Cross-Dock Orchestration</a:t>
             </a:r>
           </a:p>
           <a:p>
@@ -6155,7 +4628,7 @@
               </a:defRPr>
             </a:pPr>
             <a:r>
-              <a:t>Zero Enterprise Logo Churn Across 6 Consecutive Quarters</a:t>
+              <a:t>Replacing manual whiteboards, phone tag, and demurrage penalties with automated gate logic</a:t>
             </a:r>
           </a:p>
         </p:txBody>
@@ -6205,14 +4678,59 @@
       </p:sp>
       <p:sp>
         <p:nvSpPr>
-          <p:cNvPr id="5" name="TextBox 4"/>
+          <p:cNvPr id="5" name="Rounded Rectangle 4"/>
+          <p:cNvSpPr/>
+          <p:nvPr/>
+        </p:nvSpPr>
+        <p:spPr>
+          <a:xfrm>
+            <a:off x="731520" y="1920240"/>
+            <a:ext cx="3352800" cy="4114800"/>
+          </a:xfrm>
+          <a:prstGeom prst="roundRect">
+            <a:avLst/>
+          </a:prstGeom>
+          <a:solidFill>
+            <a:srgbClr val="F8FAFC"/>
+          </a:solidFill>
+          <a:ln w="12700">
+            <a:solidFill>
+              <a:srgbClr val="CBD5E1"/>
+            </a:solidFill>
+          </a:ln>
+        </p:spPr>
+        <p:style>
+          <a:lnRef idx="1">
+            <a:schemeClr val="accent1"/>
+          </a:lnRef>
+          <a:fillRef idx="3">
+            <a:schemeClr val="accent1"/>
+          </a:fillRef>
+          <a:effectRef idx="2">
+            <a:schemeClr val="accent1"/>
+          </a:effectRef>
+          <a:fontRef idx="minor">
+            <a:schemeClr val="lt1"/>
+          </a:fontRef>
+        </p:style>
+        <p:txBody>
+          <a:bodyPr rtlCol="0" anchor="ctr"/>
+          <a:lstStyle/>
+          <a:p>
+            <a:pPr algn="ctr"/>
+          </a:p>
+        </p:txBody>
+      </p:sp>
+      <p:sp>
+        <p:nvSpPr>
+          <p:cNvPr id="6" name="TextBox 5"/>
           <p:cNvSpPr txBox="1"/>
           <p:nvPr/>
         </p:nvSpPr>
         <p:spPr>
           <a:xfrm>
-            <a:off x="731520" y="2011680"/>
-            <a:ext cx="10698480" cy="4114800"/>
+            <a:off x="1005840" y="2194560"/>
+            <a:ext cx="2804160" cy="3566160"/>
           </a:xfrm>
           <a:prstGeom prst="rect">
             <a:avLst/>
@@ -6226,92 +4744,125 @@
           <a:lstStyle/>
           <a:p>
             <a:pPr>
-              <a:lnSpc>
-                <a:spcPct val="125000"/>
-              </a:lnSpc>
               <a:spcAft>
-                <a:spcPts val="1400"/>
+                <a:spcPts val="1000"/>
               </a:spcAft>
-              <a:defRPr sz="1500">
-                <a:solidFill>
-                  <a:srgbClr val="1E293B"/>
-                </a:solidFill>
-                <a:latin typeface="Calibri"/>
-              </a:defRPr>
-            </a:pPr>
-            <a:r>
-              <a:t>•  Gross Revenue Retention: 96.4% across all contract vintages</a:t>
-            </a:r>
-          </a:p>
-          <a:p>
-            <a:pPr>
-              <a:lnSpc>
-                <a:spcPct val="125000"/>
-              </a:lnSpc>
+              <a:defRPr sz="1500" b="1">
+                <a:solidFill>
+                  <a:srgbClr val="0F172A"/>
+                </a:solidFill>
+                <a:latin typeface="Calibri"/>
+              </a:defRPr>
+            </a:pPr>
+            <a:r>
+              <a:t>1. Geofenced Driver Intake</a:t>
+            </a:r>
+          </a:p>
+          <a:p>
+            <a:pPr>
               <a:spcAft>
-                <a:spcPts val="1400"/>
+                <a:spcPts val="600"/>
               </a:spcAft>
-              <a:defRPr sz="1500">
-                <a:solidFill>
-                  <a:srgbClr val="1E293B"/>
-                </a:solidFill>
-                <a:latin typeface="Calibri"/>
-              </a:defRPr>
-            </a:pPr>
-            <a:r>
-              <a:t>•  Net Expansion Rate: 114% driven by dockdoor volume tier upgrades</a:t>
-            </a:r>
-          </a:p>
-          <a:p>
-            <a:pPr>
-              <a:lnSpc>
-                <a:spcPct val="125000"/>
-              </a:lnSpc>
+              <a:defRPr sz="1100">
+                <a:solidFill>
+                  <a:srgbClr val="334155"/>
+                </a:solidFill>
+                <a:latin typeface="Calibri"/>
+              </a:defRPr>
+            </a:pPr>
+            <a:r>
+              <a:t>•  Automated arrival trigger 2 miles from terminal perimeter</a:t>
+            </a:r>
+          </a:p>
+          <a:p>
+            <a:pPr>
               <a:spcAft>
-                <a:spcPts val="1400"/>
+                <a:spcPts val="600"/>
               </a:spcAft>
-              <a:defRPr sz="1500">
-                <a:solidFill>
-                  <a:srgbClr val="1E293B"/>
-                </a:solidFill>
-                <a:latin typeface="Calibri"/>
-              </a:defRPr>
-            </a:pPr>
-            <a:r>
-              <a:t>•  Cohort health shows full CAC payback achieved within 7.2 months of go-live</a:t>
-            </a:r>
-          </a:p>
-          <a:p>
-            <a:pPr>
-              <a:lnSpc>
-                <a:spcPct val="125000"/>
-              </a:lnSpc>
+              <a:defRPr sz="1100">
+                <a:solidFill>
+                  <a:srgbClr val="334155"/>
+                </a:solidFill>
+                <a:latin typeface="Calibri"/>
+              </a:defRPr>
+            </a:pPr>
+            <a:r>
+              <a:t>•  No app download required; runs via responsive web container</a:t>
+            </a:r>
+          </a:p>
+          <a:p>
+            <a:pPr>
               <a:spcAft>
-                <a:spcPts val="1400"/>
+                <a:spcPts val="600"/>
               </a:spcAft>
-              <a:defRPr sz="1500">
-                <a:solidFill>
-                  <a:srgbClr val="1E293B"/>
-                </a:solidFill>
-                <a:latin typeface="Calibri"/>
-              </a:defRPr>
-            </a:pPr>
-            <a:r>
-              <a:t>•  Average terminal usage increased from 42 trailers/day to 74 trailers/day</a:t>
-            </a:r>
-          </a:p>
-        </p:txBody>
-      </p:sp>
-      <p:sp>
-        <p:nvSpPr>
-          <p:cNvPr id="6" name="TextBox 5"/>
+              <a:defRPr sz="1100">
+                <a:solidFill>
+                  <a:srgbClr val="334155"/>
+                </a:solidFill>
+                <a:latin typeface="Calibri"/>
+              </a:defRPr>
+            </a:pPr>
+            <a:r>
+              <a:t>•  Instantly verifies trailer seal number and cargo bill of lading</a:t>
+            </a:r>
+          </a:p>
+        </p:txBody>
+      </p:sp>
+      <p:sp>
+        <p:nvSpPr>
+          <p:cNvPr id="7" name="Rounded Rectangle 6"/>
+          <p:cNvSpPr/>
+          <p:nvPr/>
+        </p:nvSpPr>
+        <p:spPr>
+          <a:xfrm>
+            <a:off x="4404360" y="1920240"/>
+            <a:ext cx="3352800" cy="4114800"/>
+          </a:xfrm>
+          <a:prstGeom prst="roundRect">
+            <a:avLst/>
+          </a:prstGeom>
+          <a:solidFill>
+            <a:srgbClr val="F8FAFC"/>
+          </a:solidFill>
+          <a:ln w="12700">
+            <a:solidFill>
+              <a:srgbClr val="CBD5E1"/>
+            </a:solidFill>
+          </a:ln>
+        </p:spPr>
+        <p:style>
+          <a:lnRef idx="1">
+            <a:schemeClr val="accent1"/>
+          </a:lnRef>
+          <a:fillRef idx="3">
+            <a:schemeClr val="accent1"/>
+          </a:fillRef>
+          <a:effectRef idx="2">
+            <a:schemeClr val="accent1"/>
+          </a:effectRef>
+          <a:fontRef idx="minor">
+            <a:schemeClr val="lt1"/>
+          </a:fontRef>
+        </p:style>
+        <p:txBody>
+          <a:bodyPr rtlCol="0" anchor="ctr"/>
+          <a:lstStyle/>
+          <a:p>
+            <a:pPr algn="ctr"/>
+          </a:p>
+        </p:txBody>
+      </p:sp>
+      <p:sp>
+        <p:nvSpPr>
+          <p:cNvPr id="8" name="TextBox 7"/>
           <p:cNvSpPr txBox="1"/>
           <p:nvPr/>
         </p:nvSpPr>
         <p:spPr>
           <a:xfrm>
-            <a:off x="731520" y="6309360"/>
-            <a:ext cx="10698480" cy="365760"/>
+            <a:off x="4678680" y="2194560"/>
+            <a:ext cx="2804160" cy="3566160"/>
           </a:xfrm>
           <a:prstGeom prst="rect">
             <a:avLst/>
@@ -6319,6 +4870,225 @@
           <a:noFill/>
         </p:spPr>
         <p:txBody>
+          <a:bodyPr wrap="square">
+            <a:spAutoFit/>
+          </a:bodyPr>
+          <a:lstStyle/>
+          <a:p>
+            <a:pPr>
+              <a:spcAft>
+                <a:spcPts val="1000"/>
+              </a:spcAft>
+              <a:defRPr sz="1500" b="1">
+                <a:solidFill>
+                  <a:srgbClr val="0F172A"/>
+                </a:solidFill>
+                <a:latin typeface="Calibri"/>
+              </a:defRPr>
+            </a:pPr>
+            <a:r>
+              <a:t>2. Dynamic Bay Allocation</a:t>
+            </a:r>
+          </a:p>
+          <a:p>
+            <a:pPr>
+              <a:spcAft>
+                <a:spcPts val="600"/>
+              </a:spcAft>
+              <a:defRPr sz="1100">
+                <a:solidFill>
+                  <a:srgbClr val="334155"/>
+                </a:solidFill>
+                <a:latin typeface="Calibri"/>
+              </a:defRPr>
+            </a:pPr>
+            <a:r>
+              <a:t>•  Algorithms assign dock doors based on liftgate and reefer class</a:t>
+            </a:r>
+          </a:p>
+          <a:p>
+            <a:pPr>
+              <a:spcAft>
+                <a:spcPts val="600"/>
+              </a:spcAft>
+              <a:defRPr sz="1100">
+                <a:solidFill>
+                  <a:srgbClr val="334155"/>
+                </a:solidFill>
+                <a:latin typeface="Calibri"/>
+              </a:defRPr>
+            </a:pPr>
+            <a:r>
+              <a:t>•  Balances forklift staging distance to reduce cross-dock congestion</a:t>
+            </a:r>
+          </a:p>
+          <a:p>
+            <a:pPr>
+              <a:spcAft>
+                <a:spcPts val="600"/>
+              </a:spcAft>
+              <a:defRPr sz="1100">
+                <a:solidFill>
+                  <a:srgbClr val="334155"/>
+                </a:solidFill>
+                <a:latin typeface="Calibri"/>
+              </a:defRPr>
+            </a:pPr>
+            <a:r>
+              <a:t>•  Reduces average yard dwell time from 114 minutes to 38 minutes</a:t>
+            </a:r>
+          </a:p>
+        </p:txBody>
+      </p:sp>
+      <p:sp>
+        <p:nvSpPr>
+          <p:cNvPr id="9" name="Rounded Rectangle 8"/>
+          <p:cNvSpPr/>
+          <p:nvPr/>
+        </p:nvSpPr>
+        <p:spPr>
+          <a:xfrm>
+            <a:off x="8077200" y="1920240"/>
+            <a:ext cx="3352800" cy="4114800"/>
+          </a:xfrm>
+          <a:prstGeom prst="roundRect">
+            <a:avLst/>
+          </a:prstGeom>
+          <a:solidFill>
+            <a:srgbClr val="F8FAFC"/>
+          </a:solidFill>
+          <a:ln w="12700">
+            <a:solidFill>
+              <a:srgbClr val="CBD5E1"/>
+            </a:solidFill>
+          </a:ln>
+        </p:spPr>
+        <p:style>
+          <a:lnRef idx="1">
+            <a:schemeClr val="accent1"/>
+          </a:lnRef>
+          <a:fillRef idx="3">
+            <a:schemeClr val="accent1"/>
+          </a:fillRef>
+          <a:effectRef idx="2">
+            <a:schemeClr val="accent1"/>
+          </a:effectRef>
+          <a:fontRef idx="minor">
+            <a:schemeClr val="lt1"/>
+          </a:fontRef>
+        </p:style>
+        <p:txBody>
+          <a:bodyPr rtlCol="0" anchor="ctr"/>
+          <a:lstStyle/>
+          <a:p>
+            <a:pPr algn="ctr"/>
+          </a:p>
+        </p:txBody>
+      </p:sp>
+      <p:sp>
+        <p:nvSpPr>
+          <p:cNvPr id="10" name="TextBox 9"/>
+          <p:cNvSpPr txBox="1"/>
+          <p:nvPr/>
+        </p:nvSpPr>
+        <p:spPr>
+          <a:xfrm>
+            <a:off x="8351520" y="2194560"/>
+            <a:ext cx="2804160" cy="3566160"/>
+          </a:xfrm>
+          <a:prstGeom prst="rect">
+            <a:avLst/>
+          </a:prstGeom>
+          <a:noFill/>
+        </p:spPr>
+        <p:txBody>
+          <a:bodyPr wrap="square">
+            <a:spAutoFit/>
+          </a:bodyPr>
+          <a:lstStyle/>
+          <a:p>
+            <a:pPr>
+              <a:spcAft>
+                <a:spcPts val="1000"/>
+              </a:spcAft>
+              <a:defRPr sz="1500" b="1">
+                <a:solidFill>
+                  <a:srgbClr val="0F172A"/>
+                </a:solidFill>
+                <a:latin typeface="Calibri"/>
+              </a:defRPr>
+            </a:pPr>
+            <a:r>
+              <a:t>3. Sign-on-Glass Electronic BOL</a:t>
+            </a:r>
+          </a:p>
+          <a:p>
+            <a:pPr>
+              <a:spcAft>
+                <a:spcPts val="600"/>
+              </a:spcAft>
+              <a:defRPr sz="1100">
+                <a:solidFill>
+                  <a:srgbClr val="334155"/>
+                </a:solidFill>
+                <a:latin typeface="Calibri"/>
+              </a:defRPr>
+            </a:pPr>
+            <a:r>
+              <a:t>•  Digital damage exception markup with high-res photo capture</a:t>
+            </a:r>
+          </a:p>
+          <a:p>
+            <a:pPr>
+              <a:spcAft>
+                <a:spcPts val="600"/>
+              </a:spcAft>
+              <a:defRPr sz="1100">
+                <a:solidFill>
+                  <a:srgbClr val="334155"/>
+                </a:solidFill>
+                <a:latin typeface="Calibri"/>
+              </a:defRPr>
+            </a:pPr>
+            <a:r>
+              <a:t>•  Instant PDF bill-of-lading dispatch to carrier, broker, and consignee</a:t>
+            </a:r>
+          </a:p>
+          <a:p>
+            <a:pPr>
+              <a:spcAft>
+                <a:spcPts val="600"/>
+              </a:spcAft>
+              <a:defRPr sz="1100">
+                <a:solidFill>
+                  <a:srgbClr val="334155"/>
+                </a:solidFill>
+                <a:latin typeface="Calibri"/>
+              </a:defRPr>
+            </a:pPr>
+            <a:r>
+              <a:t>•  100% audit compliance with zero lost freight documentation</a:t>
+            </a:r>
+          </a:p>
+        </p:txBody>
+      </p:sp>
+      <p:sp>
+        <p:nvSpPr>
+          <p:cNvPr id="11" name="TextBox 10"/>
+          <p:cNvSpPr txBox="1"/>
+          <p:nvPr/>
+        </p:nvSpPr>
+        <p:spPr>
+          <a:xfrm>
+            <a:off x="731520" y="6309360"/>
+            <a:ext cx="10698480" cy="365760"/>
+          </a:xfrm>
+          <a:prstGeom prst="rect">
+            <a:avLst/>
+          </a:prstGeom>
+          <a:noFill/>
+        </p:spPr>
+        <p:txBody>
           <a:bodyPr wrap="none">
             <a:spAutoFit/>
           </a:bodyPr>
@@ -6333,7 +5103,7 @@
               </a:defRPr>
             </a:pPr>
             <a:r>
-              <a:t>Q4 2026 Executive Investor Update — Estella Williams · Slide 4 of 16</a:t>
+              <a:t>Williams Logistics Network · Q4 2026 Executive Investor Update · Slide 4 of 7</a:t>
             </a:r>
           </a:p>
         </p:txBody>
@@ -6433,7 +5203,7 @@
               </a:defRPr>
             </a:pPr>
             <a:r>
-              <a:t>Q4 2026 EXECUTIVE INVESTOR UPDATE — ESTELLA WILLIA</a:t>
+              <a:t>ENTERPRISE PILOT CASE STUDY</a:t>
             </a:r>
           </a:p>
           <a:p>
@@ -6446,7 +5216,7 @@
               </a:defRPr>
             </a:pPr>
             <a:r>
-              <a:t>Gross Margin &amp; Infrastructure Efficiency</a:t>
+              <a:t>Mid-States 3PL Case Study: Measurable Operational ROI</a:t>
             </a:r>
           </a:p>
           <a:p>
@@ -6462,7 +5232,7 @@
               </a:defRPr>
             </a:pPr>
             <a:r>
-              <a:t>COGS Optimization Strategy</a:t>
+              <a:t>Deployment across 4 regional cross-dock distribution hubs in Dallas, Kansas City, and Memphis</a:t>
             </a:r>
           </a:p>
         </p:txBody>
@@ -6512,14 +5282,59 @@
       </p:sp>
       <p:sp>
         <p:nvSpPr>
-          <p:cNvPr id="5" name="TextBox 4"/>
+          <p:cNvPr id="5" name="Rounded Rectangle 4"/>
+          <p:cNvSpPr/>
+          <p:nvPr/>
+        </p:nvSpPr>
+        <p:spPr>
+          <a:xfrm>
+            <a:off x="731520" y="1920240"/>
+            <a:ext cx="2468880" cy="4114800"/>
+          </a:xfrm>
+          <a:prstGeom prst="roundRect">
+            <a:avLst/>
+          </a:prstGeom>
+          <a:solidFill>
+            <a:srgbClr val="F8FAFC"/>
+          </a:solidFill>
+          <a:ln w="12700">
+            <a:solidFill>
+              <a:srgbClr val="CBD5E1"/>
+            </a:solidFill>
+          </a:ln>
+        </p:spPr>
+        <p:style>
+          <a:lnRef idx="1">
+            <a:schemeClr val="accent1"/>
+          </a:lnRef>
+          <a:fillRef idx="3">
+            <a:schemeClr val="accent1"/>
+          </a:fillRef>
+          <a:effectRef idx="2">
+            <a:schemeClr val="accent1"/>
+          </a:effectRef>
+          <a:fontRef idx="minor">
+            <a:schemeClr val="lt1"/>
+          </a:fontRef>
+        </p:style>
+        <p:txBody>
+          <a:bodyPr rtlCol="0" anchor="ctr"/>
+          <a:lstStyle/>
+          <a:p>
+            <a:pPr algn="ctr"/>
+          </a:p>
+        </p:txBody>
+      </p:sp>
+      <p:sp>
+        <p:nvSpPr>
+          <p:cNvPr id="6" name="TextBox 5"/>
           <p:cNvSpPr txBox="1"/>
           <p:nvPr/>
         </p:nvSpPr>
         <p:spPr>
           <a:xfrm>
-            <a:off x="731520" y="2011680"/>
-            <a:ext cx="10698480" cy="4114800"/>
+            <a:off x="1005840" y="2286000"/>
+            <a:ext cx="1920240" cy="3383280"/>
           </a:xfrm>
           <a:prstGeom prst="rect">
             <a:avLst/>
@@ -6533,92 +5348,106 @@
           <a:lstStyle/>
           <a:p>
             <a:pPr>
-              <a:lnSpc>
-                <a:spcPct val="125000"/>
-              </a:lnSpc>
               <a:spcAft>
-                <a:spcPts val="1400"/>
+                <a:spcPts val="1000"/>
               </a:spcAft>
-              <a:defRPr sz="1500">
-                <a:solidFill>
-                  <a:srgbClr val="1E293B"/>
-                </a:solidFill>
-                <a:latin typeface="Calibri"/>
-              </a:defRPr>
-            </a:pPr>
-            <a:r>
-              <a:t>•  Cloud hosting cost per terminal declined from $142 to $84/month</a:t>
-            </a:r>
-          </a:p>
-          <a:p>
-            <a:pPr>
-              <a:lnSpc>
-                <a:spcPct val="125000"/>
-              </a:lnSpc>
+              <a:defRPr sz="3600" b="1">
+                <a:solidFill>
+                  <a:srgbClr val="2563EB"/>
+                </a:solidFill>
+                <a:latin typeface="Calibri"/>
+              </a:defRPr>
+            </a:pPr>
+            <a:r>
+              <a:t>-41%</a:t>
+            </a:r>
+          </a:p>
+          <a:p>
+            <a:pPr>
               <a:spcAft>
-                <a:spcPts val="1400"/>
+                <a:spcPts val="800"/>
               </a:spcAft>
-              <a:defRPr sz="1500">
-                <a:solidFill>
-                  <a:srgbClr val="1E293B"/>
-                </a:solidFill>
-                <a:latin typeface="Calibri"/>
-              </a:defRPr>
-            </a:pPr>
-            <a:r>
-              <a:t>•  Automated OCR bill of lading processing cut manual audit labor by 64%</a:t>
-            </a:r>
-          </a:p>
-          <a:p>
-            <a:pPr>
-              <a:lnSpc>
-                <a:spcPct val="125000"/>
-              </a:lnSpc>
-              <a:spcAft>
-                <a:spcPts val="1400"/>
-              </a:spcAft>
-              <a:defRPr sz="1500">
-                <a:solidFill>
-                  <a:srgbClr val="1E293B"/>
-                </a:solidFill>
-                <a:latin typeface="Calibri"/>
-              </a:defRPr>
-            </a:pPr>
-            <a:r>
-              <a:t>•  Gross margin path: 74% (Q1) -&gt; 76% (Q2) -&gt; 77% (Q3) -&gt; 81% (Target FY27)</a:t>
-            </a:r>
-          </a:p>
-          <a:p>
-            <a:pPr>
-              <a:lnSpc>
-                <a:spcPct val="125000"/>
-              </a:lnSpc>
-              <a:spcAft>
-                <a:spcPts val="1400"/>
-              </a:spcAft>
-              <a:defRPr sz="1500">
-                <a:solidFill>
-                  <a:srgbClr val="1E293B"/>
-                </a:solidFill>
-                <a:latin typeface="Calibri"/>
-              </a:defRPr>
-            </a:pPr>
-            <a:r>
-              <a:t>•  Fixed vs variable margin cushion absorbs regional freight volume swings</a:t>
-            </a:r>
-          </a:p>
-        </p:txBody>
-      </p:sp>
-      <p:sp>
-        <p:nvSpPr>
-          <p:cNvPr id="6" name="TextBox 5"/>
+              <a:defRPr sz="1400" b="1">
+                <a:solidFill>
+                  <a:srgbClr val="0F172A"/>
+                </a:solidFill>
+                <a:latin typeface="Calibri"/>
+              </a:defRPr>
+            </a:pPr>
+            <a:r>
+              <a:t>Detention Claims</a:t>
+            </a:r>
+          </a:p>
+          <a:p>
+            <a:pPr>
+              <a:defRPr sz="1100">
+                <a:solidFill>
+                  <a:srgbClr val="64748B"/>
+                </a:solidFill>
+                <a:latin typeface="Calibri"/>
+              </a:defRPr>
+            </a:pPr>
+            <a:r>
+              <a:t>Saved $184,000 in trailer detention fees in 90 days</a:t>
+            </a:r>
+          </a:p>
+        </p:txBody>
+      </p:sp>
+      <p:sp>
+        <p:nvSpPr>
+          <p:cNvPr id="7" name="Rounded Rectangle 6"/>
+          <p:cNvSpPr/>
+          <p:nvPr/>
+        </p:nvSpPr>
+        <p:spPr>
+          <a:xfrm>
+            <a:off x="3474720" y="1920240"/>
+            <a:ext cx="2468880" cy="4114800"/>
+          </a:xfrm>
+          <a:prstGeom prst="roundRect">
+            <a:avLst/>
+          </a:prstGeom>
+          <a:solidFill>
+            <a:srgbClr val="F8FAFC"/>
+          </a:solidFill>
+          <a:ln w="12700">
+            <a:solidFill>
+              <a:srgbClr val="CBD5E1"/>
+            </a:solidFill>
+          </a:ln>
+        </p:spPr>
+        <p:style>
+          <a:lnRef idx="1">
+            <a:schemeClr val="accent1"/>
+          </a:lnRef>
+          <a:fillRef idx="3">
+            <a:schemeClr val="accent1"/>
+          </a:fillRef>
+          <a:effectRef idx="2">
+            <a:schemeClr val="accent1"/>
+          </a:effectRef>
+          <a:fontRef idx="minor">
+            <a:schemeClr val="lt1"/>
+          </a:fontRef>
+        </p:style>
+        <p:txBody>
+          <a:bodyPr rtlCol="0" anchor="ctr"/>
+          <a:lstStyle/>
+          <a:p>
+            <a:pPr algn="ctr"/>
+          </a:p>
+        </p:txBody>
+      </p:sp>
+      <p:sp>
+        <p:nvSpPr>
+          <p:cNvPr id="8" name="TextBox 7"/>
           <p:cNvSpPr txBox="1"/>
           <p:nvPr/>
         </p:nvSpPr>
         <p:spPr>
           <a:xfrm>
-            <a:off x="731520" y="6309360"/>
-            <a:ext cx="10698480" cy="365760"/>
+            <a:off x="3749040" y="2286000"/>
+            <a:ext cx="1920240" cy="3383280"/>
           </a:xfrm>
           <a:prstGeom prst="rect">
             <a:avLst/>
@@ -6626,6 +5455,300 @@
           <a:noFill/>
         </p:spPr>
         <p:txBody>
+          <a:bodyPr wrap="square">
+            <a:spAutoFit/>
+          </a:bodyPr>
+          <a:lstStyle/>
+          <a:p>
+            <a:pPr>
+              <a:spcAft>
+                <a:spcPts val="1000"/>
+              </a:spcAft>
+              <a:defRPr sz="3600" b="1">
+                <a:solidFill>
+                  <a:srgbClr val="2563EB"/>
+                </a:solidFill>
+                <a:latin typeface="Calibri"/>
+              </a:defRPr>
+            </a:pPr>
+            <a:r>
+              <a:t>14 hrs</a:t>
+            </a:r>
+          </a:p>
+          <a:p>
+            <a:pPr>
+              <a:spcAft>
+                <a:spcPts val="800"/>
+              </a:spcAft>
+              <a:defRPr sz="1400" b="1">
+                <a:solidFill>
+                  <a:srgbClr val="0F172A"/>
+                </a:solidFill>
+                <a:latin typeface="Calibri"/>
+              </a:defRPr>
+            </a:pPr>
+            <a:r>
+              <a:t>Weekly Time Saved</a:t>
+            </a:r>
+          </a:p>
+          <a:p>
+            <a:pPr>
+              <a:defRPr sz="1100">
+                <a:solidFill>
+                  <a:srgbClr val="64748B"/>
+                </a:solidFill>
+                <a:latin typeface="Calibri"/>
+              </a:defRPr>
+            </a:pPr>
+            <a:r>
+              <a:t>Saved per dispatcher on phone check-ins and paper filing</a:t>
+            </a:r>
+          </a:p>
+        </p:txBody>
+      </p:sp>
+      <p:sp>
+        <p:nvSpPr>
+          <p:cNvPr id="9" name="Rounded Rectangle 8"/>
+          <p:cNvSpPr/>
+          <p:nvPr/>
+        </p:nvSpPr>
+        <p:spPr>
+          <a:xfrm>
+            <a:off x="6217920" y="1920240"/>
+            <a:ext cx="2468880" cy="4114800"/>
+          </a:xfrm>
+          <a:prstGeom prst="roundRect">
+            <a:avLst/>
+          </a:prstGeom>
+          <a:solidFill>
+            <a:srgbClr val="F8FAFC"/>
+          </a:solidFill>
+          <a:ln w="12700">
+            <a:solidFill>
+              <a:srgbClr val="CBD5E1"/>
+            </a:solidFill>
+          </a:ln>
+        </p:spPr>
+        <p:style>
+          <a:lnRef idx="1">
+            <a:schemeClr val="accent1"/>
+          </a:lnRef>
+          <a:fillRef idx="3">
+            <a:schemeClr val="accent1"/>
+          </a:fillRef>
+          <a:effectRef idx="2">
+            <a:schemeClr val="accent1"/>
+          </a:effectRef>
+          <a:fontRef idx="minor">
+            <a:schemeClr val="lt1"/>
+          </a:fontRef>
+        </p:style>
+        <p:txBody>
+          <a:bodyPr rtlCol="0" anchor="ctr"/>
+          <a:lstStyle/>
+          <a:p>
+            <a:pPr algn="ctr"/>
+          </a:p>
+        </p:txBody>
+      </p:sp>
+      <p:sp>
+        <p:nvSpPr>
+          <p:cNvPr id="10" name="TextBox 9"/>
+          <p:cNvSpPr txBox="1"/>
+          <p:nvPr/>
+        </p:nvSpPr>
+        <p:spPr>
+          <a:xfrm>
+            <a:off x="6492240" y="2286000"/>
+            <a:ext cx="1920240" cy="3383280"/>
+          </a:xfrm>
+          <a:prstGeom prst="rect">
+            <a:avLst/>
+          </a:prstGeom>
+          <a:noFill/>
+        </p:spPr>
+        <p:txBody>
+          <a:bodyPr wrap="square">
+            <a:spAutoFit/>
+          </a:bodyPr>
+          <a:lstStyle/>
+          <a:p>
+            <a:pPr>
+              <a:spcAft>
+                <a:spcPts val="1000"/>
+              </a:spcAft>
+              <a:defRPr sz="3600" b="1">
+                <a:solidFill>
+                  <a:srgbClr val="2563EB"/>
+                </a:solidFill>
+                <a:latin typeface="Calibri"/>
+              </a:defRPr>
+            </a:pPr>
+            <a:r>
+              <a:t>18,400</a:t>
+            </a:r>
+          </a:p>
+          <a:p>
+            <a:pPr>
+              <a:spcAft>
+                <a:spcPts val="800"/>
+              </a:spcAft>
+              <a:defRPr sz="1400" b="1">
+                <a:solidFill>
+                  <a:srgbClr val="0F172A"/>
+                </a:solidFill>
+                <a:latin typeface="Calibri"/>
+              </a:defRPr>
+            </a:pPr>
+            <a:r>
+              <a:t>BOLs Cleared</a:t>
+            </a:r>
+          </a:p>
+          <a:p>
+            <a:pPr>
+              <a:defRPr sz="1100">
+                <a:solidFill>
+                  <a:srgbClr val="64748B"/>
+                </a:solidFill>
+                <a:latin typeface="Calibri"/>
+              </a:defRPr>
+            </a:pPr>
+            <a:r>
+              <a:t>100% digital audit trace with zero disputed shortages</a:t>
+            </a:r>
+          </a:p>
+        </p:txBody>
+      </p:sp>
+      <p:sp>
+        <p:nvSpPr>
+          <p:cNvPr id="11" name="Rounded Rectangle 10"/>
+          <p:cNvSpPr/>
+          <p:nvPr/>
+        </p:nvSpPr>
+        <p:spPr>
+          <a:xfrm>
+            <a:off x="8961120" y="1920240"/>
+            <a:ext cx="2468880" cy="4114800"/>
+          </a:xfrm>
+          <a:prstGeom prst="roundRect">
+            <a:avLst/>
+          </a:prstGeom>
+          <a:solidFill>
+            <a:srgbClr val="F8FAFC"/>
+          </a:solidFill>
+          <a:ln w="12700">
+            <a:solidFill>
+              <a:srgbClr val="CBD5E1"/>
+            </a:solidFill>
+          </a:ln>
+        </p:spPr>
+        <p:style>
+          <a:lnRef idx="1">
+            <a:schemeClr val="accent1"/>
+          </a:lnRef>
+          <a:fillRef idx="3">
+            <a:schemeClr val="accent1"/>
+          </a:fillRef>
+          <a:effectRef idx="2">
+            <a:schemeClr val="accent1"/>
+          </a:effectRef>
+          <a:fontRef idx="minor">
+            <a:schemeClr val="lt1"/>
+          </a:fontRef>
+        </p:style>
+        <p:txBody>
+          <a:bodyPr rtlCol="0" anchor="ctr"/>
+          <a:lstStyle/>
+          <a:p>
+            <a:pPr algn="ctr"/>
+          </a:p>
+        </p:txBody>
+      </p:sp>
+      <p:sp>
+        <p:nvSpPr>
+          <p:cNvPr id="12" name="TextBox 11"/>
+          <p:cNvSpPr txBox="1"/>
+          <p:nvPr/>
+        </p:nvSpPr>
+        <p:spPr>
+          <a:xfrm>
+            <a:off x="9235440" y="2286000"/>
+            <a:ext cx="1920240" cy="3383280"/>
+          </a:xfrm>
+          <a:prstGeom prst="rect">
+            <a:avLst/>
+          </a:prstGeom>
+          <a:noFill/>
+        </p:spPr>
+        <p:txBody>
+          <a:bodyPr wrap="square">
+            <a:spAutoFit/>
+          </a:bodyPr>
+          <a:lstStyle/>
+          <a:p>
+            <a:pPr>
+              <a:spcAft>
+                <a:spcPts val="1000"/>
+              </a:spcAft>
+              <a:defRPr sz="3600" b="1">
+                <a:solidFill>
+                  <a:srgbClr val="2563EB"/>
+                </a:solidFill>
+                <a:latin typeface="Calibri"/>
+              </a:defRPr>
+            </a:pPr>
+            <a:r>
+              <a:t>3.8x</a:t>
+            </a:r>
+          </a:p>
+          <a:p>
+            <a:pPr>
+              <a:spcAft>
+                <a:spcPts val="800"/>
+              </a:spcAft>
+              <a:defRPr sz="1400" b="1">
+                <a:solidFill>
+                  <a:srgbClr val="0F172A"/>
+                </a:solidFill>
+                <a:latin typeface="Calibri"/>
+              </a:defRPr>
+            </a:pPr>
+            <a:r>
+              <a:t>First-Year ROI</a:t>
+            </a:r>
+          </a:p>
+          <a:p>
+            <a:pPr>
+              <a:defRPr sz="1100">
+                <a:solidFill>
+                  <a:srgbClr val="64748B"/>
+                </a:solidFill>
+                <a:latin typeface="Calibri"/>
+              </a:defRPr>
+            </a:pPr>
+            <a:r>
+              <a:t>Platform paid for itself within the first 60 days of go-live</a:t>
+            </a:r>
+          </a:p>
+        </p:txBody>
+      </p:sp>
+      <p:sp>
+        <p:nvSpPr>
+          <p:cNvPr id="13" name="TextBox 12"/>
+          <p:cNvSpPr txBox="1"/>
+          <p:nvPr/>
+        </p:nvSpPr>
+        <p:spPr>
+          <a:xfrm>
+            <a:off x="731520" y="6309360"/>
+            <a:ext cx="10698480" cy="365760"/>
+          </a:xfrm>
+          <a:prstGeom prst="rect">
+            <a:avLst/>
+          </a:prstGeom>
+          <a:noFill/>
+        </p:spPr>
+        <p:txBody>
           <a:bodyPr wrap="none">
             <a:spAutoFit/>
           </a:bodyPr>
@@ -6640,7 +5763,7 @@
               </a:defRPr>
             </a:pPr>
             <a:r>
-              <a:t>Q4 2026 Executive Investor Update — Estella Williams · Slide 5 of 16</a:t>
+              <a:t>Williams Logistics Network · Q4 2026 Executive Investor Update · Slide 5 of 7</a:t>
             </a:r>
           </a:p>
         </p:txBody>
@@ -6740,7 +5863,7 @@
               </a:defRPr>
             </a:pPr>
             <a:r>
-              <a:t>Q4 2026 EXECUTIVE INVESTOR UPDATE — ESTELLA WILLIA</a:t>
+              <a:t>ENTERPRISE PIPELINE &amp; GTM</a:t>
             </a:r>
           </a:p>
           <a:p>
@@ -6753,7 +5876,7 @@
               </a:defRPr>
             </a:pPr>
             <a:r>
-              <a:t>Unit Economics &amp; Customer Acquisition</a:t>
+              <a:t>Enterprise Pipeline Coverage &amp; Distribution Corridors</a:t>
             </a:r>
           </a:p>
           <a:p>
@@ -6769,7 +5892,7 @@
               </a:defRPr>
             </a:pPr>
             <a:r>
-              <a:t>17.5x LTV/CAC Ratio</a:t>
+              <a:t>Strong mid-market carrier density across Texas triangular freight corridors</a:t>
             </a:r>
           </a:p>
         </p:txBody>
@@ -6854,7 +5977,7 @@
               </a:defRPr>
             </a:pPr>
             <a:r>
-              <a:t>•  Blended Customer Acquisition Cost (CAC): $480 per terminal</a:t>
+              <a:t>•  Total Active Sales Pipeline: $3.8M in qualified enterprise opportunities under technical POC review.</a:t>
             </a:r>
           </a:p>
           <a:p>
@@ -6873,7 +5996,7 @@
               </a:defRPr>
             </a:pPr>
             <a:r>
-              <a:t>•  Average Revenue Per Account (ARPU): $507/month ($6,084 annual)</a:t>
+              <a:t>•  Average Enterprise Sales Cycle: 42 calendar days from initial terminal survey to paid production pilot.</a:t>
             </a:r>
           </a:p>
           <a:p>
@@ -6892,7 +6015,7 @@
               </a:defRPr>
             </a:pPr>
             <a:r>
-              <a:t>•  Customer Lifetime Value (LTV): $8,450 based on 4-year retention curve</a:t>
+              <a:t>•  Channel Partnerships: Direct certified integrations with Descartes, SAP TM, Oracle OTM, and Blue Yonder.</a:t>
             </a:r>
           </a:p>
           <a:p>
@@ -6911,7 +6034,7 @@
               </a:defRPr>
             </a:pPr>
             <a:r>
-              <a:t>•  CAC payback period sustained at under 8 months across all sales channels</a:t>
+              <a:t>•  Expansion Motions: 68% of new ARR derived from existing carrier logos adding secondary and tertiary regional terminals.</a:t>
             </a:r>
           </a:p>
         </p:txBody>
@@ -6947,7 +6070,7 @@
               </a:defRPr>
             </a:pPr>
             <a:r>
-              <a:t>Q4 2026 Executive Investor Update — Estella Williams · Slide 6 of 16</a:t>
+              <a:t>Williams Logistics Network · Q4 2026 Executive Investor Update · Slide 6 of 7</a:t>
             </a:r>
           </a:p>
         </p:txBody>
@@ -7047,7 +6170,7 @@
               </a:defRPr>
             </a:pPr>
             <a:r>
-              <a:t>Q4 2026 EXECUTIVE INVESTOR UPDATE — ESTELLA WILLIA</a:t>
+              <a:t>CAPITAL &amp; GOVERNANCE</a:t>
             </a:r>
           </a:p>
           <a:p>
@@ -7060,7 +6183,7 @@
               </a:defRPr>
             </a:pPr>
             <a:r>
-              <a:t>Product Roadmap &amp; Enterprise Moat</a:t>
+              <a:t>Capital Runway, Balance Sheet &amp; Board Resolutions</a:t>
             </a:r>
           </a:p>
           <a:p>
@@ -7076,7 +6199,7 @@
               </a:defRPr>
             </a:pPr>
             <a:r>
-              <a:t>Core Platform Enhancements</a:t>
+              <a:t>Prudent runway management with 24+ months of cash at current growth trajectory</a:t>
             </a:r>
           </a:p>
         </p:txBody>
@@ -7126,176 +6249,25 @@
       </p:sp>
       <p:sp>
         <p:nvSpPr>
-          <p:cNvPr id="5" name="TextBox 4"/>
-          <p:cNvSpPr txBox="1"/>
-          <p:nvPr/>
-        </p:nvSpPr>
-        <p:spPr>
-          <a:xfrm>
-            <a:off x="731520" y="2011680"/>
-            <a:ext cx="10698480" cy="4114800"/>
-          </a:xfrm>
-          <a:prstGeom prst="rect">
-            <a:avLst/>
-          </a:prstGeom>
-          <a:noFill/>
-        </p:spPr>
-        <p:txBody>
-          <a:bodyPr wrap="square">
-            <a:spAutoFit/>
-          </a:bodyPr>
-          <a:lstStyle/>
-          <a:p>
-            <a:pPr>
-              <a:lnSpc>
-                <a:spcPct val="125000"/>
-              </a:lnSpc>
-              <a:spcAft>
-                <a:spcPts val="1400"/>
-              </a:spcAft>
-              <a:defRPr sz="1500">
-                <a:solidFill>
-                  <a:srgbClr val="1E293B"/>
-                </a:solidFill>
-                <a:latin typeface="Calibri"/>
-              </a:defRPr>
-            </a:pPr>
-            <a:r>
-              <a:t>•  Live: Geofenced trailer arrival check-in with multilingual driver SMS</a:t>
-            </a:r>
-          </a:p>
-          <a:p>
-            <a:pPr>
-              <a:lnSpc>
-                <a:spcPct val="125000"/>
-              </a:lnSpc>
-              <a:spcAft>
-                <a:spcPts val="1400"/>
-              </a:spcAft>
-              <a:defRPr sz="1500">
-                <a:solidFill>
-                  <a:srgbClr val="1E293B"/>
-                </a:solidFill>
-                <a:latin typeface="Calibri"/>
-              </a:defRPr>
-            </a:pPr>
-            <a:r>
-              <a:t>•  In Pilot: Real-time bi-directional EDI connectors for SAP TMS and Blue Yonder</a:t>
-            </a:r>
-          </a:p>
-          <a:p>
-            <a:pPr>
-              <a:lnSpc>
-                <a:spcPct val="125000"/>
-              </a:lnSpc>
-              <a:spcAft>
-                <a:spcPts val="1400"/>
-              </a:spcAft>
-              <a:defRPr sz="1500">
-                <a:solidFill>
-                  <a:srgbClr val="1E293B"/>
-                </a:solidFill>
-                <a:latin typeface="Calibri"/>
-              </a:defRPr>
-            </a:pPr>
-            <a:r>
-              <a:t>•  Q1 2027: Predictive dock detention warning engine (patent pending)</a:t>
-            </a:r>
-          </a:p>
-          <a:p>
-            <a:pPr>
-              <a:lnSpc>
-                <a:spcPct val="125000"/>
-              </a:lnSpc>
-              <a:spcAft>
-                <a:spcPts val="1400"/>
-              </a:spcAft>
-              <a:defRPr sz="1500">
-                <a:solidFill>
-                  <a:srgbClr val="1E293B"/>
-                </a:solidFill>
-                <a:latin typeface="Calibri"/>
-              </a:defRPr>
-            </a:pPr>
-            <a:r>
-              <a:t>•  Enterprise single sign-on (SSO) and SOC-2 Type II audit report delivered</a:t>
-            </a:r>
-          </a:p>
-        </p:txBody>
-      </p:sp>
-      <p:sp>
-        <p:nvSpPr>
-          <p:cNvPr id="6" name="TextBox 5"/>
-          <p:cNvSpPr txBox="1"/>
-          <p:nvPr/>
-        </p:nvSpPr>
-        <p:spPr>
-          <a:xfrm>
-            <a:off x="731520" y="6309360"/>
-            <a:ext cx="10698480" cy="365760"/>
-          </a:xfrm>
-          <a:prstGeom prst="rect">
-            <a:avLst/>
-          </a:prstGeom>
-          <a:noFill/>
-        </p:spPr>
-        <p:txBody>
-          <a:bodyPr wrap="none">
-            <a:spAutoFit/>
-          </a:bodyPr>
-          <a:lstStyle/>
-          <a:p>
-            <a:pPr>
-              <a:defRPr sz="900">
-                <a:solidFill>
-                  <a:srgbClr val="94A3B8"/>
-                </a:solidFill>
-                <a:latin typeface="Calibri"/>
-              </a:defRPr>
-            </a:pPr>
-            <a:r>
-              <a:t>Q4 2026 Executive Investor Update — Estella Williams · Slide 7 of 16</a:t>
-            </a:r>
-          </a:p>
-        </p:txBody>
-      </p:sp>
-    </p:spTree>
-  </p:cSld>
-  <p:clrMapOvr>
-    <a:masterClrMapping/>
-  </p:clrMapOvr>
-</p:sld>
-</file>
-
-<file path=ppt/slides/slide8.xml><?xml version="1.0" encoding="utf-8"?>
-<p:sld xmlns:a="http://schemas.openxmlformats.org/drawingml/2006/main" xmlns:p="http://schemas.openxmlformats.org/presentationml/2006/main" xmlns:r="http://schemas.openxmlformats.org/officeDocument/2006/relationships">
-  <p:cSld>
-    <p:spTree>
-      <p:nvGrpSpPr>
-        <p:cNvPr id="1" name=""/>
-        <p:cNvGrpSpPr/>
-        <p:nvPr/>
-      </p:nvGrpSpPr>
-      <p:grpSpPr/>
-      <p:sp>
-        <p:nvSpPr>
-          <p:cNvPr id="2" name="Rectangle 1"/>
+          <p:cNvPr id="5" name="Rounded Rectangle 4"/>
           <p:cNvSpPr/>
           <p:nvPr/>
         </p:nvSpPr>
         <p:spPr>
           <a:xfrm>
-            <a:off x="0" y="0"/>
-            <a:ext cx="12191695" cy="6858000"/>
-          </a:xfrm>
-          <a:prstGeom prst="rect">
+            <a:off x="731520" y="1920240"/>
+            <a:ext cx="3352800" cy="4114800"/>
+          </a:xfrm>
+          <a:prstGeom prst="roundRect">
             <a:avLst/>
           </a:prstGeom>
           <a:solidFill>
-            <a:srgbClr val="FFFFFF"/>
+            <a:srgbClr val="F8FAFC"/>
           </a:solidFill>
-          <a:ln>
-            <a:noFill/>
+          <a:ln w="12700">
+            <a:solidFill>
+              <a:srgbClr val="CBD5E1"/>
+            </a:solidFill>
           </a:ln>
         </p:spPr>
         <p:style>
@@ -7322,14 +6294,14 @@
       </p:sp>
       <p:sp>
         <p:nvSpPr>
-          <p:cNvPr id="3" name="TextBox 2"/>
+          <p:cNvPr id="6" name="TextBox 5"/>
           <p:cNvSpPr txBox="1"/>
           <p:nvPr/>
         </p:nvSpPr>
         <p:spPr>
           <a:xfrm>
-            <a:off x="731520" y="548640"/>
-            <a:ext cx="10698480" cy="1188720"/>
+            <a:off x="1005840" y="2194560"/>
+            <a:ext cx="2804160" cy="3566160"/>
           </a:xfrm>
           <a:prstGeom prst="rect">
             <a:avLst/>
@@ -7344,22 +6316,9 @@
           <a:p>
             <a:pPr>
               <a:spcAft>
-                <a:spcPts val="400"/>
+                <a:spcPts val="1000"/>
               </a:spcAft>
-              <a:defRPr sz="1000" b="1">
-                <a:solidFill>
-                  <a:srgbClr val="2563EB"/>
-                </a:solidFill>
-                <a:latin typeface="Calibri"/>
-              </a:defRPr>
-            </a:pPr>
-            <a:r>
-              <a:t>Q4 2026 EXECUTIVE INVESTOR UPDATE — ESTELLA WILLIA</a:t>
-            </a:r>
-          </a:p>
-          <a:p>
-            <a:pPr>
-              <a:defRPr sz="2200" b="1">
+              <a:defRPr sz="1500" b="1">
                 <a:solidFill>
                   <a:srgbClr val="0F172A"/>
                 </a:solidFill>
@@ -7367,46 +6326,80 @@
               </a:defRPr>
             </a:pPr>
             <a:r>
-              <a:t>Mid-Market Logistics Traction</a:t>
-            </a:r>
-          </a:p>
-          <a:p>
-            <a:pPr>
-              <a:spcBef>
-                <a:spcPts val="200"/>
-              </a:spcBef>
-              <a:defRPr sz="1200">
-                <a:solidFill>
-                  <a:srgbClr val="64748B"/>
-                </a:solidFill>
-                <a:latin typeface="Calibri"/>
-              </a:defRPr>
-            </a:pPr>
-            <a:r>
-              <a:t>Asset-Based Carrier Adoption</a:t>
-            </a:r>
-          </a:p>
-        </p:txBody>
-      </p:sp>
-      <p:sp>
-        <p:nvSpPr>
-          <p:cNvPr id="4" name="Rectangle 3"/>
+              <a:t>Cash Position &amp; Runway</a:t>
+            </a:r>
+          </a:p>
+          <a:p>
+            <a:pPr>
+              <a:spcAft>
+                <a:spcPts val="600"/>
+              </a:spcAft>
+              <a:defRPr sz="1100">
+                <a:solidFill>
+                  <a:srgbClr val="334155"/>
+                </a:solidFill>
+                <a:latin typeface="Calibri"/>
+              </a:defRPr>
+            </a:pPr>
+            <a:r>
+              <a:t>•  Cash in Bank (Silicon Valley Bank / First Citizens): $3,120,000</a:t>
+            </a:r>
+          </a:p>
+          <a:p>
+            <a:pPr>
+              <a:spcAft>
+                <a:spcPts val="600"/>
+              </a:spcAft>
+              <a:defRPr sz="1100">
+                <a:solidFill>
+                  <a:srgbClr val="334155"/>
+                </a:solidFill>
+                <a:latin typeface="Calibri"/>
+              </a:defRPr>
+            </a:pPr>
+            <a:r>
+              <a:t>•  Average Monthly Net Cash Burn: $58,000</a:t>
+            </a:r>
+          </a:p>
+          <a:p>
+            <a:pPr>
+              <a:spcAft>
+                <a:spcPts val="600"/>
+              </a:spcAft>
+              <a:defRPr sz="1100">
+                <a:solidFill>
+                  <a:srgbClr val="334155"/>
+                </a:solidFill>
+                <a:latin typeface="Calibri"/>
+              </a:defRPr>
+            </a:pPr>
+            <a:r>
+              <a:t>•  Runway: 24+ months at zero revenue growth; profitable by Q2 2027</a:t>
+            </a:r>
+          </a:p>
+        </p:txBody>
+      </p:sp>
+      <p:sp>
+        <p:nvSpPr>
+          <p:cNvPr id="7" name="Rounded Rectangle 6"/>
           <p:cNvSpPr/>
           <p:nvPr/>
         </p:nvSpPr>
         <p:spPr>
           <a:xfrm>
-            <a:off x="731520" y="1737360"/>
-            <a:ext cx="10698480" cy="13716"/>
-          </a:xfrm>
-          <a:prstGeom prst="rect">
+            <a:off x="4404360" y="1920240"/>
+            <a:ext cx="3352800" cy="4114800"/>
+          </a:xfrm>
+          <a:prstGeom prst="roundRect">
             <a:avLst/>
           </a:prstGeom>
           <a:solidFill>
-            <a:srgbClr val="E2E8F0"/>
+            <a:srgbClr val="F8FAFC"/>
           </a:solidFill>
-          <a:ln>
-            <a:noFill/>
+          <a:ln w="12700">
+            <a:solidFill>
+              <a:srgbClr val="CBD5E1"/>
+            </a:solidFill>
           </a:ln>
         </p:spPr>
         <p:style>
@@ -7433,14 +6426,14 @@
       </p:sp>
       <p:sp>
         <p:nvSpPr>
-          <p:cNvPr id="5" name="TextBox 4"/>
+          <p:cNvPr id="8" name="TextBox 7"/>
           <p:cNvSpPr txBox="1"/>
           <p:nvPr/>
         </p:nvSpPr>
         <p:spPr>
           <a:xfrm>
-            <a:off x="731520" y="2011680"/>
-            <a:ext cx="10698480" cy="4114800"/>
+            <a:off x="4678680" y="2194560"/>
+            <a:ext cx="2804160" cy="3566160"/>
           </a:xfrm>
           <a:prstGeom prst="rect">
             <a:avLst/>
@@ -7454,155 +6447,91 @@
           <a:lstStyle/>
           <a:p>
             <a:pPr>
-              <a:lnSpc>
-                <a:spcPct val="125000"/>
-              </a:lnSpc>
               <a:spcAft>
-                <a:spcPts val="1400"/>
+                <a:spcPts val="1000"/>
               </a:spcAft>
-              <a:defRPr sz="1500">
-                <a:solidFill>
-                  <a:srgbClr val="1E293B"/>
-                </a:solidFill>
-                <a:latin typeface="Calibri"/>
-              </a:defRPr>
-            </a:pPr>
-            <a:r>
-              <a:t>•  65 live freight terminals across Midwest, Texas, and Pacific Northwest</a:t>
-            </a:r>
-          </a:p>
-          <a:p>
-            <a:pPr>
-              <a:lnSpc>
-                <a:spcPct val="125000"/>
-              </a:lnSpc>
+              <a:defRPr sz="1500" b="1">
+                <a:solidFill>
+                  <a:srgbClr val="0F172A"/>
+                </a:solidFill>
+                <a:latin typeface="Calibri"/>
+              </a:defRPr>
+            </a:pPr>
+            <a:r>
+              <a:t>FY2027 Resource Allocation</a:t>
+            </a:r>
+          </a:p>
+          <a:p>
+            <a:pPr>
               <a:spcAft>
-                <a:spcPts val="1400"/>
+                <a:spcPts val="600"/>
               </a:spcAft>
-              <a:defRPr sz="1500">
-                <a:solidFill>
-                  <a:srgbClr val="1E293B"/>
-                </a:solidFill>
-                <a:latin typeface="Calibri"/>
-              </a:defRPr>
-            </a:pPr>
-            <a:r>
-              <a:t>•  Key win: Apex Cold Storage expanded from 3 to 14 facilities in Q3</a:t>
-            </a:r>
-          </a:p>
-          <a:p>
-            <a:pPr>
-              <a:lnSpc>
-                <a:spcPct val="125000"/>
-              </a:lnSpc>
+              <a:defRPr sz="1100">
+                <a:solidFill>
+                  <a:srgbClr val="334155"/>
+                </a:solidFill>
+                <a:latin typeface="Calibri"/>
+              </a:defRPr>
+            </a:pPr>
+            <a:r>
+              <a:t>•  55% Engineering &amp; Mobile Product Innovation (5 Senior Full-Stack Hires)</a:t>
+            </a:r>
+          </a:p>
+          <a:p>
+            <a:pPr>
               <a:spcAft>
-                <a:spcPts val="1400"/>
+                <a:spcPts val="600"/>
               </a:spcAft>
-              <a:defRPr sz="1500">
-                <a:solidFill>
-                  <a:srgbClr val="1E293B"/>
-                </a:solidFill>
-                <a:latin typeface="Calibri"/>
-              </a:defRPr>
-            </a:pPr>
-            <a:r>
-              <a:t>•  Average customer detention fee savings: $14,800 per terminal per month</a:t>
-            </a:r>
-          </a:p>
-          <a:p>
-            <a:pPr>
-              <a:lnSpc>
-                <a:spcPct val="125000"/>
-              </a:lnSpc>
+              <a:defRPr sz="1100">
+                <a:solidFill>
+                  <a:srgbClr val="334155"/>
+                </a:solidFill>
+                <a:latin typeface="Calibri"/>
+              </a:defRPr>
+            </a:pPr>
+            <a:r>
+              <a:t>•  30% Dedicated Field Enterprise Sales &amp; Solution Architecture</a:t>
+            </a:r>
+          </a:p>
+          <a:p>
+            <a:pPr>
               <a:spcAft>
-                <a:spcPts val="1400"/>
+                <a:spcPts val="600"/>
               </a:spcAft>
-              <a:defRPr sz="1500">
-                <a:solidFill>
-                  <a:srgbClr val="1E293B"/>
-                </a:solidFill>
-                <a:latin typeface="Calibri"/>
-              </a:defRPr>
-            </a:pPr>
-            <a:r>
-              <a:t>•  Frontline dispatcher satisfaction score: 4.9/5 across 840 active operators</a:t>
-            </a:r>
-          </a:p>
-        </p:txBody>
-      </p:sp>
-      <p:sp>
-        <p:nvSpPr>
-          <p:cNvPr id="6" name="TextBox 5"/>
-          <p:cNvSpPr txBox="1"/>
-          <p:nvPr/>
-        </p:nvSpPr>
-        <p:spPr>
-          <a:xfrm>
-            <a:off x="731520" y="6309360"/>
-            <a:ext cx="10698480" cy="365760"/>
-          </a:xfrm>
-          <a:prstGeom prst="rect">
-            <a:avLst/>
-          </a:prstGeom>
-          <a:noFill/>
-        </p:spPr>
-        <p:txBody>
-          <a:bodyPr wrap="none">
-            <a:spAutoFit/>
-          </a:bodyPr>
-          <a:lstStyle/>
-          <a:p>
-            <a:pPr>
-              <a:defRPr sz="900">
-                <a:solidFill>
-                  <a:srgbClr val="94A3B8"/>
-                </a:solidFill>
-                <a:latin typeface="Calibri"/>
-              </a:defRPr>
-            </a:pPr>
-            <a:r>
-              <a:t>Q4 2026 Executive Investor Update — Estella Williams · Slide 8 of 16</a:t>
-            </a:r>
-          </a:p>
-        </p:txBody>
-      </p:sp>
-    </p:spTree>
-  </p:cSld>
-  <p:clrMapOvr>
-    <a:masterClrMapping/>
-  </p:clrMapOvr>
-</p:sld>
-</file>
-
-<file path=ppt/slides/slide9.xml><?xml version="1.0" encoding="utf-8"?>
-<p:sld xmlns:a="http://schemas.openxmlformats.org/drawingml/2006/main" xmlns:p="http://schemas.openxmlformats.org/presentationml/2006/main" xmlns:r="http://schemas.openxmlformats.org/officeDocument/2006/relationships">
-  <p:cSld>
-    <p:spTree>
-      <p:nvGrpSpPr>
-        <p:cNvPr id="1" name=""/>
-        <p:cNvGrpSpPr/>
-        <p:nvPr/>
-      </p:nvGrpSpPr>
-      <p:grpSpPr/>
-      <p:sp>
-        <p:nvSpPr>
-          <p:cNvPr id="2" name="Rectangle 1"/>
+              <a:defRPr sz="1100">
+                <a:solidFill>
+                  <a:srgbClr val="334155"/>
+                </a:solidFill>
+                <a:latin typeface="Calibri"/>
+              </a:defRPr>
+            </a:pPr>
+            <a:r>
+              <a:t>•  15% Information Security, SOC 2 Type II Recertification &amp; G&amp;A</a:t>
+            </a:r>
+          </a:p>
+        </p:txBody>
+      </p:sp>
+      <p:sp>
+        <p:nvSpPr>
+          <p:cNvPr id="9" name="Rounded Rectangle 8"/>
           <p:cNvSpPr/>
           <p:nvPr/>
         </p:nvSpPr>
         <p:spPr>
           <a:xfrm>
-            <a:off x="0" y="0"/>
-            <a:ext cx="12191695" cy="6858000"/>
-          </a:xfrm>
-          <a:prstGeom prst="rect">
+            <a:off x="8077200" y="1920240"/>
+            <a:ext cx="3352800" cy="4114800"/>
+          </a:xfrm>
+          <a:prstGeom prst="roundRect">
             <a:avLst/>
           </a:prstGeom>
           <a:solidFill>
-            <a:srgbClr val="FFFFFF"/>
+            <a:srgbClr val="F8FAFC"/>
           </a:solidFill>
-          <a:ln>
-            <a:noFill/>
+          <a:ln w="12700">
+            <a:solidFill>
+              <a:srgbClr val="CBD5E1"/>
+            </a:solidFill>
           </a:ln>
         </p:spPr>
         <p:style>
@@ -7629,14 +6558,14 @@
       </p:sp>
       <p:sp>
         <p:nvSpPr>
-          <p:cNvPr id="3" name="TextBox 2"/>
+          <p:cNvPr id="10" name="TextBox 9"/>
           <p:cNvSpPr txBox="1"/>
           <p:nvPr/>
         </p:nvSpPr>
         <p:spPr>
           <a:xfrm>
-            <a:off x="731520" y="548640"/>
-            <a:ext cx="10698480" cy="1188720"/>
+            <a:off x="8351520" y="2194560"/>
+            <a:ext cx="2804160" cy="3566160"/>
           </a:xfrm>
           <a:prstGeom prst="rect">
             <a:avLst/>
@@ -7651,22 +6580,9 @@
           <a:p>
             <a:pPr>
               <a:spcAft>
-                <a:spcPts val="400"/>
+                <a:spcPts val="1000"/>
               </a:spcAft>
-              <a:defRPr sz="1000" b="1">
-                <a:solidFill>
-                  <a:srgbClr val="2563EB"/>
-                </a:solidFill>
-                <a:latin typeface="Calibri"/>
-              </a:defRPr>
-            </a:pPr>
-            <a:r>
-              <a:t>Q4 2026 EXECUTIVE INVESTOR UPDATE — ESTELLA WILLIA</a:t>
-            </a:r>
-          </a:p>
-          <a:p>
-            <a:pPr>
-              <a:defRPr sz="2200" b="1">
+              <a:defRPr sz="1500" b="1">
                 <a:solidFill>
                   <a:srgbClr val="0F172A"/>
                 </a:solidFill>
@@ -7674,80 +6590,69 @@
               </a:defRPr>
             </a:pPr>
             <a:r>
-              <a:t>Sales Pipeline &amp; Territory Velocity</a:t>
-            </a:r>
-          </a:p>
-          <a:p>
-            <a:pPr>
-              <a:spcBef>
-                <a:spcPts val="200"/>
-              </a:spcBef>
-              <a:defRPr sz="1200">
-                <a:solidFill>
-                  <a:srgbClr val="64748B"/>
-                </a:solidFill>
-                <a:latin typeface="Calibri"/>
-              </a:defRPr>
-            </a:pPr>
-            <a:r>
-              <a:t>Weighted Pipeline of $1.8M ARR</a:t>
-            </a:r>
-          </a:p>
-        </p:txBody>
-      </p:sp>
-      <p:sp>
-        <p:nvSpPr>
-          <p:cNvPr id="4" name="Rectangle 3"/>
-          <p:cNvSpPr/>
-          <p:nvPr/>
-        </p:nvSpPr>
-        <p:spPr>
-          <a:xfrm>
-            <a:off x="731520" y="1737360"/>
-            <a:ext cx="10698480" cy="13716"/>
-          </a:xfrm>
-          <a:prstGeom prst="rect">
-            <a:avLst/>
-          </a:prstGeom>
-          <a:solidFill>
-            <a:srgbClr val="E2E8F0"/>
-          </a:solidFill>
-          <a:ln>
-            <a:noFill/>
-          </a:ln>
-        </p:spPr>
-        <p:style>
-          <a:lnRef idx="1">
-            <a:schemeClr val="accent1"/>
-          </a:lnRef>
-          <a:fillRef idx="3">
-            <a:schemeClr val="accent1"/>
-          </a:fillRef>
-          <a:effectRef idx="2">
-            <a:schemeClr val="accent1"/>
-          </a:effectRef>
-          <a:fontRef idx="minor">
-            <a:schemeClr val="lt1"/>
-          </a:fontRef>
-        </p:style>
-        <p:txBody>
-          <a:bodyPr rtlCol="0" anchor="ctr"/>
-          <a:lstStyle/>
-          <a:p>
-            <a:pPr algn="ctr"/>
-          </a:p>
-        </p:txBody>
-      </p:sp>
-      <p:sp>
-        <p:nvSpPr>
-          <p:cNvPr id="5" name="TextBox 4"/>
+              <a:t>Board Action Items Requested</a:t>
+            </a:r>
+          </a:p>
+          <a:p>
+            <a:pPr>
+              <a:spcAft>
+                <a:spcPts val="600"/>
+              </a:spcAft>
+              <a:defRPr sz="1100">
+                <a:solidFill>
+                  <a:srgbClr val="334155"/>
+                </a:solidFill>
+                <a:latin typeface="Calibri"/>
+              </a:defRPr>
+            </a:pPr>
+            <a:r>
+              <a:t>•  Formal adoption of FY 2027 Operating Budget &amp; Headcount Plan</a:t>
+            </a:r>
+          </a:p>
+          <a:p>
+            <a:pPr>
+              <a:spcAft>
+                <a:spcPts val="600"/>
+              </a:spcAft>
+              <a:defRPr sz="1100">
+                <a:solidFill>
+                  <a:srgbClr val="334155"/>
+                </a:solidFill>
+                <a:latin typeface="Calibri"/>
+              </a:defRPr>
+            </a:pPr>
+            <a:r>
+              <a:t>•  Approval of 3% Employee Option Pool expansion for executive hires</a:t>
+            </a:r>
+          </a:p>
+          <a:p>
+            <a:pPr>
+              <a:spcAft>
+                <a:spcPts val="600"/>
+              </a:spcAft>
+              <a:defRPr sz="1100">
+                <a:solidFill>
+                  <a:srgbClr val="334155"/>
+                </a:solidFill>
+                <a:latin typeface="Calibri"/>
+              </a:defRPr>
+            </a:pPr>
+            <a:r>
+              <a:t>•  Confirmation of Q1 2027 Board Meeting Date (January 22, 2027)</a:t>
+            </a:r>
+          </a:p>
+        </p:txBody>
+      </p:sp>
+      <p:sp>
+        <p:nvSpPr>
+          <p:cNvPr id="11" name="TextBox 10"/>
           <p:cNvSpPr txBox="1"/>
           <p:nvPr/>
         </p:nvSpPr>
         <p:spPr>
           <a:xfrm>
-            <a:off x="731520" y="2011680"/>
-            <a:ext cx="10698480" cy="4114800"/>
+            <a:off x="731520" y="6309360"/>
+            <a:ext cx="10698480" cy="365760"/>
           </a:xfrm>
           <a:prstGeom prst="rect">
             <a:avLst/>
@@ -7755,105 +6660,6 @@
           <a:noFill/>
         </p:spPr>
         <p:txBody>
-          <a:bodyPr wrap="square">
-            <a:spAutoFit/>
-          </a:bodyPr>
-          <a:lstStyle/>
-          <a:p>
-            <a:pPr>
-              <a:lnSpc>
-                <a:spcPct val="125000"/>
-              </a:lnSpc>
-              <a:spcAft>
-                <a:spcPts val="1400"/>
-              </a:spcAft>
-              <a:defRPr sz="1500">
-                <a:solidFill>
-                  <a:srgbClr val="1E293B"/>
-                </a:solidFill>
-                <a:latin typeface="Calibri"/>
-              </a:defRPr>
-            </a:pPr>
-            <a:r>
-              <a:t>•  65 qualified opportunities in active sales evaluation stages</a:t>
-            </a:r>
-          </a:p>
-          <a:p>
-            <a:pPr>
-              <a:lnSpc>
-                <a:spcPct val="125000"/>
-              </a:lnSpc>
-              <a:spcAft>
-                <a:spcPts val="1400"/>
-              </a:spcAft>
-              <a:defRPr sz="1500">
-                <a:solidFill>
-                  <a:srgbClr val="1E293B"/>
-                </a:solidFill>
-                <a:latin typeface="Calibri"/>
-              </a:defRPr>
-            </a:pPr>
-            <a:r>
-              <a:t>•  Average enterprise sales cycle compressed from 64 to 38 days</a:t>
-            </a:r>
-          </a:p>
-          <a:p>
-            <a:pPr>
-              <a:lnSpc>
-                <a:spcPct val="125000"/>
-              </a:lnSpc>
-              <a:spcAft>
-                <a:spcPts val="1400"/>
-              </a:spcAft>
-              <a:defRPr sz="1500">
-                <a:solidFill>
-                  <a:srgbClr val="1E293B"/>
-                </a:solidFill>
-                <a:latin typeface="Calibri"/>
-              </a:defRPr>
-            </a:pPr>
-            <a:r>
-              <a:t>•  Inbound demo conversion rate: 38% from organic search and industry referrals</a:t>
-            </a:r>
-          </a:p>
-          <a:p>
-            <a:pPr>
-              <a:lnSpc>
-                <a:spcPct val="125000"/>
-              </a:lnSpc>
-              <a:spcAft>
-                <a:spcPts val="1400"/>
-              </a:spcAft>
-              <a:defRPr sz="1500">
-                <a:solidFill>
-                  <a:srgbClr val="1E293B"/>
-                </a:solidFill>
-                <a:latin typeface="Calibri"/>
-              </a:defRPr>
-            </a:pPr>
-            <a:r>
-              <a:t>•  Channel partner distribution agreements signed with 2 major TMS consultancies</a:t>
-            </a:r>
-          </a:p>
-        </p:txBody>
-      </p:sp>
-      <p:sp>
-        <p:nvSpPr>
-          <p:cNvPr id="6" name="TextBox 5"/>
-          <p:cNvSpPr txBox="1"/>
-          <p:nvPr/>
-        </p:nvSpPr>
-        <p:spPr>
-          <a:xfrm>
-            <a:off x="731520" y="6309360"/>
-            <a:ext cx="10698480" cy="365760"/>
-          </a:xfrm>
-          <a:prstGeom prst="rect">
-            <a:avLst/>
-          </a:prstGeom>
-          <a:noFill/>
-        </p:spPr>
-        <p:txBody>
           <a:bodyPr wrap="none">
             <a:spAutoFit/>
           </a:bodyPr>
@@ -7868,7 +6674,7 @@
               </a:defRPr>
             </a:pPr>
             <a:r>
-              <a:t>Q4 2026 Executive Investor Update — Estella Williams · Slide 9 of 16</a:t>
+              <a:t>Williams Logistics Network · Q4 2026 Executive Investor Update · Slide 7 of 7</a:t>
             </a:r>
           </a:p>
         </p:txBody>
